--- a/courses/research-in-finance/lectures/lecture-04-academic-publishing/slides.pptx
+++ b/courses/research-in-finance/lectures/lecture-04-academic-publishing/slides.pptx
@@ -5,7 +5,7 @@
     <p:sldMasterId id="2147483648" r:id="rId1"/>
   </p:sldMasterIdLst>
   <p:notesMasterIdLst>
-    <p:notesMasterId r:id="rId49"/>
+    <p:notesMasterId r:id="rId50"/>
   </p:notesMasterIdLst>
   <p:sldIdLst>
     <p:sldId id="256" r:id="rId2"/>
@@ -55,6 +55,7 @@
     <p:sldId id="300" r:id="rId46"/>
     <p:sldId id="301" r:id="rId47"/>
     <p:sldId id="302" r:id="rId48"/>
+    <p:sldId id="303" r:id="rId49"/>
   </p:sldIdLst>
   <p:sldSz cx="9144000" cy="5143500" type="screen16x9"/>
   <p:notesSz cx="6858000" cy="9144000"/>
@@ -10691,6 +10692,115 @@
 </p:sld>
 </file>
 
+<file path=ppt/slides/slide48.xml><?xml version="1.0" encoding="utf-8"?>
+<p:sld xmlns:a="http://schemas.openxmlformats.org/drawingml/2006/main" xmlns:r="http://schemas.openxmlformats.org/officeDocument/2006/relationships" xmlns:p="http://schemas.openxmlformats.org/presentationml/2006/main">
+  <p:cSld>
+    <p:spTree>
+      <p:nvGrpSpPr>
+        <p:cNvPr id="1" name=""/>
+        <p:cNvGrpSpPr/>
+        <p:nvPr/>
+      </p:nvGrpSpPr>
+      <p:grpSpPr>
+        <a:xfrm>
+          <a:off x="0" y="0"/>
+          <a:ext cx="0" cy="0"/>
+          <a:chOff x="0" y="0"/>
+          <a:chExt cx="0" cy="0"/>
+        </a:xfrm>
+      </p:grpSpPr>
+      <p:sp>
+        <p:nvSpPr>
+          <p:cNvPr id="2" name="Title 1"/>
+          <p:cNvSpPr>
+            <a:spLocks noGrp="1"/>
+          </p:cNvSpPr>
+          <p:nvPr>
+            <p:ph type="title"/>
+          </p:nvPr>
+        </p:nvSpPr>
+        <p:spPr/>
+        <p:txBody>
+          <a:bodyPr/>
+          <a:lstStyle/>
+          <a:p>
+            <a:pPr lvl="0" indent="0" marL="0">
+              <a:buNone/>
+            </a:pPr>
+            <a:r>
+              <a:rPr/>
+              <a:t>References</a:t>
+            </a:r>
+          </a:p>
+        </p:txBody>
+      </p:sp>
+      <p:sp>
+        <p:nvSpPr>
+          <p:cNvPr id="3" name="Content Placeholder 2"/>
+          <p:cNvSpPr>
+            <a:spLocks noGrp="1"/>
+          </p:cNvSpPr>
+          <p:nvPr>
+            <p:ph idx="1"/>
+          </p:nvPr>
+        </p:nvSpPr>
+        <p:spPr/>
+        <p:txBody>
+          <a:bodyPr/>
+          <a:lstStyle/>
+          <a:p>
+            <a:pPr lvl="0" indent="0" marL="0">
+              <a:buNone/>
+            </a:pPr>
+            <a:r>
+              <a:rPr/>
+              <a:t>Angrist, Joshua D., and Jörn-Steffen Pischke. 2009. </a:t>
+            </a:r>
+            <a:r>
+              <a:rPr i="1"/>
+              <a:t>Mostly Harmless Econometrics: An Empiricist’s Companion</a:t>
+            </a:r>
+            <a:r>
+              <a:rPr/>
+              <a:t>. Princeton, NJ: Princeton University Press. </a:t>
+            </a:r>
+            <a:r>
+              <a:rPr>
+                <a:hlinkClick r:id="rId2"/>
+              </a:rPr>
+              <a:t>https://press.princeton.edu/books/paperback/9780691120355/mostly-harmless-econometrics</a:t>
+            </a:r>
+            <a:r>
+              <a:rPr/>
+              <a:t>.</a:t>
+            </a:r>
+          </a:p>
+          <a:p>
+            <a:pPr lvl="0" indent="0" marL="0">
+              <a:buNone/>
+            </a:pPr>
+            <a:r>
+              <a:rPr/>
+              <a:t>Cochrane, John H. 2005. “Writing Tips for Ph.D. Students.” </a:t>
+            </a:r>
+            <a:r>
+              <a:rPr>
+                <a:hlinkClick r:id="rId3"/>
+              </a:rPr>
+              <a:t>https://www.johnhcochrane.com/research-all/writing-tips-for-phd-students</a:t>
+            </a:r>
+            <a:r>
+              <a:rPr/>
+              <a:t>.</a:t>
+            </a:r>
+          </a:p>
+        </p:txBody>
+      </p:sp>
+    </p:spTree>
+  </p:cSld>
+</p:sld>
+</file>
+
 <file path=ppt/slides/slide5.xml><?xml version="1.0" encoding="utf-8"?>
 <p:sld xmlns:a="http://schemas.openxmlformats.org/drawingml/2006/main" xmlns:r="http://schemas.openxmlformats.org/officeDocument/2006/relationships" xmlns:p="http://schemas.openxmlformats.org/presentationml/2006/main">
   <p:cSld>
@@ -11334,7 +11444,7 @@
             </a:r>
             <a:r>
               <a:rPr sz="2000"/>
-              <a:t> — Angrist &amp; Pischke.</a:t>
+              <a:t> (Angrist and Pischke 2009).</a:t>
             </a:r>
           </a:p>
         </p:txBody>
@@ -11459,7 +11569,7 @@
             </a:r>
             <a:r>
               <a:rPr sz="2000"/>
-              <a:t> (Cochrane) — available on the course Moodle.</a:t>
+              <a:t> (Cochrane 2005) — available on the course Moodle.</a:t>
             </a:r>
           </a:p>
         </p:txBody>

--- a/courses/research-in-finance/lectures/lecture-04-academic-publishing/slides.pptx
+++ b/courses/research-in-finance/lectures/lecture-04-academic-publishing/slides.pptx
@@ -7,57 +7,7 @@
   <p:notesMasterIdLst>
     <p:notesMasterId r:id="rId50"/>
   </p:notesMasterIdLst>
-  <p:sldIdLst>
-    <p:sldId id="256" r:id="rId2"/>
-    <p:sldId id="257" r:id="rId3"/>
-    <p:sldId id="258" r:id="rId4"/>
-    <p:sldId id="259" r:id="rId5"/>
-    <p:sldId id="260" r:id="rId6"/>
-    <p:sldId id="261" r:id="rId7"/>
-    <p:sldId id="262" r:id="rId8"/>
-    <p:sldId id="263" r:id="rId9"/>
-    <p:sldId id="264" r:id="rId10"/>
-    <p:sldId id="265" r:id="rId11"/>
-    <p:sldId id="266" r:id="rId12"/>
-    <p:sldId id="267" r:id="rId13"/>
-    <p:sldId id="268" r:id="rId14"/>
-    <p:sldId id="269" r:id="rId15"/>
-    <p:sldId id="270" r:id="rId16"/>
-    <p:sldId id="271" r:id="rId17"/>
-    <p:sldId id="272" r:id="rId18"/>
-    <p:sldId id="273" r:id="rId19"/>
-    <p:sldId id="274" r:id="rId20"/>
-    <p:sldId id="275" r:id="rId21"/>
-    <p:sldId id="276" r:id="rId22"/>
-    <p:sldId id="277" r:id="rId23"/>
-    <p:sldId id="278" r:id="rId24"/>
-    <p:sldId id="279" r:id="rId25"/>
-    <p:sldId id="280" r:id="rId26"/>
-    <p:sldId id="281" r:id="rId27"/>
-    <p:sldId id="282" r:id="rId28"/>
-    <p:sldId id="283" r:id="rId29"/>
-    <p:sldId id="284" r:id="rId30"/>
-    <p:sldId id="285" r:id="rId31"/>
-    <p:sldId id="286" r:id="rId32"/>
-    <p:sldId id="287" r:id="rId33"/>
-    <p:sldId id="288" r:id="rId34"/>
-    <p:sldId id="289" r:id="rId35"/>
-    <p:sldId id="290" r:id="rId36"/>
-    <p:sldId id="291" r:id="rId37"/>
-    <p:sldId id="292" r:id="rId38"/>
-    <p:sldId id="293" r:id="rId39"/>
-    <p:sldId id="294" r:id="rId40"/>
-    <p:sldId id="295" r:id="rId41"/>
-    <p:sldId id="296" r:id="rId42"/>
-    <p:sldId id="297" r:id="rId43"/>
-    <p:sldId id="298" r:id="rId44"/>
-    <p:sldId id="299" r:id="rId45"/>
-    <p:sldId id="300" r:id="rId46"/>
-    <p:sldId id="301" r:id="rId47"/>
-    <p:sldId id="302" r:id="rId48"/>
-    <p:sldId id="303" r:id="rId49"/>
-  </p:sldIdLst>
-  <p:sldSz cx="9144000" cy="5143500" type="screen16x9"/>
+  <p:sldSz cx="12191695" cy="6858000" type="screen4x3"/>
   <p:notesSz cx="6858000" cy="9144000"/>
   <p:defaultTextStyle>
     <a:defPPr>
@@ -154,22 +104,6 @@
       </a:defRPr>
     </a:lvl9pPr>
   </p:defaultTextStyle>
-  <p:extLst>
-    <p:ext uri="{EFAFB233-063F-42B5-8137-9DF3F51BA10A}">
-      <p15:sldGuideLst xmlns:p15="http://schemas.microsoft.com/office/powerpoint/2012/main">
-        <p15:guide id="1" orient="horz" pos="1620" userDrawn="1">
-          <p15:clr>
-            <a:srgbClr val="A4A3A4"/>
-          </p15:clr>
-        </p15:guide>
-        <p15:guide id="2" pos="2880" userDrawn="1">
-          <p15:clr>
-            <a:srgbClr val="A4A3A4"/>
-          </p15:clr>
-        </p15:guide>
-      </p15:sldGuideLst>
-    </p:ext>
-  </p:extLst>
 </p:presentation>
 </file>
 
@@ -633,8 +567,8 @@
         </p:nvSpPr>
         <p:spPr>
           <a:xfrm>
-            <a:off x="685800" y="1597819"/>
-            <a:ext cx="7772400" cy="1102519"/>
+            <a:off x="685800" y="2130425"/>
+            <a:ext cx="7772400" cy="1470025"/>
           </a:xfrm>
         </p:spPr>
         <p:txBody>
@@ -642,9 +576,14 @@
           <a:lstStyle/>
           <a:p>
             <a:r>
-              <a:rPr lang="en-US"/>
+              <a:rPr lang="en-US" smtClean="0">
+                <a:solidFill>
+                  <a:srgbClr val="111111"/>
+                </a:solidFill>
+              </a:rPr>
               <a:t>Click to edit Master title style</a:t>
             </a:r>
+            <a:endParaRPr lang="en-US"/>
           </a:p>
         </p:txBody>
       </p:sp>
@@ -660,8 +599,8 @@
         </p:nvSpPr>
         <p:spPr>
           <a:xfrm>
-            <a:off x="1371600" y="2914650"/>
-            <a:ext cx="6400800" cy="1314450"/>
+            <a:off x="1371600" y="3886200"/>
+            <a:ext cx="6400800" cy="1752600"/>
           </a:xfrm>
         </p:spPr>
         <p:txBody>
@@ -671,98 +610,85 @@
               <a:buNone/>
               <a:defRPr>
                 <a:solidFill>
-                  <a:schemeClr val="tx1">
-                    <a:tint val="75000"/>
-                  </a:schemeClr>
+                  <a:srgbClr val="111111"/>
                 </a:solidFill>
               </a:defRPr>
             </a:lvl1pPr>
-            <a:lvl2pPr marL="342900" indent="0" algn="ctr">
+            <a:lvl2pPr marL="457200" indent="0" algn="ctr">
               <a:buNone/>
               <a:defRPr>
                 <a:solidFill>
-                  <a:schemeClr val="tx1">
-                    <a:tint val="75000"/>
-                  </a:schemeClr>
+                  <a:srgbClr val="111111"/>
                 </a:solidFill>
               </a:defRPr>
             </a:lvl2pPr>
-            <a:lvl3pPr marL="685800" indent="0" algn="ctr">
+            <a:lvl3pPr marL="914400" indent="0" algn="ctr">
               <a:buNone/>
               <a:defRPr>
                 <a:solidFill>
-                  <a:schemeClr val="tx1">
-                    <a:tint val="75000"/>
-                  </a:schemeClr>
+                  <a:srgbClr val="111111"/>
                 </a:solidFill>
               </a:defRPr>
             </a:lvl3pPr>
-            <a:lvl4pPr marL="1028700" indent="0" algn="ctr">
+            <a:lvl4pPr marL="1371600" indent="0" algn="ctr">
               <a:buNone/>
               <a:defRPr>
                 <a:solidFill>
-                  <a:schemeClr val="tx1">
-                    <a:tint val="75000"/>
-                  </a:schemeClr>
+                  <a:srgbClr val="111111"/>
                 </a:solidFill>
               </a:defRPr>
             </a:lvl4pPr>
-            <a:lvl5pPr marL="1371600" indent="0" algn="ctr">
+            <a:lvl5pPr marL="1828800" indent="0" algn="ctr">
               <a:buNone/>
               <a:defRPr>
                 <a:solidFill>
-                  <a:schemeClr val="tx1">
-                    <a:tint val="75000"/>
-                  </a:schemeClr>
+                  <a:srgbClr val="111111"/>
                 </a:solidFill>
               </a:defRPr>
             </a:lvl5pPr>
-            <a:lvl6pPr marL="1714500" indent="0" algn="ctr">
+            <a:lvl6pPr marL="2286000" indent="0" algn="ctr">
               <a:buNone/>
               <a:defRPr>
                 <a:solidFill>
-                  <a:schemeClr val="tx1">
-                    <a:tint val="75000"/>
-                  </a:schemeClr>
+                  <a:srgbClr val="111111"/>
                 </a:solidFill>
               </a:defRPr>
             </a:lvl6pPr>
-            <a:lvl7pPr marL="2057400" indent="0" algn="ctr">
+            <a:lvl7pPr marL="2743200" indent="0" algn="ctr">
               <a:buNone/>
               <a:defRPr>
                 <a:solidFill>
-                  <a:schemeClr val="tx1">
-                    <a:tint val="75000"/>
-                  </a:schemeClr>
+                  <a:srgbClr val="111111"/>
                 </a:solidFill>
               </a:defRPr>
             </a:lvl7pPr>
-            <a:lvl8pPr marL="2400300" indent="0" algn="ctr">
+            <a:lvl8pPr marL="3200400" indent="0" algn="ctr">
               <a:buNone/>
               <a:defRPr>
                 <a:solidFill>
-                  <a:schemeClr val="tx1">
-                    <a:tint val="75000"/>
-                  </a:schemeClr>
+                  <a:srgbClr val="111111"/>
                 </a:solidFill>
               </a:defRPr>
             </a:lvl8pPr>
-            <a:lvl9pPr marL="2743200" indent="0" algn="ctr">
+            <a:lvl9pPr marL="3657600" indent="0" algn="ctr">
               <a:buNone/>
               <a:defRPr>
                 <a:solidFill>
-                  <a:schemeClr val="tx1">
-                    <a:tint val="75000"/>
-                  </a:schemeClr>
+                  <a:srgbClr val="111111"/>
                 </a:solidFill>
               </a:defRPr>
             </a:lvl9pPr>
           </a:lstStyle>
           <a:p>
             <a:r>
-              <a:rPr lang="en-US"/>
+              <a:rPr lang="en-US" smtClean="0">
+                <a:solidFill>
+                  <a:srgbClr val="111111"/>
+                </a:solidFill>
+              </a:rPr>
               <a:t>Click to edit Master subtitle style</a:t>
             </a:r>
+            <a:endParaRPr lang="en-US"/>
           </a:p>
         </p:txBody>
       </p:sp>
@@ -781,9 +707,13 @@
           <a:bodyPr/>
           <a:lstStyle/>
           <a:p>
-            <a:fld id="{241EB5C9-1307-BA42-ABA2-0BC069CD8E7F}" type="datetimeFigureOut">
-              <a:rPr lang="en-US" smtClean="0"/>
-              <a:t>1/2/22</a:t>
+            <a:fld id="{5BCAD085-E8A6-8845-BD4E-CB4CCA059FC4}" type="datetimeFigureOut">
+              <a:rPr lang="en-US" smtClean="0">
+                <a:solidFill>
+                  <a:srgbClr val="111111"/>
+                </a:solidFill>
+              </a:rPr>
+              <a:t>1/27/13</a:t>
             </a:fld>
             <a:endParaRPr lang="en-US"/>
           </a:p>
@@ -823,8 +753,12 @@
           <a:bodyPr/>
           <a:lstStyle/>
           <a:p>
-            <a:fld id="{C5EF2332-01BF-834F-8236-50238282D533}" type="slidenum">
-              <a:rPr lang="en-US" smtClean="0"/>
+            <a:fld id="{C1FF6DA9-008F-8B48-92A6-B652298478BF}" type="slidenum">
+              <a:rPr lang="en-US" smtClean="0">
+                <a:solidFill>
+                  <a:srgbClr val="111111"/>
+                </a:solidFill>
+              </a:rPr>
               <a:t>‹#›</a:t>
             </a:fld>
             <a:endParaRPr lang="en-US"/>
@@ -834,7 +768,7 @@
     </p:spTree>
     <p:extLst>
       <p:ext uri="{BB962C8B-B14F-4D97-AF65-F5344CB8AC3E}">
-        <p14:creationId xmlns:p14="http://schemas.microsoft.com/office/powerpoint/2010/main" val="1444357513"/>
+        <p14:creationId xmlns:p14="http://schemas.microsoft.com/office/powerpoint/2010/main" val="3168075583"/>
       </p:ext>
     </p:extLst>
   </p:cSld>
@@ -877,9 +811,14 @@
           <a:lstStyle/>
           <a:p>
             <a:r>
-              <a:rPr lang="en-US"/>
+              <a:rPr lang="en-US" smtClean="0">
+                <a:solidFill>
+                  <a:srgbClr val="111111"/>
+                </a:solidFill>
+              </a:rPr>
               <a:t>Click to edit Master title style</a:t>
             </a:r>
+            <a:endParaRPr lang="en-US"/>
           </a:p>
         </p:txBody>
       </p:sp>
@@ -900,37 +839,58 @@
           <a:p>
             <a:pPr lvl="0"/>
             <a:r>
-              <a:rPr lang="en-US"/>
+              <a:rPr lang="en-US" smtClean="0">
+                <a:solidFill>
+                  <a:srgbClr val="111111"/>
+                </a:solidFill>
+              </a:rPr>
               <a:t>Click to edit Master text styles</a:t>
             </a:r>
           </a:p>
           <a:p>
             <a:pPr lvl="1"/>
             <a:r>
-              <a:rPr lang="en-US"/>
+              <a:rPr lang="en-US" smtClean="0">
+                <a:solidFill>
+                  <a:srgbClr val="111111"/>
+                </a:solidFill>
+              </a:rPr>
               <a:t>Second level</a:t>
             </a:r>
           </a:p>
           <a:p>
             <a:pPr lvl="2"/>
             <a:r>
-              <a:rPr lang="en-US"/>
+              <a:rPr lang="en-US" smtClean="0">
+                <a:solidFill>
+                  <a:srgbClr val="111111"/>
+                </a:solidFill>
+              </a:rPr>
               <a:t>Third level</a:t>
             </a:r>
           </a:p>
           <a:p>
             <a:pPr lvl="3"/>
             <a:r>
-              <a:rPr lang="en-US"/>
+              <a:rPr lang="en-US" smtClean="0">
+                <a:solidFill>
+                  <a:srgbClr val="111111"/>
+                </a:solidFill>
+              </a:rPr>
               <a:t>Fourth level</a:t>
             </a:r>
           </a:p>
           <a:p>
             <a:pPr lvl="4"/>
             <a:r>
-              <a:rPr lang="en-US"/>
+              <a:rPr lang="en-US" smtClean="0">
+                <a:solidFill>
+                  <a:srgbClr val="111111"/>
+                </a:solidFill>
+              </a:rPr>
               <a:t>Fifth level</a:t>
             </a:r>
+            <a:endParaRPr lang="en-US"/>
           </a:p>
         </p:txBody>
       </p:sp>
@@ -949,9 +909,13 @@
           <a:bodyPr/>
           <a:lstStyle/>
           <a:p>
-            <a:fld id="{241EB5C9-1307-BA42-ABA2-0BC069CD8E7F}" type="datetimeFigureOut">
-              <a:rPr lang="en-US" smtClean="0"/>
-              <a:t>1/2/22</a:t>
+            <a:fld id="{5BCAD085-E8A6-8845-BD4E-CB4CCA059FC4}" type="datetimeFigureOut">
+              <a:rPr lang="en-US" smtClean="0">
+                <a:solidFill>
+                  <a:srgbClr val="111111"/>
+                </a:solidFill>
+              </a:rPr>
+              <a:t>1/27/13</a:t>
             </a:fld>
             <a:endParaRPr lang="en-US"/>
           </a:p>
@@ -991,8 +955,12 @@
           <a:bodyPr/>
           <a:lstStyle/>
           <a:p>
-            <a:fld id="{C5EF2332-01BF-834F-8236-50238282D533}" type="slidenum">
-              <a:rPr lang="en-US" smtClean="0"/>
+            <a:fld id="{C1FF6DA9-008F-8B48-92A6-B652298478BF}" type="slidenum">
+              <a:rPr lang="en-US" smtClean="0">
+                <a:solidFill>
+                  <a:srgbClr val="111111"/>
+                </a:solidFill>
+              </a:rPr>
               <a:t>‹#›</a:t>
             </a:fld>
             <a:endParaRPr lang="en-US"/>
@@ -1002,7 +970,7 @@
     </p:spTree>
     <p:extLst>
       <p:ext uri="{BB962C8B-B14F-4D97-AF65-F5344CB8AC3E}">
-        <p14:creationId xmlns:p14="http://schemas.microsoft.com/office/powerpoint/2010/main" val="313914798"/>
+        <p14:creationId xmlns:p14="http://schemas.microsoft.com/office/powerpoint/2010/main" val="2910927964"/>
       </p:ext>
     </p:extLst>
   </p:cSld>
@@ -1041,8 +1009,8 @@
         </p:nvSpPr>
         <p:spPr>
           <a:xfrm>
-            <a:off x="6629400" y="205979"/>
-            <a:ext cx="2057400" cy="4388644"/>
+            <a:off x="6629400" y="274638"/>
+            <a:ext cx="2057400" cy="5851525"/>
           </a:xfrm>
         </p:spPr>
         <p:txBody>
@@ -1050,9 +1018,14 @@
           <a:lstStyle/>
           <a:p>
             <a:r>
-              <a:rPr lang="en-US"/>
+              <a:rPr lang="en-US" smtClean="0">
+                <a:solidFill>
+                  <a:srgbClr val="111111"/>
+                </a:solidFill>
+              </a:rPr>
               <a:t>Click to edit Master title style</a:t>
             </a:r>
+            <a:endParaRPr lang="en-US"/>
           </a:p>
         </p:txBody>
       </p:sp>
@@ -1068,8 +1041,8 @@
         </p:nvSpPr>
         <p:spPr>
           <a:xfrm>
-            <a:off x="457200" y="205979"/>
-            <a:ext cx="6019800" cy="4388644"/>
+            <a:off x="457200" y="274638"/>
+            <a:ext cx="6019800" cy="5851525"/>
           </a:xfrm>
         </p:spPr>
         <p:txBody>
@@ -1078,37 +1051,58 @@
           <a:p>
             <a:pPr lvl="0"/>
             <a:r>
-              <a:rPr lang="en-US"/>
+              <a:rPr lang="en-US" smtClean="0">
+                <a:solidFill>
+                  <a:srgbClr val="111111"/>
+                </a:solidFill>
+              </a:rPr>
               <a:t>Click to edit Master text styles</a:t>
             </a:r>
           </a:p>
           <a:p>
             <a:pPr lvl="1"/>
             <a:r>
-              <a:rPr lang="en-US"/>
+              <a:rPr lang="en-US" smtClean="0">
+                <a:solidFill>
+                  <a:srgbClr val="111111"/>
+                </a:solidFill>
+              </a:rPr>
               <a:t>Second level</a:t>
             </a:r>
           </a:p>
           <a:p>
             <a:pPr lvl="2"/>
             <a:r>
-              <a:rPr lang="en-US"/>
+              <a:rPr lang="en-US" smtClean="0">
+                <a:solidFill>
+                  <a:srgbClr val="111111"/>
+                </a:solidFill>
+              </a:rPr>
               <a:t>Third level</a:t>
             </a:r>
           </a:p>
           <a:p>
             <a:pPr lvl="3"/>
             <a:r>
-              <a:rPr lang="en-US"/>
+              <a:rPr lang="en-US" smtClean="0">
+                <a:solidFill>
+                  <a:srgbClr val="111111"/>
+                </a:solidFill>
+              </a:rPr>
               <a:t>Fourth level</a:t>
             </a:r>
           </a:p>
           <a:p>
             <a:pPr lvl="4"/>
             <a:r>
-              <a:rPr lang="en-US"/>
+              <a:rPr lang="en-US" smtClean="0">
+                <a:solidFill>
+                  <a:srgbClr val="111111"/>
+                </a:solidFill>
+              </a:rPr>
               <a:t>Fifth level</a:t>
             </a:r>
+            <a:endParaRPr lang="en-US"/>
           </a:p>
         </p:txBody>
       </p:sp>
@@ -1127,9 +1121,13 @@
           <a:bodyPr/>
           <a:lstStyle/>
           <a:p>
-            <a:fld id="{241EB5C9-1307-BA42-ABA2-0BC069CD8E7F}" type="datetimeFigureOut">
-              <a:rPr lang="en-US" smtClean="0"/>
-              <a:t>1/2/22</a:t>
+            <a:fld id="{5BCAD085-E8A6-8845-BD4E-CB4CCA059FC4}" type="datetimeFigureOut">
+              <a:rPr lang="en-US" smtClean="0">
+                <a:solidFill>
+                  <a:srgbClr val="111111"/>
+                </a:solidFill>
+              </a:rPr>
+              <a:t>1/27/13</a:t>
             </a:fld>
             <a:endParaRPr lang="en-US"/>
           </a:p>
@@ -1169,8 +1167,12 @@
           <a:bodyPr/>
           <a:lstStyle/>
           <a:p>
-            <a:fld id="{C5EF2332-01BF-834F-8236-50238282D533}" type="slidenum">
-              <a:rPr lang="en-US" smtClean="0"/>
+            <a:fld id="{C1FF6DA9-008F-8B48-92A6-B652298478BF}" type="slidenum">
+              <a:rPr lang="en-US" smtClean="0">
+                <a:solidFill>
+                  <a:srgbClr val="111111"/>
+                </a:solidFill>
+              </a:rPr>
               <a:t>‹#›</a:t>
             </a:fld>
             <a:endParaRPr lang="en-US"/>
@@ -1180,7 +1182,7 @@
     </p:spTree>
     <p:extLst>
       <p:ext uri="{BB962C8B-B14F-4D97-AF65-F5344CB8AC3E}">
-        <p14:creationId xmlns:p14="http://schemas.microsoft.com/office/powerpoint/2010/main" val="2581529045"/>
+        <p14:creationId xmlns:p14="http://schemas.microsoft.com/office/powerpoint/2010/main" val="3612223792"/>
       </p:ext>
     </p:extLst>
   </p:cSld>
@@ -1223,9 +1225,14 @@
           <a:lstStyle/>
           <a:p>
             <a:r>
-              <a:rPr lang="en-US"/>
+              <a:rPr lang="en-US" smtClean="0">
+                <a:solidFill>
+                  <a:srgbClr val="111111"/>
+                </a:solidFill>
+              </a:rPr>
               <a:t>Click to edit Master title style</a:t>
             </a:r>
+            <a:endParaRPr lang="en-US"/>
           </a:p>
         </p:txBody>
       </p:sp>
@@ -1246,37 +1253,58 @@
           <a:p>
             <a:pPr lvl="0"/>
             <a:r>
-              <a:rPr lang="en-US"/>
+              <a:rPr lang="en-US" smtClean="0">
+                <a:solidFill>
+                  <a:srgbClr val="111111"/>
+                </a:solidFill>
+              </a:rPr>
               <a:t>Click to edit Master text styles</a:t>
             </a:r>
           </a:p>
           <a:p>
             <a:pPr lvl="1"/>
             <a:r>
-              <a:rPr lang="en-US"/>
+              <a:rPr lang="en-US" smtClean="0">
+                <a:solidFill>
+                  <a:srgbClr val="111111"/>
+                </a:solidFill>
+              </a:rPr>
               <a:t>Second level</a:t>
             </a:r>
           </a:p>
           <a:p>
             <a:pPr lvl="2"/>
             <a:r>
-              <a:rPr lang="en-US"/>
+              <a:rPr lang="en-US" smtClean="0">
+                <a:solidFill>
+                  <a:srgbClr val="111111"/>
+                </a:solidFill>
+              </a:rPr>
               <a:t>Third level</a:t>
             </a:r>
           </a:p>
           <a:p>
             <a:pPr lvl="3"/>
             <a:r>
-              <a:rPr lang="en-US"/>
+              <a:rPr lang="en-US" smtClean="0">
+                <a:solidFill>
+                  <a:srgbClr val="111111"/>
+                </a:solidFill>
+              </a:rPr>
               <a:t>Fourth level</a:t>
             </a:r>
           </a:p>
           <a:p>
             <a:pPr lvl="4"/>
             <a:r>
-              <a:rPr lang="en-US"/>
+              <a:rPr lang="en-US" smtClean="0">
+                <a:solidFill>
+                  <a:srgbClr val="111111"/>
+                </a:solidFill>
+              </a:rPr>
               <a:t>Fifth level</a:t>
             </a:r>
+            <a:endParaRPr lang="en-US"/>
           </a:p>
         </p:txBody>
       </p:sp>
@@ -1295,9 +1323,13 @@
           <a:bodyPr/>
           <a:lstStyle/>
           <a:p>
-            <a:fld id="{241EB5C9-1307-BA42-ABA2-0BC069CD8E7F}" type="datetimeFigureOut">
-              <a:rPr lang="en-US" smtClean="0"/>
-              <a:t>1/2/22</a:t>
+            <a:fld id="{5BCAD085-E8A6-8845-BD4E-CB4CCA059FC4}" type="datetimeFigureOut">
+              <a:rPr lang="en-US" smtClean="0">
+                <a:solidFill>
+                  <a:srgbClr val="111111"/>
+                </a:solidFill>
+              </a:rPr>
+              <a:t>1/27/13</a:t>
             </a:fld>
             <a:endParaRPr lang="en-US"/>
           </a:p>
@@ -1337,8 +1369,12 @@
           <a:bodyPr/>
           <a:lstStyle/>
           <a:p>
-            <a:fld id="{C5EF2332-01BF-834F-8236-50238282D533}" type="slidenum">
-              <a:rPr lang="en-US" smtClean="0"/>
+            <a:fld id="{C1FF6DA9-008F-8B48-92A6-B652298478BF}" type="slidenum">
+              <a:rPr lang="en-US" smtClean="0">
+                <a:solidFill>
+                  <a:srgbClr val="111111"/>
+                </a:solidFill>
+              </a:rPr>
               <a:t>‹#›</a:t>
             </a:fld>
             <a:endParaRPr lang="en-US"/>
@@ -1348,7 +1384,7 @@
     </p:spTree>
     <p:extLst>
       <p:ext uri="{BB962C8B-B14F-4D97-AF65-F5344CB8AC3E}">
-        <p14:creationId xmlns:p14="http://schemas.microsoft.com/office/powerpoint/2010/main" val="338346009"/>
+        <p14:creationId xmlns:p14="http://schemas.microsoft.com/office/powerpoint/2010/main" val="2614314258"/>
       </p:ext>
     </p:extLst>
   </p:cSld>
@@ -1387,22 +1423,31 @@
         </p:nvSpPr>
         <p:spPr>
           <a:xfrm>
-            <a:off x="722313" y="3305176"/>
-            <a:ext cx="7772400" cy="1021556"/>
+            <a:off x="722313" y="4406900"/>
+            <a:ext cx="7772400" cy="1362075"/>
           </a:xfrm>
         </p:spPr>
         <p:txBody>
           <a:bodyPr anchor="t"/>
           <a:lstStyle>
             <a:lvl1pPr algn="l">
-              <a:defRPr sz="3000" b="1" cap="all"/>
+              <a:defRPr sz="4000" b="1" cap="all">
+                <a:solidFill>
+                  <a:srgbClr val="111111"/>
+                </a:solidFill>
+              </a:defRPr>
             </a:lvl1pPr>
           </a:lstStyle>
           <a:p>
             <a:r>
-              <a:rPr lang="en-US"/>
+              <a:rPr lang="en-US" smtClean="0">
+                <a:solidFill>
+                  <a:srgbClr val="111111"/>
+                </a:solidFill>
+              </a:rPr>
               <a:t>Click to edit Master title style</a:t>
             </a:r>
+            <a:endParaRPr lang="en-US"/>
           </a:p>
         </p:txBody>
       </p:sp>
@@ -1418,8 +1463,8 @@
         </p:nvSpPr>
         <p:spPr>
           <a:xfrm>
-            <a:off x="722313" y="2180035"/>
-            <a:ext cx="7772400" cy="1125140"/>
+            <a:off x="722313" y="2906713"/>
+            <a:ext cx="7772400" cy="1500187"/>
           </a:xfrm>
         </p:spPr>
         <p:txBody>
@@ -1427,91 +1472,73 @@
           <a:lstStyle>
             <a:lvl1pPr marL="0" indent="0">
               <a:buNone/>
-              <a:defRPr sz="1500">
-                <a:solidFill>
-                  <a:schemeClr val="tx1">
-                    <a:tint val="75000"/>
-                  </a:schemeClr>
+              <a:defRPr sz="2000">
+                <a:solidFill>
+                  <a:srgbClr val="111111"/>
                 </a:solidFill>
               </a:defRPr>
             </a:lvl1pPr>
-            <a:lvl2pPr marL="342900" indent="0">
-              <a:buNone/>
-              <a:defRPr sz="1350">
-                <a:solidFill>
-                  <a:schemeClr val="tx1">
-                    <a:tint val="75000"/>
-                  </a:schemeClr>
+            <a:lvl2pPr marL="457200" indent="0">
+              <a:buNone/>
+              <a:defRPr sz="1800">
+                <a:solidFill>
+                  <a:srgbClr val="111111"/>
                 </a:solidFill>
               </a:defRPr>
             </a:lvl2pPr>
-            <a:lvl3pPr marL="685800" indent="0">
-              <a:buNone/>
-              <a:defRPr sz="1200">
-                <a:solidFill>
-                  <a:schemeClr val="tx1">
-                    <a:tint val="75000"/>
-                  </a:schemeClr>
+            <a:lvl3pPr marL="914400" indent="0">
+              <a:buNone/>
+              <a:defRPr sz="1600">
+                <a:solidFill>
+                  <a:srgbClr val="111111"/>
                 </a:solidFill>
               </a:defRPr>
             </a:lvl3pPr>
-            <a:lvl4pPr marL="1028700" indent="0">
-              <a:buNone/>
-              <a:defRPr sz="1050">
-                <a:solidFill>
-                  <a:schemeClr val="tx1">
-                    <a:tint val="75000"/>
-                  </a:schemeClr>
+            <a:lvl4pPr marL="1371600" indent="0">
+              <a:buNone/>
+              <a:defRPr sz="1400">
+                <a:solidFill>
+                  <a:srgbClr val="111111"/>
                 </a:solidFill>
               </a:defRPr>
             </a:lvl4pPr>
-            <a:lvl5pPr marL="1371600" indent="0">
-              <a:buNone/>
-              <a:defRPr sz="1050">
-                <a:solidFill>
-                  <a:schemeClr val="tx1">
-                    <a:tint val="75000"/>
-                  </a:schemeClr>
+            <a:lvl5pPr marL="1828800" indent="0">
+              <a:buNone/>
+              <a:defRPr sz="1400">
+                <a:solidFill>
+                  <a:srgbClr val="111111"/>
                 </a:solidFill>
               </a:defRPr>
             </a:lvl5pPr>
-            <a:lvl6pPr marL="1714500" indent="0">
-              <a:buNone/>
-              <a:defRPr sz="1050">
-                <a:solidFill>
-                  <a:schemeClr val="tx1">
-                    <a:tint val="75000"/>
-                  </a:schemeClr>
+            <a:lvl6pPr marL="2286000" indent="0">
+              <a:buNone/>
+              <a:defRPr sz="1400">
+                <a:solidFill>
+                  <a:srgbClr val="111111"/>
                 </a:solidFill>
               </a:defRPr>
             </a:lvl6pPr>
-            <a:lvl7pPr marL="2057400" indent="0">
-              <a:buNone/>
-              <a:defRPr sz="1050">
-                <a:solidFill>
-                  <a:schemeClr val="tx1">
-                    <a:tint val="75000"/>
-                  </a:schemeClr>
+            <a:lvl7pPr marL="2743200" indent="0">
+              <a:buNone/>
+              <a:defRPr sz="1400">
+                <a:solidFill>
+                  <a:srgbClr val="111111"/>
                 </a:solidFill>
               </a:defRPr>
             </a:lvl7pPr>
-            <a:lvl8pPr marL="2400300" indent="0">
-              <a:buNone/>
-              <a:defRPr sz="1050">
-                <a:solidFill>
-                  <a:schemeClr val="tx1">
-                    <a:tint val="75000"/>
-                  </a:schemeClr>
+            <a:lvl8pPr marL="3200400" indent="0">
+              <a:buNone/>
+              <a:defRPr sz="1400">
+                <a:solidFill>
+                  <a:srgbClr val="111111"/>
                 </a:solidFill>
               </a:defRPr>
             </a:lvl8pPr>
-            <a:lvl9pPr marL="2743200" indent="0">
-              <a:buNone/>
-              <a:defRPr sz="1050">
-                <a:solidFill>
-                  <a:schemeClr val="tx1">
-                    <a:tint val="75000"/>
-                  </a:schemeClr>
+            <a:lvl9pPr marL="3657600" indent="0">
+              <a:buNone/>
+              <a:defRPr sz="1400">
+                <a:solidFill>
+                  <a:srgbClr val="111111"/>
                 </a:solidFill>
               </a:defRPr>
             </a:lvl9pPr>
@@ -1519,7 +1546,11 @@
           <a:p>
             <a:pPr lvl="0"/>
             <a:r>
-              <a:rPr lang="en-US"/>
+              <a:rPr lang="en-US" smtClean="0">
+                <a:solidFill>
+                  <a:srgbClr val="111111"/>
+                </a:solidFill>
+              </a:rPr>
               <a:t>Click to edit Master text styles</a:t>
             </a:r>
           </a:p>
@@ -1540,9 +1571,13 @@
           <a:bodyPr/>
           <a:lstStyle/>
           <a:p>
-            <a:fld id="{241EB5C9-1307-BA42-ABA2-0BC069CD8E7F}" type="datetimeFigureOut">
-              <a:rPr lang="en-US" smtClean="0"/>
-              <a:t>1/2/22</a:t>
+            <a:fld id="{5BCAD085-E8A6-8845-BD4E-CB4CCA059FC4}" type="datetimeFigureOut">
+              <a:rPr lang="en-US" smtClean="0">
+                <a:solidFill>
+                  <a:srgbClr val="111111"/>
+                </a:solidFill>
+              </a:rPr>
+              <a:t>1/27/13</a:t>
             </a:fld>
             <a:endParaRPr lang="en-US"/>
           </a:p>
@@ -1582,8 +1617,12 @@
           <a:bodyPr/>
           <a:lstStyle/>
           <a:p>
-            <a:fld id="{C5EF2332-01BF-834F-8236-50238282D533}" type="slidenum">
-              <a:rPr lang="en-US" smtClean="0"/>
+            <a:fld id="{C1FF6DA9-008F-8B48-92A6-B652298478BF}" type="slidenum">
+              <a:rPr lang="en-US" smtClean="0">
+                <a:solidFill>
+                  <a:srgbClr val="111111"/>
+                </a:solidFill>
+              </a:rPr>
               <a:t>‹#›</a:t>
             </a:fld>
             <a:endParaRPr lang="en-US"/>
@@ -1593,7 +1632,7 @@
     </p:spTree>
     <p:extLst>
       <p:ext uri="{BB962C8B-B14F-4D97-AF65-F5344CB8AC3E}">
-        <p14:creationId xmlns:p14="http://schemas.microsoft.com/office/powerpoint/2010/main" val="1073069076"/>
+        <p14:creationId xmlns:p14="http://schemas.microsoft.com/office/powerpoint/2010/main" val="960648375"/>
       </p:ext>
     </p:extLst>
   </p:cSld>
@@ -1636,9 +1675,14 @@
           <a:lstStyle/>
           <a:p>
             <a:r>
-              <a:rPr lang="en-US"/>
+              <a:rPr lang="en-US" smtClean="0">
+                <a:solidFill>
+                  <a:srgbClr val="111111"/>
+                </a:solidFill>
+              </a:rPr>
               <a:t>Click to edit Master title style</a:t>
             </a:r>
+            <a:endParaRPr lang="en-US"/>
           </a:p>
         </p:txBody>
       </p:sp>
@@ -1654,75 +1698,132 @@
         </p:nvSpPr>
         <p:spPr>
           <a:xfrm>
-            <a:off x="457200" y="1200151"/>
-            <a:ext cx="4038600" cy="3394472"/>
+            <a:off x="457200" y="1600200"/>
+            <a:ext cx="4038600" cy="4525963"/>
           </a:xfrm>
         </p:spPr>
         <p:txBody>
           <a:bodyPr/>
           <a:lstStyle>
             <a:lvl1pPr>
-              <a:defRPr sz="2100"/>
+              <a:defRPr sz="2800">
+                <a:solidFill>
+                  <a:srgbClr val="111111"/>
+                </a:solidFill>
+              </a:defRPr>
             </a:lvl1pPr>
             <a:lvl2pPr>
-              <a:defRPr sz="1800"/>
+              <a:defRPr sz="2400">
+                <a:solidFill>
+                  <a:srgbClr val="111111"/>
+                </a:solidFill>
+              </a:defRPr>
             </a:lvl2pPr>
             <a:lvl3pPr>
-              <a:defRPr sz="1500"/>
+              <a:defRPr sz="2000">
+                <a:solidFill>
+                  <a:srgbClr val="111111"/>
+                </a:solidFill>
+              </a:defRPr>
             </a:lvl3pPr>
             <a:lvl4pPr>
-              <a:defRPr sz="1350"/>
+              <a:defRPr sz="1800">
+                <a:solidFill>
+                  <a:srgbClr val="111111"/>
+                </a:solidFill>
+              </a:defRPr>
             </a:lvl4pPr>
             <a:lvl5pPr>
-              <a:defRPr sz="1350"/>
+              <a:defRPr sz="1800">
+                <a:solidFill>
+                  <a:srgbClr val="111111"/>
+                </a:solidFill>
+              </a:defRPr>
             </a:lvl5pPr>
             <a:lvl6pPr>
-              <a:defRPr sz="1350"/>
+              <a:defRPr sz="1800">
+                <a:solidFill>
+                  <a:srgbClr val="111111"/>
+                </a:solidFill>
+              </a:defRPr>
             </a:lvl6pPr>
             <a:lvl7pPr>
-              <a:defRPr sz="1350"/>
+              <a:defRPr sz="1800">
+                <a:solidFill>
+                  <a:srgbClr val="111111"/>
+                </a:solidFill>
+              </a:defRPr>
             </a:lvl7pPr>
             <a:lvl8pPr>
-              <a:defRPr sz="1350"/>
+              <a:defRPr sz="1800">
+                <a:solidFill>
+                  <a:srgbClr val="111111"/>
+                </a:solidFill>
+              </a:defRPr>
             </a:lvl8pPr>
             <a:lvl9pPr>
-              <a:defRPr sz="1350"/>
+              <a:defRPr sz="1800">
+                <a:solidFill>
+                  <a:srgbClr val="111111"/>
+                </a:solidFill>
+              </a:defRPr>
             </a:lvl9pPr>
           </a:lstStyle>
           <a:p>
             <a:pPr lvl="0"/>
             <a:r>
-              <a:rPr lang="en-US"/>
+              <a:rPr lang="en-US" smtClean="0">
+                <a:solidFill>
+                  <a:srgbClr val="111111"/>
+                </a:solidFill>
+              </a:rPr>
               <a:t>Click to edit Master text styles</a:t>
             </a:r>
           </a:p>
           <a:p>
             <a:pPr lvl="1"/>
             <a:r>
-              <a:rPr lang="en-US"/>
+              <a:rPr lang="en-US" smtClean="0">
+                <a:solidFill>
+                  <a:srgbClr val="111111"/>
+                </a:solidFill>
+              </a:rPr>
               <a:t>Second level</a:t>
             </a:r>
           </a:p>
           <a:p>
             <a:pPr lvl="2"/>
             <a:r>
-              <a:rPr lang="en-US"/>
+              <a:rPr lang="en-US" smtClean="0">
+                <a:solidFill>
+                  <a:srgbClr val="111111"/>
+                </a:solidFill>
+              </a:rPr>
               <a:t>Third level</a:t>
             </a:r>
           </a:p>
           <a:p>
             <a:pPr lvl="3"/>
             <a:r>
-              <a:rPr lang="en-US"/>
+              <a:rPr lang="en-US" smtClean="0">
+                <a:solidFill>
+                  <a:srgbClr val="111111"/>
+                </a:solidFill>
+              </a:rPr>
               <a:t>Fourth level</a:t>
             </a:r>
           </a:p>
           <a:p>
             <a:pPr lvl="4"/>
             <a:r>
-              <a:rPr lang="en-US"/>
+              <a:rPr lang="en-US" smtClean="0">
+                <a:solidFill>
+                  <a:srgbClr val="111111"/>
+                </a:solidFill>
+              </a:rPr>
               <a:t>Fifth level</a:t>
             </a:r>
+            <a:endParaRPr lang="en-US"/>
           </a:p>
         </p:txBody>
       </p:sp>
@@ -1738,75 +1839,132 @@
         </p:nvSpPr>
         <p:spPr>
           <a:xfrm>
-            <a:off x="4648200" y="1200151"/>
-            <a:ext cx="4038600" cy="3394472"/>
+            <a:off x="4648200" y="1600200"/>
+            <a:ext cx="4038600" cy="4525963"/>
           </a:xfrm>
         </p:spPr>
         <p:txBody>
           <a:bodyPr/>
           <a:lstStyle>
             <a:lvl1pPr>
-              <a:defRPr sz="2100"/>
+              <a:defRPr sz="2800">
+                <a:solidFill>
+                  <a:srgbClr val="111111"/>
+                </a:solidFill>
+              </a:defRPr>
             </a:lvl1pPr>
             <a:lvl2pPr>
-              <a:defRPr sz="1800"/>
+              <a:defRPr sz="2400">
+                <a:solidFill>
+                  <a:srgbClr val="111111"/>
+                </a:solidFill>
+              </a:defRPr>
             </a:lvl2pPr>
             <a:lvl3pPr>
-              <a:defRPr sz="1500"/>
+              <a:defRPr sz="2000">
+                <a:solidFill>
+                  <a:srgbClr val="111111"/>
+                </a:solidFill>
+              </a:defRPr>
             </a:lvl3pPr>
             <a:lvl4pPr>
-              <a:defRPr sz="1350"/>
+              <a:defRPr sz="1800">
+                <a:solidFill>
+                  <a:srgbClr val="111111"/>
+                </a:solidFill>
+              </a:defRPr>
             </a:lvl4pPr>
             <a:lvl5pPr>
-              <a:defRPr sz="1350"/>
+              <a:defRPr sz="1800">
+                <a:solidFill>
+                  <a:srgbClr val="111111"/>
+                </a:solidFill>
+              </a:defRPr>
             </a:lvl5pPr>
             <a:lvl6pPr>
-              <a:defRPr sz="1350"/>
+              <a:defRPr sz="1800">
+                <a:solidFill>
+                  <a:srgbClr val="111111"/>
+                </a:solidFill>
+              </a:defRPr>
             </a:lvl6pPr>
             <a:lvl7pPr>
-              <a:defRPr sz="1350"/>
+              <a:defRPr sz="1800">
+                <a:solidFill>
+                  <a:srgbClr val="111111"/>
+                </a:solidFill>
+              </a:defRPr>
             </a:lvl7pPr>
             <a:lvl8pPr>
-              <a:defRPr sz="1350"/>
+              <a:defRPr sz="1800">
+                <a:solidFill>
+                  <a:srgbClr val="111111"/>
+                </a:solidFill>
+              </a:defRPr>
             </a:lvl8pPr>
             <a:lvl9pPr>
-              <a:defRPr sz="1350"/>
+              <a:defRPr sz="1800">
+                <a:solidFill>
+                  <a:srgbClr val="111111"/>
+                </a:solidFill>
+              </a:defRPr>
             </a:lvl9pPr>
           </a:lstStyle>
           <a:p>
             <a:pPr lvl="0"/>
             <a:r>
-              <a:rPr lang="en-US"/>
+              <a:rPr lang="en-US" smtClean="0">
+                <a:solidFill>
+                  <a:srgbClr val="111111"/>
+                </a:solidFill>
+              </a:rPr>
               <a:t>Click to edit Master text styles</a:t>
             </a:r>
           </a:p>
           <a:p>
             <a:pPr lvl="1"/>
             <a:r>
-              <a:rPr lang="en-US"/>
+              <a:rPr lang="en-US" smtClean="0">
+                <a:solidFill>
+                  <a:srgbClr val="111111"/>
+                </a:solidFill>
+              </a:rPr>
               <a:t>Second level</a:t>
             </a:r>
           </a:p>
           <a:p>
             <a:pPr lvl="2"/>
             <a:r>
-              <a:rPr lang="en-US"/>
+              <a:rPr lang="en-US" smtClean="0">
+                <a:solidFill>
+                  <a:srgbClr val="111111"/>
+                </a:solidFill>
+              </a:rPr>
               <a:t>Third level</a:t>
             </a:r>
           </a:p>
           <a:p>
             <a:pPr lvl="3"/>
             <a:r>
-              <a:rPr lang="en-US"/>
+              <a:rPr lang="en-US" smtClean="0">
+                <a:solidFill>
+                  <a:srgbClr val="111111"/>
+                </a:solidFill>
+              </a:rPr>
               <a:t>Fourth level</a:t>
             </a:r>
           </a:p>
           <a:p>
             <a:pPr lvl="4"/>
             <a:r>
-              <a:rPr lang="en-US"/>
+              <a:rPr lang="en-US" smtClean="0">
+                <a:solidFill>
+                  <a:srgbClr val="111111"/>
+                </a:solidFill>
+              </a:rPr>
               <a:t>Fifth level</a:t>
             </a:r>
+            <a:endParaRPr lang="en-US"/>
           </a:p>
         </p:txBody>
       </p:sp>
@@ -1825,9 +1983,13 @@
           <a:bodyPr/>
           <a:lstStyle/>
           <a:p>
-            <a:fld id="{241EB5C9-1307-BA42-ABA2-0BC069CD8E7F}" type="datetimeFigureOut">
-              <a:rPr lang="en-US" smtClean="0"/>
-              <a:t>1/2/22</a:t>
+            <a:fld id="{5BCAD085-E8A6-8845-BD4E-CB4CCA059FC4}" type="datetimeFigureOut">
+              <a:rPr lang="en-US" smtClean="0">
+                <a:solidFill>
+                  <a:srgbClr val="111111"/>
+                </a:solidFill>
+              </a:rPr>
+              <a:t>1/27/13</a:t>
             </a:fld>
             <a:endParaRPr lang="en-US"/>
           </a:p>
@@ -1867,8 +2029,12 @@
           <a:bodyPr/>
           <a:lstStyle/>
           <a:p>
-            <a:fld id="{C5EF2332-01BF-834F-8236-50238282D533}" type="slidenum">
-              <a:rPr lang="en-US" smtClean="0"/>
+            <a:fld id="{C1FF6DA9-008F-8B48-92A6-B652298478BF}" type="slidenum">
+              <a:rPr lang="en-US" smtClean="0">
+                <a:solidFill>
+                  <a:srgbClr val="111111"/>
+                </a:solidFill>
+              </a:rPr>
               <a:t>‹#›</a:t>
             </a:fld>
             <a:endParaRPr lang="en-US"/>
@@ -1878,7 +2044,7 @@
     </p:spTree>
     <p:extLst>
       <p:ext uri="{BB962C8B-B14F-4D97-AF65-F5344CB8AC3E}">
-        <p14:creationId xmlns:p14="http://schemas.microsoft.com/office/powerpoint/2010/main" val="2619886245"/>
+        <p14:creationId xmlns:p14="http://schemas.microsoft.com/office/powerpoint/2010/main" val="2782244947"/>
       </p:ext>
     </p:extLst>
   </p:cSld>
@@ -1920,14 +2086,23 @@
           <a:bodyPr/>
           <a:lstStyle>
             <a:lvl1pPr>
-              <a:defRPr/>
+              <a:defRPr>
+                <a:solidFill>
+                  <a:srgbClr val="111111"/>
+                </a:solidFill>
+              </a:defRPr>
             </a:lvl1pPr>
           </a:lstStyle>
           <a:p>
             <a:r>
-              <a:rPr lang="en-US"/>
+              <a:rPr lang="en-US" smtClean="0">
+                <a:solidFill>
+                  <a:srgbClr val="111111"/>
+                </a:solidFill>
+              </a:rPr>
               <a:t>Click to edit Master title style</a:t>
             </a:r>
+            <a:endParaRPr lang="en-US"/>
           </a:p>
         </p:txBody>
       </p:sp>
@@ -1943,8 +2118,8 @@
         </p:nvSpPr>
         <p:spPr>
           <a:xfrm>
-            <a:off x="457200" y="1151335"/>
-            <a:ext cx="4040188" cy="479822"/>
+            <a:off x="457200" y="1535113"/>
+            <a:ext cx="4040188" cy="639762"/>
           </a:xfrm>
         </p:spPr>
         <p:txBody>
@@ -1952,45 +2127,85 @@
           <a:lstStyle>
             <a:lvl1pPr marL="0" indent="0">
               <a:buNone/>
-              <a:defRPr sz="1800" b="1"/>
+              <a:defRPr sz="2400" b="1">
+                <a:solidFill>
+                  <a:srgbClr val="111111"/>
+                </a:solidFill>
+              </a:defRPr>
             </a:lvl1pPr>
-            <a:lvl2pPr marL="342900" indent="0">
-              <a:buNone/>
-              <a:defRPr sz="1500" b="1"/>
+            <a:lvl2pPr marL="457200" indent="0">
+              <a:buNone/>
+              <a:defRPr sz="2000" b="1">
+                <a:solidFill>
+                  <a:srgbClr val="111111"/>
+                </a:solidFill>
+              </a:defRPr>
             </a:lvl2pPr>
-            <a:lvl3pPr marL="685800" indent="0">
-              <a:buNone/>
-              <a:defRPr sz="1350" b="1"/>
+            <a:lvl3pPr marL="914400" indent="0">
+              <a:buNone/>
+              <a:defRPr sz="1800" b="1">
+                <a:solidFill>
+                  <a:srgbClr val="111111"/>
+                </a:solidFill>
+              </a:defRPr>
             </a:lvl3pPr>
-            <a:lvl4pPr marL="1028700" indent="0">
-              <a:buNone/>
-              <a:defRPr sz="1200" b="1"/>
+            <a:lvl4pPr marL="1371600" indent="0">
+              <a:buNone/>
+              <a:defRPr sz="1600" b="1">
+                <a:solidFill>
+                  <a:srgbClr val="111111"/>
+                </a:solidFill>
+              </a:defRPr>
             </a:lvl4pPr>
-            <a:lvl5pPr marL="1371600" indent="0">
-              <a:buNone/>
-              <a:defRPr sz="1200" b="1"/>
+            <a:lvl5pPr marL="1828800" indent="0">
+              <a:buNone/>
+              <a:defRPr sz="1600" b="1">
+                <a:solidFill>
+                  <a:srgbClr val="111111"/>
+                </a:solidFill>
+              </a:defRPr>
             </a:lvl5pPr>
-            <a:lvl6pPr marL="1714500" indent="0">
-              <a:buNone/>
-              <a:defRPr sz="1200" b="1"/>
+            <a:lvl6pPr marL="2286000" indent="0">
+              <a:buNone/>
+              <a:defRPr sz="1600" b="1">
+                <a:solidFill>
+                  <a:srgbClr val="111111"/>
+                </a:solidFill>
+              </a:defRPr>
             </a:lvl6pPr>
-            <a:lvl7pPr marL="2057400" indent="0">
-              <a:buNone/>
-              <a:defRPr sz="1200" b="1"/>
+            <a:lvl7pPr marL="2743200" indent="0">
+              <a:buNone/>
+              <a:defRPr sz="1600" b="1">
+                <a:solidFill>
+                  <a:srgbClr val="111111"/>
+                </a:solidFill>
+              </a:defRPr>
             </a:lvl7pPr>
-            <a:lvl8pPr marL="2400300" indent="0">
-              <a:buNone/>
-              <a:defRPr sz="1200" b="1"/>
+            <a:lvl8pPr marL="3200400" indent="0">
+              <a:buNone/>
+              <a:defRPr sz="1600" b="1">
+                <a:solidFill>
+                  <a:srgbClr val="111111"/>
+                </a:solidFill>
+              </a:defRPr>
             </a:lvl8pPr>
-            <a:lvl9pPr marL="2743200" indent="0">
-              <a:buNone/>
-              <a:defRPr sz="1200" b="1"/>
+            <a:lvl9pPr marL="3657600" indent="0">
+              <a:buNone/>
+              <a:defRPr sz="1600" b="1">
+                <a:solidFill>
+                  <a:srgbClr val="111111"/>
+                </a:solidFill>
+              </a:defRPr>
             </a:lvl9pPr>
           </a:lstStyle>
           <a:p>
             <a:pPr lvl="0"/>
             <a:r>
-              <a:rPr lang="en-US"/>
+              <a:rPr lang="en-US" smtClean="0">
+                <a:solidFill>
+                  <a:srgbClr val="111111"/>
+                </a:solidFill>
+              </a:rPr>
               <a:t>Click to edit Master text styles</a:t>
             </a:r>
           </a:p>
@@ -2008,75 +2223,132 @@
         </p:nvSpPr>
         <p:spPr>
           <a:xfrm>
-            <a:off x="457200" y="1631156"/>
-            <a:ext cx="4040188" cy="2963466"/>
+            <a:off x="457200" y="2174875"/>
+            <a:ext cx="4040188" cy="3951288"/>
           </a:xfrm>
         </p:spPr>
         <p:txBody>
           <a:bodyPr/>
           <a:lstStyle>
             <a:lvl1pPr>
-              <a:defRPr sz="1800"/>
+              <a:defRPr sz="2400">
+                <a:solidFill>
+                  <a:srgbClr val="111111"/>
+                </a:solidFill>
+              </a:defRPr>
             </a:lvl1pPr>
             <a:lvl2pPr>
-              <a:defRPr sz="1500"/>
+              <a:defRPr sz="2000">
+                <a:solidFill>
+                  <a:srgbClr val="111111"/>
+                </a:solidFill>
+              </a:defRPr>
             </a:lvl2pPr>
             <a:lvl3pPr>
-              <a:defRPr sz="1350"/>
+              <a:defRPr sz="1800">
+                <a:solidFill>
+                  <a:srgbClr val="111111"/>
+                </a:solidFill>
+              </a:defRPr>
             </a:lvl3pPr>
             <a:lvl4pPr>
-              <a:defRPr sz="1200"/>
+              <a:defRPr sz="1600">
+                <a:solidFill>
+                  <a:srgbClr val="111111"/>
+                </a:solidFill>
+              </a:defRPr>
             </a:lvl4pPr>
             <a:lvl5pPr>
-              <a:defRPr sz="1200"/>
+              <a:defRPr sz="1600">
+                <a:solidFill>
+                  <a:srgbClr val="111111"/>
+                </a:solidFill>
+              </a:defRPr>
             </a:lvl5pPr>
             <a:lvl6pPr>
-              <a:defRPr sz="1200"/>
+              <a:defRPr sz="1600">
+                <a:solidFill>
+                  <a:srgbClr val="111111"/>
+                </a:solidFill>
+              </a:defRPr>
             </a:lvl6pPr>
             <a:lvl7pPr>
-              <a:defRPr sz="1200"/>
+              <a:defRPr sz="1600">
+                <a:solidFill>
+                  <a:srgbClr val="111111"/>
+                </a:solidFill>
+              </a:defRPr>
             </a:lvl7pPr>
             <a:lvl8pPr>
-              <a:defRPr sz="1200"/>
+              <a:defRPr sz="1600">
+                <a:solidFill>
+                  <a:srgbClr val="111111"/>
+                </a:solidFill>
+              </a:defRPr>
             </a:lvl8pPr>
             <a:lvl9pPr>
-              <a:defRPr sz="1200"/>
+              <a:defRPr sz="1600">
+                <a:solidFill>
+                  <a:srgbClr val="111111"/>
+                </a:solidFill>
+              </a:defRPr>
             </a:lvl9pPr>
           </a:lstStyle>
           <a:p>
             <a:pPr lvl="0"/>
             <a:r>
-              <a:rPr lang="en-US"/>
+              <a:rPr lang="en-US" smtClean="0">
+                <a:solidFill>
+                  <a:srgbClr val="111111"/>
+                </a:solidFill>
+              </a:rPr>
               <a:t>Click to edit Master text styles</a:t>
             </a:r>
           </a:p>
           <a:p>
             <a:pPr lvl="1"/>
             <a:r>
-              <a:rPr lang="en-US"/>
+              <a:rPr lang="en-US" smtClean="0">
+                <a:solidFill>
+                  <a:srgbClr val="111111"/>
+                </a:solidFill>
+              </a:rPr>
               <a:t>Second level</a:t>
             </a:r>
           </a:p>
           <a:p>
             <a:pPr lvl="2"/>
             <a:r>
-              <a:rPr lang="en-US"/>
+              <a:rPr lang="en-US" smtClean="0">
+                <a:solidFill>
+                  <a:srgbClr val="111111"/>
+                </a:solidFill>
+              </a:rPr>
               <a:t>Third level</a:t>
             </a:r>
           </a:p>
           <a:p>
             <a:pPr lvl="3"/>
             <a:r>
-              <a:rPr lang="en-US"/>
+              <a:rPr lang="en-US" smtClean="0">
+                <a:solidFill>
+                  <a:srgbClr val="111111"/>
+                </a:solidFill>
+              </a:rPr>
               <a:t>Fourth level</a:t>
             </a:r>
           </a:p>
           <a:p>
             <a:pPr lvl="4"/>
             <a:r>
-              <a:rPr lang="en-US"/>
+              <a:rPr lang="en-US" smtClean="0">
+                <a:solidFill>
+                  <a:srgbClr val="111111"/>
+                </a:solidFill>
+              </a:rPr>
               <a:t>Fifth level</a:t>
             </a:r>
+            <a:endParaRPr lang="en-US"/>
           </a:p>
         </p:txBody>
       </p:sp>
@@ -2092,8 +2364,8 @@
         </p:nvSpPr>
         <p:spPr>
           <a:xfrm>
-            <a:off x="4645026" y="1151335"/>
-            <a:ext cx="4041775" cy="479822"/>
+            <a:off x="4645025" y="1535113"/>
+            <a:ext cx="4041775" cy="639762"/>
           </a:xfrm>
         </p:spPr>
         <p:txBody>
@@ -2101,45 +2373,85 @@
           <a:lstStyle>
             <a:lvl1pPr marL="0" indent="0">
               <a:buNone/>
-              <a:defRPr sz="1800" b="1"/>
+              <a:defRPr sz="2400" b="1">
+                <a:solidFill>
+                  <a:srgbClr val="111111"/>
+                </a:solidFill>
+              </a:defRPr>
             </a:lvl1pPr>
-            <a:lvl2pPr marL="342900" indent="0">
-              <a:buNone/>
-              <a:defRPr sz="1500" b="1"/>
+            <a:lvl2pPr marL="457200" indent="0">
+              <a:buNone/>
+              <a:defRPr sz="2000" b="1">
+                <a:solidFill>
+                  <a:srgbClr val="111111"/>
+                </a:solidFill>
+              </a:defRPr>
             </a:lvl2pPr>
-            <a:lvl3pPr marL="685800" indent="0">
-              <a:buNone/>
-              <a:defRPr sz="1350" b="1"/>
+            <a:lvl3pPr marL="914400" indent="0">
+              <a:buNone/>
+              <a:defRPr sz="1800" b="1">
+                <a:solidFill>
+                  <a:srgbClr val="111111"/>
+                </a:solidFill>
+              </a:defRPr>
             </a:lvl3pPr>
-            <a:lvl4pPr marL="1028700" indent="0">
-              <a:buNone/>
-              <a:defRPr sz="1200" b="1"/>
+            <a:lvl4pPr marL="1371600" indent="0">
+              <a:buNone/>
+              <a:defRPr sz="1600" b="1">
+                <a:solidFill>
+                  <a:srgbClr val="111111"/>
+                </a:solidFill>
+              </a:defRPr>
             </a:lvl4pPr>
-            <a:lvl5pPr marL="1371600" indent="0">
-              <a:buNone/>
-              <a:defRPr sz="1200" b="1"/>
+            <a:lvl5pPr marL="1828800" indent="0">
+              <a:buNone/>
+              <a:defRPr sz="1600" b="1">
+                <a:solidFill>
+                  <a:srgbClr val="111111"/>
+                </a:solidFill>
+              </a:defRPr>
             </a:lvl5pPr>
-            <a:lvl6pPr marL="1714500" indent="0">
-              <a:buNone/>
-              <a:defRPr sz="1200" b="1"/>
+            <a:lvl6pPr marL="2286000" indent="0">
+              <a:buNone/>
+              <a:defRPr sz="1600" b="1">
+                <a:solidFill>
+                  <a:srgbClr val="111111"/>
+                </a:solidFill>
+              </a:defRPr>
             </a:lvl6pPr>
-            <a:lvl7pPr marL="2057400" indent="0">
-              <a:buNone/>
-              <a:defRPr sz="1200" b="1"/>
+            <a:lvl7pPr marL="2743200" indent="0">
+              <a:buNone/>
+              <a:defRPr sz="1600" b="1">
+                <a:solidFill>
+                  <a:srgbClr val="111111"/>
+                </a:solidFill>
+              </a:defRPr>
             </a:lvl7pPr>
-            <a:lvl8pPr marL="2400300" indent="0">
-              <a:buNone/>
-              <a:defRPr sz="1200" b="1"/>
+            <a:lvl8pPr marL="3200400" indent="0">
+              <a:buNone/>
+              <a:defRPr sz="1600" b="1">
+                <a:solidFill>
+                  <a:srgbClr val="111111"/>
+                </a:solidFill>
+              </a:defRPr>
             </a:lvl8pPr>
-            <a:lvl9pPr marL="2743200" indent="0">
-              <a:buNone/>
-              <a:defRPr sz="1200" b="1"/>
+            <a:lvl9pPr marL="3657600" indent="0">
+              <a:buNone/>
+              <a:defRPr sz="1600" b="1">
+                <a:solidFill>
+                  <a:srgbClr val="111111"/>
+                </a:solidFill>
+              </a:defRPr>
             </a:lvl9pPr>
           </a:lstStyle>
           <a:p>
             <a:pPr lvl="0"/>
             <a:r>
-              <a:rPr lang="en-US"/>
+              <a:rPr lang="en-US" smtClean="0">
+                <a:solidFill>
+                  <a:srgbClr val="111111"/>
+                </a:solidFill>
+              </a:rPr>
               <a:t>Click to edit Master text styles</a:t>
             </a:r>
           </a:p>
@@ -2157,75 +2469,132 @@
         </p:nvSpPr>
         <p:spPr>
           <a:xfrm>
-            <a:off x="4645026" y="1631156"/>
-            <a:ext cx="4041775" cy="2963466"/>
+            <a:off x="4645025" y="2174875"/>
+            <a:ext cx="4041775" cy="3951288"/>
           </a:xfrm>
         </p:spPr>
         <p:txBody>
           <a:bodyPr/>
           <a:lstStyle>
             <a:lvl1pPr>
-              <a:defRPr sz="1800"/>
+              <a:defRPr sz="2400">
+                <a:solidFill>
+                  <a:srgbClr val="111111"/>
+                </a:solidFill>
+              </a:defRPr>
             </a:lvl1pPr>
             <a:lvl2pPr>
-              <a:defRPr sz="1500"/>
+              <a:defRPr sz="2000">
+                <a:solidFill>
+                  <a:srgbClr val="111111"/>
+                </a:solidFill>
+              </a:defRPr>
             </a:lvl2pPr>
             <a:lvl3pPr>
-              <a:defRPr sz="1350"/>
+              <a:defRPr sz="1800">
+                <a:solidFill>
+                  <a:srgbClr val="111111"/>
+                </a:solidFill>
+              </a:defRPr>
             </a:lvl3pPr>
             <a:lvl4pPr>
-              <a:defRPr sz="1200"/>
+              <a:defRPr sz="1600">
+                <a:solidFill>
+                  <a:srgbClr val="111111"/>
+                </a:solidFill>
+              </a:defRPr>
             </a:lvl4pPr>
             <a:lvl5pPr>
-              <a:defRPr sz="1200"/>
+              <a:defRPr sz="1600">
+                <a:solidFill>
+                  <a:srgbClr val="111111"/>
+                </a:solidFill>
+              </a:defRPr>
             </a:lvl5pPr>
             <a:lvl6pPr>
-              <a:defRPr sz="1200"/>
+              <a:defRPr sz="1600">
+                <a:solidFill>
+                  <a:srgbClr val="111111"/>
+                </a:solidFill>
+              </a:defRPr>
             </a:lvl6pPr>
             <a:lvl7pPr>
-              <a:defRPr sz="1200"/>
+              <a:defRPr sz="1600">
+                <a:solidFill>
+                  <a:srgbClr val="111111"/>
+                </a:solidFill>
+              </a:defRPr>
             </a:lvl7pPr>
             <a:lvl8pPr>
-              <a:defRPr sz="1200"/>
+              <a:defRPr sz="1600">
+                <a:solidFill>
+                  <a:srgbClr val="111111"/>
+                </a:solidFill>
+              </a:defRPr>
             </a:lvl8pPr>
             <a:lvl9pPr>
-              <a:defRPr sz="1200"/>
+              <a:defRPr sz="1600">
+                <a:solidFill>
+                  <a:srgbClr val="111111"/>
+                </a:solidFill>
+              </a:defRPr>
             </a:lvl9pPr>
           </a:lstStyle>
           <a:p>
             <a:pPr lvl="0"/>
             <a:r>
-              <a:rPr lang="en-US"/>
+              <a:rPr lang="en-US" smtClean="0">
+                <a:solidFill>
+                  <a:srgbClr val="111111"/>
+                </a:solidFill>
+              </a:rPr>
               <a:t>Click to edit Master text styles</a:t>
             </a:r>
           </a:p>
           <a:p>
             <a:pPr lvl="1"/>
             <a:r>
-              <a:rPr lang="en-US"/>
+              <a:rPr lang="en-US" smtClean="0">
+                <a:solidFill>
+                  <a:srgbClr val="111111"/>
+                </a:solidFill>
+              </a:rPr>
               <a:t>Second level</a:t>
             </a:r>
           </a:p>
           <a:p>
             <a:pPr lvl="2"/>
             <a:r>
-              <a:rPr lang="en-US"/>
+              <a:rPr lang="en-US" smtClean="0">
+                <a:solidFill>
+                  <a:srgbClr val="111111"/>
+                </a:solidFill>
+              </a:rPr>
               <a:t>Third level</a:t>
             </a:r>
           </a:p>
           <a:p>
             <a:pPr lvl="3"/>
             <a:r>
-              <a:rPr lang="en-US"/>
+              <a:rPr lang="en-US" smtClean="0">
+                <a:solidFill>
+                  <a:srgbClr val="111111"/>
+                </a:solidFill>
+              </a:rPr>
               <a:t>Fourth level</a:t>
             </a:r>
           </a:p>
           <a:p>
             <a:pPr lvl="4"/>
             <a:r>
-              <a:rPr lang="en-US"/>
+              <a:rPr lang="en-US" smtClean="0">
+                <a:solidFill>
+                  <a:srgbClr val="111111"/>
+                </a:solidFill>
+              </a:rPr>
               <a:t>Fifth level</a:t>
             </a:r>
+            <a:endParaRPr lang="en-US"/>
           </a:p>
         </p:txBody>
       </p:sp>
@@ -2244,9 +2613,13 @@
           <a:bodyPr/>
           <a:lstStyle/>
           <a:p>
-            <a:fld id="{241EB5C9-1307-BA42-ABA2-0BC069CD8E7F}" type="datetimeFigureOut">
-              <a:rPr lang="en-US" smtClean="0"/>
-              <a:t>1/2/22</a:t>
+            <a:fld id="{5BCAD085-E8A6-8845-BD4E-CB4CCA059FC4}" type="datetimeFigureOut">
+              <a:rPr lang="en-US" smtClean="0">
+                <a:solidFill>
+                  <a:srgbClr val="111111"/>
+                </a:solidFill>
+              </a:rPr>
+              <a:t>1/27/13</a:t>
             </a:fld>
             <a:endParaRPr lang="en-US"/>
           </a:p>
@@ -2286,8 +2659,12 @@
           <a:bodyPr/>
           <a:lstStyle/>
           <a:p>
-            <a:fld id="{C5EF2332-01BF-834F-8236-50238282D533}" type="slidenum">
-              <a:rPr lang="en-US" smtClean="0"/>
+            <a:fld id="{C1FF6DA9-008F-8B48-92A6-B652298478BF}" type="slidenum">
+              <a:rPr lang="en-US" smtClean="0">
+                <a:solidFill>
+                  <a:srgbClr val="111111"/>
+                </a:solidFill>
+              </a:rPr>
               <a:t>‹#›</a:t>
             </a:fld>
             <a:endParaRPr lang="en-US"/>
@@ -2297,7 +2674,7 @@
     </p:spTree>
     <p:extLst>
       <p:ext uri="{BB962C8B-B14F-4D97-AF65-F5344CB8AC3E}">
-        <p14:creationId xmlns:p14="http://schemas.microsoft.com/office/powerpoint/2010/main" val="2535793967"/>
+        <p14:creationId xmlns:p14="http://schemas.microsoft.com/office/powerpoint/2010/main" val="990158736"/>
       </p:ext>
     </p:extLst>
   </p:cSld>
@@ -2340,9 +2717,14 @@
           <a:lstStyle/>
           <a:p>
             <a:r>
-              <a:rPr lang="en-US"/>
+              <a:rPr lang="en-US" smtClean="0">
+                <a:solidFill>
+                  <a:srgbClr val="111111"/>
+                </a:solidFill>
+              </a:rPr>
               <a:t>Click to edit Master title style</a:t>
             </a:r>
+            <a:endParaRPr lang="en-US"/>
           </a:p>
         </p:txBody>
       </p:sp>
@@ -2361,9 +2743,13 @@
           <a:bodyPr/>
           <a:lstStyle/>
           <a:p>
-            <a:fld id="{241EB5C9-1307-BA42-ABA2-0BC069CD8E7F}" type="datetimeFigureOut">
-              <a:rPr lang="en-US" smtClean="0"/>
-              <a:t>1/2/22</a:t>
+            <a:fld id="{5BCAD085-E8A6-8845-BD4E-CB4CCA059FC4}" type="datetimeFigureOut">
+              <a:rPr lang="en-US" smtClean="0">
+                <a:solidFill>
+                  <a:srgbClr val="111111"/>
+                </a:solidFill>
+              </a:rPr>
+              <a:t>1/27/13</a:t>
             </a:fld>
             <a:endParaRPr lang="en-US"/>
           </a:p>
@@ -2403,8 +2789,12 @@
           <a:bodyPr/>
           <a:lstStyle/>
           <a:p>
-            <a:fld id="{C5EF2332-01BF-834F-8236-50238282D533}" type="slidenum">
-              <a:rPr lang="en-US" smtClean="0"/>
+            <a:fld id="{C1FF6DA9-008F-8B48-92A6-B652298478BF}" type="slidenum">
+              <a:rPr lang="en-US" smtClean="0">
+                <a:solidFill>
+                  <a:srgbClr val="111111"/>
+                </a:solidFill>
+              </a:rPr>
               <a:t>‹#›</a:t>
             </a:fld>
             <a:endParaRPr lang="en-US"/>
@@ -2414,7 +2804,7 @@
     </p:spTree>
     <p:extLst>
       <p:ext uri="{BB962C8B-B14F-4D97-AF65-F5344CB8AC3E}">
-        <p14:creationId xmlns:p14="http://schemas.microsoft.com/office/powerpoint/2010/main" val="3472721253"/>
+        <p14:creationId xmlns:p14="http://schemas.microsoft.com/office/powerpoint/2010/main" val="727027711"/>
       </p:ext>
     </p:extLst>
   </p:cSld>
@@ -2456,9 +2846,13 @@
           <a:bodyPr/>
           <a:lstStyle/>
           <a:p>
-            <a:fld id="{241EB5C9-1307-BA42-ABA2-0BC069CD8E7F}" type="datetimeFigureOut">
-              <a:rPr lang="en-US" smtClean="0"/>
-              <a:t>1/2/22</a:t>
+            <a:fld id="{5BCAD085-E8A6-8845-BD4E-CB4CCA059FC4}" type="datetimeFigureOut">
+              <a:rPr lang="en-US" smtClean="0">
+                <a:solidFill>
+                  <a:srgbClr val="111111"/>
+                </a:solidFill>
+              </a:rPr>
+              <a:t>1/27/13</a:t>
             </a:fld>
             <a:endParaRPr lang="en-US"/>
           </a:p>
@@ -2498,8 +2892,12 @@
           <a:bodyPr/>
           <a:lstStyle/>
           <a:p>
-            <a:fld id="{C5EF2332-01BF-834F-8236-50238282D533}" type="slidenum">
-              <a:rPr lang="en-US" smtClean="0"/>
+            <a:fld id="{C1FF6DA9-008F-8B48-92A6-B652298478BF}" type="slidenum">
+              <a:rPr lang="en-US" smtClean="0">
+                <a:solidFill>
+                  <a:srgbClr val="111111"/>
+                </a:solidFill>
+              </a:rPr>
               <a:t>‹#›</a:t>
             </a:fld>
             <a:endParaRPr lang="en-US"/>
@@ -2509,7 +2907,7 @@
     </p:spTree>
     <p:extLst>
       <p:ext uri="{BB962C8B-B14F-4D97-AF65-F5344CB8AC3E}">
-        <p14:creationId xmlns:p14="http://schemas.microsoft.com/office/powerpoint/2010/main" val="2130901097"/>
+        <p14:creationId xmlns:p14="http://schemas.microsoft.com/office/powerpoint/2010/main" val="1212999818"/>
       </p:ext>
     </p:extLst>
   </p:cSld>
@@ -2548,22 +2946,31 @@
         </p:nvSpPr>
         <p:spPr>
           <a:xfrm>
-            <a:off x="457201" y="204787"/>
-            <a:ext cx="3008313" cy="871538"/>
+            <a:off x="457200" y="273050"/>
+            <a:ext cx="3008313" cy="1162050"/>
           </a:xfrm>
         </p:spPr>
         <p:txBody>
           <a:bodyPr anchor="b"/>
           <a:lstStyle>
             <a:lvl1pPr algn="l">
-              <a:defRPr sz="1500" b="1"/>
+              <a:defRPr sz="2000" b="1">
+                <a:solidFill>
+                  <a:srgbClr val="111111"/>
+                </a:solidFill>
+              </a:defRPr>
             </a:lvl1pPr>
           </a:lstStyle>
           <a:p>
             <a:r>
-              <a:rPr lang="en-US"/>
+              <a:rPr lang="en-US" smtClean="0">
+                <a:solidFill>
+                  <a:srgbClr val="111111"/>
+                </a:solidFill>
+              </a:rPr>
               <a:t>Click to edit Master title style</a:t>
             </a:r>
+            <a:endParaRPr lang="en-US"/>
           </a:p>
         </p:txBody>
       </p:sp>
@@ -2579,75 +2986,132 @@
         </p:nvSpPr>
         <p:spPr>
           <a:xfrm>
-            <a:off x="3575050" y="204788"/>
-            <a:ext cx="5111750" cy="4389835"/>
+            <a:off x="3575050" y="273050"/>
+            <a:ext cx="5111750" cy="5853113"/>
           </a:xfrm>
         </p:spPr>
         <p:txBody>
           <a:bodyPr/>
           <a:lstStyle>
             <a:lvl1pPr>
-              <a:defRPr sz="2400"/>
+              <a:defRPr sz="3200">
+                <a:solidFill>
+                  <a:srgbClr val="111111"/>
+                </a:solidFill>
+              </a:defRPr>
             </a:lvl1pPr>
             <a:lvl2pPr>
-              <a:defRPr sz="2100"/>
+              <a:defRPr sz="2800">
+                <a:solidFill>
+                  <a:srgbClr val="111111"/>
+                </a:solidFill>
+              </a:defRPr>
             </a:lvl2pPr>
             <a:lvl3pPr>
-              <a:defRPr sz="1800"/>
+              <a:defRPr sz="2400">
+                <a:solidFill>
+                  <a:srgbClr val="111111"/>
+                </a:solidFill>
+              </a:defRPr>
             </a:lvl3pPr>
             <a:lvl4pPr>
-              <a:defRPr sz="1500"/>
+              <a:defRPr sz="2000">
+                <a:solidFill>
+                  <a:srgbClr val="111111"/>
+                </a:solidFill>
+              </a:defRPr>
             </a:lvl4pPr>
             <a:lvl5pPr>
-              <a:defRPr sz="1500"/>
+              <a:defRPr sz="2000">
+                <a:solidFill>
+                  <a:srgbClr val="111111"/>
+                </a:solidFill>
+              </a:defRPr>
             </a:lvl5pPr>
             <a:lvl6pPr>
-              <a:defRPr sz="1500"/>
+              <a:defRPr sz="2000">
+                <a:solidFill>
+                  <a:srgbClr val="111111"/>
+                </a:solidFill>
+              </a:defRPr>
             </a:lvl6pPr>
             <a:lvl7pPr>
-              <a:defRPr sz="1500"/>
+              <a:defRPr sz="2000">
+                <a:solidFill>
+                  <a:srgbClr val="111111"/>
+                </a:solidFill>
+              </a:defRPr>
             </a:lvl7pPr>
             <a:lvl8pPr>
-              <a:defRPr sz="1500"/>
+              <a:defRPr sz="2000">
+                <a:solidFill>
+                  <a:srgbClr val="111111"/>
+                </a:solidFill>
+              </a:defRPr>
             </a:lvl8pPr>
             <a:lvl9pPr>
-              <a:defRPr sz="1500"/>
+              <a:defRPr sz="2000">
+                <a:solidFill>
+                  <a:srgbClr val="111111"/>
+                </a:solidFill>
+              </a:defRPr>
             </a:lvl9pPr>
           </a:lstStyle>
           <a:p>
             <a:pPr lvl="0"/>
             <a:r>
-              <a:rPr lang="en-US"/>
+              <a:rPr lang="en-US" smtClean="0">
+                <a:solidFill>
+                  <a:srgbClr val="111111"/>
+                </a:solidFill>
+              </a:rPr>
               <a:t>Click to edit Master text styles</a:t>
             </a:r>
           </a:p>
           <a:p>
             <a:pPr lvl="1"/>
             <a:r>
-              <a:rPr lang="en-US"/>
+              <a:rPr lang="en-US" smtClean="0">
+                <a:solidFill>
+                  <a:srgbClr val="111111"/>
+                </a:solidFill>
+              </a:rPr>
               <a:t>Second level</a:t>
             </a:r>
           </a:p>
           <a:p>
             <a:pPr lvl="2"/>
             <a:r>
-              <a:rPr lang="en-US"/>
+              <a:rPr lang="en-US" smtClean="0">
+                <a:solidFill>
+                  <a:srgbClr val="111111"/>
+                </a:solidFill>
+              </a:rPr>
               <a:t>Third level</a:t>
             </a:r>
           </a:p>
           <a:p>
             <a:pPr lvl="3"/>
             <a:r>
-              <a:rPr lang="en-US"/>
+              <a:rPr lang="en-US" smtClean="0">
+                <a:solidFill>
+                  <a:srgbClr val="111111"/>
+                </a:solidFill>
+              </a:rPr>
               <a:t>Fourth level</a:t>
             </a:r>
           </a:p>
           <a:p>
             <a:pPr lvl="4"/>
             <a:r>
-              <a:rPr lang="en-US"/>
+              <a:rPr lang="en-US" smtClean="0">
+                <a:solidFill>
+                  <a:srgbClr val="111111"/>
+                </a:solidFill>
+              </a:rPr>
               <a:t>Fifth level</a:t>
             </a:r>
+            <a:endParaRPr lang="en-US"/>
           </a:p>
         </p:txBody>
       </p:sp>
@@ -2663,8 +3127,8 @@
         </p:nvSpPr>
         <p:spPr>
           <a:xfrm>
-            <a:off x="457201" y="1076326"/>
-            <a:ext cx="3008313" cy="3518297"/>
+            <a:off x="457200" y="1435100"/>
+            <a:ext cx="3008313" cy="4691063"/>
           </a:xfrm>
         </p:spPr>
         <p:txBody>
@@ -2672,45 +3136,85 @@
           <a:lstStyle>
             <a:lvl1pPr marL="0" indent="0">
               <a:buNone/>
-              <a:defRPr sz="1050"/>
+              <a:defRPr sz="1400">
+                <a:solidFill>
+                  <a:srgbClr val="111111"/>
+                </a:solidFill>
+              </a:defRPr>
             </a:lvl1pPr>
-            <a:lvl2pPr marL="342900" indent="0">
-              <a:buNone/>
-              <a:defRPr sz="900"/>
+            <a:lvl2pPr marL="457200" indent="0">
+              <a:buNone/>
+              <a:defRPr sz="1200">
+                <a:solidFill>
+                  <a:srgbClr val="111111"/>
+                </a:solidFill>
+              </a:defRPr>
             </a:lvl2pPr>
-            <a:lvl3pPr marL="685800" indent="0">
-              <a:buNone/>
-              <a:defRPr sz="750"/>
+            <a:lvl3pPr marL="914400" indent="0">
+              <a:buNone/>
+              <a:defRPr sz="1000">
+                <a:solidFill>
+                  <a:srgbClr val="111111"/>
+                </a:solidFill>
+              </a:defRPr>
             </a:lvl3pPr>
-            <a:lvl4pPr marL="1028700" indent="0">
-              <a:buNone/>
-              <a:defRPr sz="675"/>
+            <a:lvl4pPr marL="1371600" indent="0">
+              <a:buNone/>
+              <a:defRPr sz="900">
+                <a:solidFill>
+                  <a:srgbClr val="111111"/>
+                </a:solidFill>
+              </a:defRPr>
             </a:lvl4pPr>
-            <a:lvl5pPr marL="1371600" indent="0">
-              <a:buNone/>
-              <a:defRPr sz="675"/>
+            <a:lvl5pPr marL="1828800" indent="0">
+              <a:buNone/>
+              <a:defRPr sz="900">
+                <a:solidFill>
+                  <a:srgbClr val="111111"/>
+                </a:solidFill>
+              </a:defRPr>
             </a:lvl5pPr>
-            <a:lvl6pPr marL="1714500" indent="0">
-              <a:buNone/>
-              <a:defRPr sz="675"/>
+            <a:lvl6pPr marL="2286000" indent="0">
+              <a:buNone/>
+              <a:defRPr sz="900">
+                <a:solidFill>
+                  <a:srgbClr val="111111"/>
+                </a:solidFill>
+              </a:defRPr>
             </a:lvl6pPr>
-            <a:lvl7pPr marL="2057400" indent="0">
-              <a:buNone/>
-              <a:defRPr sz="675"/>
+            <a:lvl7pPr marL="2743200" indent="0">
+              <a:buNone/>
+              <a:defRPr sz="900">
+                <a:solidFill>
+                  <a:srgbClr val="111111"/>
+                </a:solidFill>
+              </a:defRPr>
             </a:lvl7pPr>
-            <a:lvl8pPr marL="2400300" indent="0">
-              <a:buNone/>
-              <a:defRPr sz="675"/>
+            <a:lvl8pPr marL="3200400" indent="0">
+              <a:buNone/>
+              <a:defRPr sz="900">
+                <a:solidFill>
+                  <a:srgbClr val="111111"/>
+                </a:solidFill>
+              </a:defRPr>
             </a:lvl8pPr>
-            <a:lvl9pPr marL="2743200" indent="0">
-              <a:buNone/>
-              <a:defRPr sz="675"/>
+            <a:lvl9pPr marL="3657600" indent="0">
+              <a:buNone/>
+              <a:defRPr sz="900">
+                <a:solidFill>
+                  <a:srgbClr val="111111"/>
+                </a:solidFill>
+              </a:defRPr>
             </a:lvl9pPr>
           </a:lstStyle>
           <a:p>
             <a:pPr lvl="0"/>
             <a:r>
-              <a:rPr lang="en-US"/>
+              <a:rPr lang="en-US" smtClean="0">
+                <a:solidFill>
+                  <a:srgbClr val="111111"/>
+                </a:solidFill>
+              </a:rPr>
               <a:t>Click to edit Master text styles</a:t>
             </a:r>
           </a:p>
@@ -2731,9 +3235,13 @@
           <a:bodyPr/>
           <a:lstStyle/>
           <a:p>
-            <a:fld id="{241EB5C9-1307-BA42-ABA2-0BC069CD8E7F}" type="datetimeFigureOut">
-              <a:rPr lang="en-US" smtClean="0"/>
-              <a:t>1/2/22</a:t>
+            <a:fld id="{5BCAD085-E8A6-8845-BD4E-CB4CCA059FC4}" type="datetimeFigureOut">
+              <a:rPr lang="en-US" smtClean="0">
+                <a:solidFill>
+                  <a:srgbClr val="111111"/>
+                </a:solidFill>
+              </a:rPr>
+              <a:t>1/27/13</a:t>
             </a:fld>
             <a:endParaRPr lang="en-US"/>
           </a:p>
@@ -2773,8 +3281,12 @@
           <a:bodyPr/>
           <a:lstStyle/>
           <a:p>
-            <a:fld id="{C5EF2332-01BF-834F-8236-50238282D533}" type="slidenum">
-              <a:rPr lang="en-US" smtClean="0"/>
+            <a:fld id="{C1FF6DA9-008F-8B48-92A6-B652298478BF}" type="slidenum">
+              <a:rPr lang="en-US" smtClean="0">
+                <a:solidFill>
+                  <a:srgbClr val="111111"/>
+                </a:solidFill>
+              </a:rPr>
               <a:t>‹#›</a:t>
             </a:fld>
             <a:endParaRPr lang="en-US"/>
@@ -2784,7 +3296,7 @@
     </p:spTree>
     <p:extLst>
       <p:ext uri="{BB962C8B-B14F-4D97-AF65-F5344CB8AC3E}">
-        <p14:creationId xmlns:p14="http://schemas.microsoft.com/office/powerpoint/2010/main" val="3540895647"/>
+        <p14:creationId xmlns:p14="http://schemas.microsoft.com/office/powerpoint/2010/main" val="1840726560"/>
       </p:ext>
     </p:extLst>
   </p:cSld>
@@ -2823,22 +3335,31 @@
         </p:nvSpPr>
         <p:spPr>
           <a:xfrm>
-            <a:off x="1792288" y="3600450"/>
-            <a:ext cx="5486400" cy="425054"/>
+            <a:off x="1792288" y="4800600"/>
+            <a:ext cx="5486400" cy="566738"/>
           </a:xfrm>
         </p:spPr>
         <p:txBody>
           <a:bodyPr anchor="b"/>
           <a:lstStyle>
             <a:lvl1pPr algn="l">
-              <a:defRPr sz="1500" b="1"/>
+              <a:defRPr sz="2000" b="1">
+                <a:solidFill>
+                  <a:srgbClr val="111111"/>
+                </a:solidFill>
+              </a:defRPr>
             </a:lvl1pPr>
           </a:lstStyle>
           <a:p>
             <a:r>
-              <a:rPr lang="en-US"/>
+              <a:rPr lang="en-US" smtClean="0">
+                <a:solidFill>
+                  <a:srgbClr val="111111"/>
+                </a:solidFill>
+              </a:rPr>
               <a:t>Click to edit Master title style</a:t>
             </a:r>
+            <a:endParaRPr lang="en-US"/>
           </a:p>
         </p:txBody>
       </p:sp>
@@ -2854,8 +3375,8 @@
         </p:nvSpPr>
         <p:spPr>
           <a:xfrm>
-            <a:off x="1792288" y="459581"/>
-            <a:ext cx="5486400" cy="3086100"/>
+            <a:off x="1792288" y="612775"/>
+            <a:ext cx="5486400" cy="4114800"/>
           </a:xfrm>
         </p:spPr>
         <p:txBody>
@@ -2863,39 +3384,75 @@
           <a:lstStyle>
             <a:lvl1pPr marL="0" indent="0">
               <a:buNone/>
-              <a:defRPr sz="2400"/>
+              <a:defRPr sz="3200">
+                <a:solidFill>
+                  <a:srgbClr val="111111"/>
+                </a:solidFill>
+              </a:defRPr>
             </a:lvl1pPr>
-            <a:lvl2pPr marL="342900" indent="0">
-              <a:buNone/>
-              <a:defRPr sz="2100"/>
+            <a:lvl2pPr marL="457200" indent="0">
+              <a:buNone/>
+              <a:defRPr sz="2800">
+                <a:solidFill>
+                  <a:srgbClr val="111111"/>
+                </a:solidFill>
+              </a:defRPr>
             </a:lvl2pPr>
-            <a:lvl3pPr marL="685800" indent="0">
-              <a:buNone/>
-              <a:defRPr sz="1800"/>
+            <a:lvl3pPr marL="914400" indent="0">
+              <a:buNone/>
+              <a:defRPr sz="2400">
+                <a:solidFill>
+                  <a:srgbClr val="111111"/>
+                </a:solidFill>
+              </a:defRPr>
             </a:lvl3pPr>
-            <a:lvl4pPr marL="1028700" indent="0">
-              <a:buNone/>
-              <a:defRPr sz="1500"/>
+            <a:lvl4pPr marL="1371600" indent="0">
+              <a:buNone/>
+              <a:defRPr sz="2000">
+                <a:solidFill>
+                  <a:srgbClr val="111111"/>
+                </a:solidFill>
+              </a:defRPr>
             </a:lvl4pPr>
-            <a:lvl5pPr marL="1371600" indent="0">
-              <a:buNone/>
-              <a:defRPr sz="1500"/>
+            <a:lvl5pPr marL="1828800" indent="0">
+              <a:buNone/>
+              <a:defRPr sz="2000">
+                <a:solidFill>
+                  <a:srgbClr val="111111"/>
+                </a:solidFill>
+              </a:defRPr>
             </a:lvl5pPr>
-            <a:lvl6pPr marL="1714500" indent="0">
-              <a:buNone/>
-              <a:defRPr sz="1500"/>
+            <a:lvl6pPr marL="2286000" indent="0">
+              <a:buNone/>
+              <a:defRPr sz="2000">
+                <a:solidFill>
+                  <a:srgbClr val="111111"/>
+                </a:solidFill>
+              </a:defRPr>
             </a:lvl6pPr>
-            <a:lvl7pPr marL="2057400" indent="0">
-              <a:buNone/>
-              <a:defRPr sz="1500"/>
+            <a:lvl7pPr marL="2743200" indent="0">
+              <a:buNone/>
+              <a:defRPr sz="2000">
+                <a:solidFill>
+                  <a:srgbClr val="111111"/>
+                </a:solidFill>
+              </a:defRPr>
             </a:lvl7pPr>
-            <a:lvl8pPr marL="2400300" indent="0">
-              <a:buNone/>
-              <a:defRPr sz="1500"/>
+            <a:lvl8pPr marL="3200400" indent="0">
+              <a:buNone/>
+              <a:defRPr sz="2000">
+                <a:solidFill>
+                  <a:srgbClr val="111111"/>
+                </a:solidFill>
+              </a:defRPr>
             </a:lvl8pPr>
-            <a:lvl9pPr marL="2743200" indent="0">
-              <a:buNone/>
-              <a:defRPr sz="1500"/>
+            <a:lvl9pPr marL="3657600" indent="0">
+              <a:buNone/>
+              <a:defRPr sz="2000">
+                <a:solidFill>
+                  <a:srgbClr val="111111"/>
+                </a:solidFill>
+              </a:defRPr>
             </a:lvl9pPr>
           </a:lstStyle>
           <a:p>
@@ -2915,8 +3472,8 @@
         </p:nvSpPr>
         <p:spPr>
           <a:xfrm>
-            <a:off x="1792288" y="4025503"/>
-            <a:ext cx="5486400" cy="603647"/>
+            <a:off x="1792288" y="5367338"/>
+            <a:ext cx="5486400" cy="804862"/>
           </a:xfrm>
         </p:spPr>
         <p:txBody>
@@ -2924,45 +3481,85 @@
           <a:lstStyle>
             <a:lvl1pPr marL="0" indent="0">
               <a:buNone/>
-              <a:defRPr sz="1050"/>
+              <a:defRPr sz="1400">
+                <a:solidFill>
+                  <a:srgbClr val="111111"/>
+                </a:solidFill>
+              </a:defRPr>
             </a:lvl1pPr>
-            <a:lvl2pPr marL="342900" indent="0">
-              <a:buNone/>
-              <a:defRPr sz="900"/>
+            <a:lvl2pPr marL="457200" indent="0">
+              <a:buNone/>
+              <a:defRPr sz="1200">
+                <a:solidFill>
+                  <a:srgbClr val="111111"/>
+                </a:solidFill>
+              </a:defRPr>
             </a:lvl2pPr>
-            <a:lvl3pPr marL="685800" indent="0">
-              <a:buNone/>
-              <a:defRPr sz="750"/>
+            <a:lvl3pPr marL="914400" indent="0">
+              <a:buNone/>
+              <a:defRPr sz="1000">
+                <a:solidFill>
+                  <a:srgbClr val="111111"/>
+                </a:solidFill>
+              </a:defRPr>
             </a:lvl3pPr>
-            <a:lvl4pPr marL="1028700" indent="0">
-              <a:buNone/>
-              <a:defRPr sz="675"/>
+            <a:lvl4pPr marL="1371600" indent="0">
+              <a:buNone/>
+              <a:defRPr sz="900">
+                <a:solidFill>
+                  <a:srgbClr val="111111"/>
+                </a:solidFill>
+              </a:defRPr>
             </a:lvl4pPr>
-            <a:lvl5pPr marL="1371600" indent="0">
-              <a:buNone/>
-              <a:defRPr sz="675"/>
+            <a:lvl5pPr marL="1828800" indent="0">
+              <a:buNone/>
+              <a:defRPr sz="900">
+                <a:solidFill>
+                  <a:srgbClr val="111111"/>
+                </a:solidFill>
+              </a:defRPr>
             </a:lvl5pPr>
-            <a:lvl6pPr marL="1714500" indent="0">
-              <a:buNone/>
-              <a:defRPr sz="675"/>
+            <a:lvl6pPr marL="2286000" indent="0">
+              <a:buNone/>
+              <a:defRPr sz="900">
+                <a:solidFill>
+                  <a:srgbClr val="111111"/>
+                </a:solidFill>
+              </a:defRPr>
             </a:lvl6pPr>
-            <a:lvl7pPr marL="2057400" indent="0">
-              <a:buNone/>
-              <a:defRPr sz="675"/>
+            <a:lvl7pPr marL="2743200" indent="0">
+              <a:buNone/>
+              <a:defRPr sz="900">
+                <a:solidFill>
+                  <a:srgbClr val="111111"/>
+                </a:solidFill>
+              </a:defRPr>
             </a:lvl7pPr>
-            <a:lvl8pPr marL="2400300" indent="0">
-              <a:buNone/>
-              <a:defRPr sz="675"/>
+            <a:lvl8pPr marL="3200400" indent="0">
+              <a:buNone/>
+              <a:defRPr sz="900">
+                <a:solidFill>
+                  <a:srgbClr val="111111"/>
+                </a:solidFill>
+              </a:defRPr>
             </a:lvl8pPr>
-            <a:lvl9pPr marL="2743200" indent="0">
-              <a:buNone/>
-              <a:defRPr sz="675"/>
+            <a:lvl9pPr marL="3657600" indent="0">
+              <a:buNone/>
+              <a:defRPr sz="900">
+                <a:solidFill>
+                  <a:srgbClr val="111111"/>
+                </a:solidFill>
+              </a:defRPr>
             </a:lvl9pPr>
           </a:lstStyle>
           <a:p>
             <a:pPr lvl="0"/>
             <a:r>
-              <a:rPr lang="en-US"/>
+              <a:rPr lang="en-US" smtClean="0">
+                <a:solidFill>
+                  <a:srgbClr val="111111"/>
+                </a:solidFill>
+              </a:rPr>
               <a:t>Click to edit Master text styles</a:t>
             </a:r>
           </a:p>
@@ -2983,9 +3580,13 @@
           <a:bodyPr/>
           <a:lstStyle/>
           <a:p>
-            <a:fld id="{241EB5C9-1307-BA42-ABA2-0BC069CD8E7F}" type="datetimeFigureOut">
-              <a:rPr lang="en-US" smtClean="0"/>
-              <a:t>1/2/22</a:t>
+            <a:fld id="{5BCAD085-E8A6-8845-BD4E-CB4CCA059FC4}" type="datetimeFigureOut">
+              <a:rPr lang="en-US" smtClean="0">
+                <a:solidFill>
+                  <a:srgbClr val="111111"/>
+                </a:solidFill>
+              </a:rPr>
+              <a:t>1/27/13</a:t>
             </a:fld>
             <a:endParaRPr lang="en-US"/>
           </a:p>
@@ -3025,8 +3626,12 @@
           <a:bodyPr/>
           <a:lstStyle/>
           <a:p>
-            <a:fld id="{C5EF2332-01BF-834F-8236-50238282D533}" type="slidenum">
-              <a:rPr lang="en-US" smtClean="0"/>
+            <a:fld id="{C1FF6DA9-008F-8B48-92A6-B652298478BF}" type="slidenum">
+              <a:rPr lang="en-US" smtClean="0">
+                <a:solidFill>
+                  <a:srgbClr val="111111"/>
+                </a:solidFill>
+              </a:rPr>
               <a:t>‹#›</a:t>
             </a:fld>
             <a:endParaRPr lang="en-US"/>
@@ -3036,7 +3641,7 @@
     </p:spTree>
     <p:extLst>
       <p:ext uri="{BB962C8B-B14F-4D97-AF65-F5344CB8AC3E}">
-        <p14:creationId xmlns:p14="http://schemas.microsoft.com/office/powerpoint/2010/main" val="3566899855"/>
+        <p14:creationId xmlns:p14="http://schemas.microsoft.com/office/powerpoint/2010/main" val="3889236939"/>
       </p:ext>
     </p:extLst>
   </p:cSld>
@@ -3050,9 +3655,12 @@
 <p:sldMaster xmlns:a="http://schemas.openxmlformats.org/drawingml/2006/main" xmlns:p="http://schemas.openxmlformats.org/presentationml/2006/main" xmlns:r="http://schemas.openxmlformats.org/officeDocument/2006/relationships">
   <p:cSld>
     <p:bg>
-      <p:bgRef idx="1001">
-        <a:schemeClr val="bg1"/>
-      </p:bgRef>
+      <p:bgPr>
+        <a:solidFill>
+          <a:srgbClr val="FFFFFF"/>
+        </a:solidFill>
+        <a:effectLst/>
+      </p:bgPr>
     </p:bg>
     <p:spTree>
       <p:nvGrpSpPr>
@@ -3080,8 +3688,8 @@
         </p:nvSpPr>
         <p:spPr>
           <a:xfrm>
-            <a:off x="457200" y="205979"/>
-            <a:ext cx="8229600" cy="857250"/>
+            <a:off x="457200" y="274638"/>
+            <a:ext cx="8229600" cy="1143000"/>
           </a:xfrm>
           <a:prstGeom prst="rect">
             <a:avLst/>
@@ -3094,9 +3702,14 @@
           <a:lstStyle/>
           <a:p>
             <a:r>
-              <a:rPr lang="en-US"/>
+              <a:rPr lang="en-US" smtClean="0">
+                <a:solidFill>
+                  <a:srgbClr val="111111"/>
+                </a:solidFill>
+              </a:rPr>
               <a:t>Click to edit Master title style</a:t>
             </a:r>
+            <a:endParaRPr lang="en-US"/>
           </a:p>
         </p:txBody>
       </p:sp>
@@ -3112,8 +3725,8 @@
         </p:nvSpPr>
         <p:spPr>
           <a:xfrm>
-            <a:off x="457200" y="1200151"/>
-            <a:ext cx="8229600" cy="3394472"/>
+            <a:off x="457200" y="1600200"/>
+            <a:ext cx="8229600" cy="4525963"/>
           </a:xfrm>
           <a:prstGeom prst="rect">
             <a:avLst/>
@@ -3127,37 +3740,58 @@
           <a:p>
             <a:pPr lvl="0"/>
             <a:r>
-              <a:rPr lang="en-US"/>
+              <a:rPr lang="en-US" smtClean="0">
+                <a:solidFill>
+                  <a:srgbClr val="111111"/>
+                </a:solidFill>
+              </a:rPr>
               <a:t>Click to edit Master text styles</a:t>
             </a:r>
           </a:p>
           <a:p>
             <a:pPr lvl="1"/>
             <a:r>
-              <a:rPr lang="en-US"/>
+              <a:rPr lang="en-US" smtClean="0">
+                <a:solidFill>
+                  <a:srgbClr val="111111"/>
+                </a:solidFill>
+              </a:rPr>
               <a:t>Second level</a:t>
             </a:r>
           </a:p>
           <a:p>
             <a:pPr lvl="2"/>
             <a:r>
-              <a:rPr lang="en-US"/>
+              <a:rPr lang="en-US" smtClean="0">
+                <a:solidFill>
+                  <a:srgbClr val="111111"/>
+                </a:solidFill>
+              </a:rPr>
               <a:t>Third level</a:t>
             </a:r>
           </a:p>
           <a:p>
             <a:pPr lvl="3"/>
             <a:r>
-              <a:rPr lang="en-US"/>
+              <a:rPr lang="en-US" smtClean="0">
+                <a:solidFill>
+                  <a:srgbClr val="111111"/>
+                </a:solidFill>
+              </a:rPr>
               <a:t>Fourth level</a:t>
             </a:r>
           </a:p>
           <a:p>
             <a:pPr lvl="4"/>
             <a:r>
-              <a:rPr lang="en-US"/>
+              <a:rPr lang="en-US" smtClean="0">
+                <a:solidFill>
+                  <a:srgbClr val="111111"/>
+                </a:solidFill>
+              </a:rPr>
               <a:t>Fifth level</a:t>
             </a:r>
+            <a:endParaRPr lang="en-US"/>
           </a:p>
         </p:txBody>
       </p:sp>
@@ -3173,8 +3807,8 @@
         </p:nvSpPr>
         <p:spPr>
           <a:xfrm>
-            <a:off x="457200" y="4767263"/>
-            <a:ext cx="2133600" cy="273844"/>
+            <a:off x="457200" y="6356350"/>
+            <a:ext cx="2133600" cy="365125"/>
           </a:xfrm>
           <a:prstGeom prst="rect">
             <a:avLst/>
@@ -3184,19 +3818,21 @@
           <a:bodyPr anchor="ctr" bIns="45720" lIns="91440" rIns="91440" rtlCol="0" tIns="45720" vert="horz"/>
           <a:lstStyle>
             <a:lvl1pPr algn="l">
-              <a:defRPr sz="900">
-                <a:solidFill>
-                  <a:schemeClr val="tx1">
-                    <a:tint val="75000"/>
-                  </a:schemeClr>
+              <a:defRPr sz="1200">
+                <a:solidFill>
+                  <a:srgbClr val="111111"/>
                 </a:solidFill>
               </a:defRPr>
             </a:lvl1pPr>
           </a:lstStyle>
           <a:p>
-            <a:fld id="{241EB5C9-1307-BA42-ABA2-0BC069CD8E7F}" type="datetimeFigureOut">
-              <a:rPr lang="en-US" smtClean="0"/>
-              <a:t>1/2/22</a:t>
+            <a:fld id="{5BCAD085-E8A6-8845-BD4E-CB4CCA059FC4}" type="datetimeFigureOut">
+              <a:rPr lang="en-US" smtClean="0">
+                <a:solidFill>
+                  <a:srgbClr val="111111"/>
+                </a:solidFill>
+              </a:rPr>
+              <a:t>1/27/13</a:t>
             </a:fld>
             <a:endParaRPr lang="en-US"/>
           </a:p>
@@ -3214,8 +3850,8 @@
         </p:nvSpPr>
         <p:spPr>
           <a:xfrm>
-            <a:off x="3124200" y="4767263"/>
-            <a:ext cx="2895600" cy="273844"/>
+            <a:off x="3124200" y="6356350"/>
+            <a:ext cx="2895600" cy="365125"/>
           </a:xfrm>
           <a:prstGeom prst="rect">
             <a:avLst/>
@@ -3225,11 +3861,9 @@
           <a:bodyPr anchor="ctr" bIns="45720" lIns="91440" rIns="91440" rtlCol="0" tIns="45720" vert="horz"/>
           <a:lstStyle>
             <a:lvl1pPr algn="ctr">
-              <a:defRPr sz="900">
-                <a:solidFill>
-                  <a:schemeClr val="tx1">
-                    <a:tint val="75000"/>
-                  </a:schemeClr>
+              <a:defRPr sz="1200">
+                <a:solidFill>
+                  <a:srgbClr val="111111"/>
                 </a:solidFill>
               </a:defRPr>
             </a:lvl1pPr>
@@ -3251,8 +3885,8 @@
         </p:nvSpPr>
         <p:spPr>
           <a:xfrm>
-            <a:off x="6553200" y="4767263"/>
-            <a:ext cx="2133600" cy="273844"/>
+            <a:off x="6553200" y="6356350"/>
+            <a:ext cx="2133600" cy="365125"/>
           </a:xfrm>
           <a:prstGeom prst="rect">
             <a:avLst/>
@@ -3262,18 +3896,20 @@
           <a:bodyPr anchor="ctr" bIns="45720" lIns="91440" rIns="91440" rtlCol="0" tIns="45720" vert="horz"/>
           <a:lstStyle>
             <a:lvl1pPr algn="r">
-              <a:defRPr sz="900">
-                <a:solidFill>
-                  <a:schemeClr val="tx1">
-                    <a:tint val="75000"/>
-                  </a:schemeClr>
+              <a:defRPr sz="1200">
+                <a:solidFill>
+                  <a:srgbClr val="111111"/>
                 </a:solidFill>
               </a:defRPr>
             </a:lvl1pPr>
           </a:lstStyle>
           <a:p>
-            <a:fld id="{C5EF2332-01BF-834F-8236-50238282D533}" type="slidenum">
-              <a:rPr lang="en-US" smtClean="0"/>
+            <a:fld id="{C1FF6DA9-008F-8B48-92A6-B652298478BF}" type="slidenum">
+              <a:rPr lang="en-US" smtClean="0">
+                <a:solidFill>
+                  <a:srgbClr val="111111"/>
+                </a:solidFill>
+              </a:rPr>
               <a:t>‹#›</a:t>
             </a:fld>
             <a:endParaRPr lang="en-US"/>
@@ -3283,7 +3919,7 @@
     </p:spTree>
     <p:extLst>
       <p:ext uri="{BB962C8B-B14F-4D97-AF65-F5344CB8AC3E}">
-        <p14:creationId xmlns:p14="http://schemas.microsoft.com/office/powerpoint/2010/main" val="3676200875"/>
+        <p14:creationId xmlns:p14="http://schemas.microsoft.com/office/powerpoint/2010/main" val="2209977519"/>
       </p:ext>
     </p:extLst>
   </p:cSld>
@@ -3303,250 +3939,254 @@
   </p:sldLayoutIdLst>
   <p:txStyles>
     <p:titleStyle>
-      <a:lvl1pPr algn="ctr" defTabSz="342900" eaLnBrk="1" hangingPunct="1" latinLnBrk="0" rtl="0">
+      <a:lvl1pPr algn="ctr" defTabSz="457200" eaLnBrk="1" hangingPunct="1" latinLnBrk="0" rtl="0">
         <a:spcBef>
           <a:spcPct val="0"/>
         </a:spcBef>
         <a:buNone/>
-        <a:defRPr kern="1200" sz="3300">
-          <a:solidFill>
-            <a:schemeClr val="tx1"/>
-          </a:solidFill>
-          <a:latin typeface="+mj-lt"/>
+        <a:defRPr kern="1200" sz="4400">
+          <a:latin typeface="Cambria"/>
           <a:ea typeface="+mj-ea"/>
           <a:cs typeface="+mj-cs"/>
+          <a:solidFill>
+            <a:srgbClr val="111111"/>
+          </a:solidFill>
         </a:defRPr>
       </a:lvl1pPr>
     </p:titleStyle>
     <p:bodyStyle>
-      <a:lvl1pPr algn="l" defTabSz="342900" eaLnBrk="1" hangingPunct="1" indent="-342900" latinLnBrk="0" marL="342900" rtl="0">
+      <a:lvl1pPr algn="l" defTabSz="457200" eaLnBrk="1" hangingPunct="1" indent="-342900" latinLnBrk="0" marL="342900" rtl="0">
+        <a:spcBef>
+          <a:spcPct val="20000"/>
+        </a:spcBef>
+        <a:buFont typeface="Arial"/>
+        <a:buChar char="•"/>
+        <a:defRPr kern="1200" sz="3200">
+          <a:latin typeface="Cambria"/>
+          <a:ea typeface="+mn-ea"/>
+          <a:cs typeface="+mn-cs"/>
+          <a:solidFill>
+            <a:srgbClr val="111111"/>
+          </a:solidFill>
+        </a:defRPr>
+      </a:lvl1pPr>
+      <a:lvl2pPr algn="l" defTabSz="457200" eaLnBrk="1" hangingPunct="1" indent="-285750" latinLnBrk="0" marL="742950" rtl="0">
+        <a:spcBef>
+          <a:spcPct val="20000"/>
+        </a:spcBef>
+        <a:buFont typeface="Arial"/>
+        <a:buChar char="–"/>
+        <a:defRPr kern="1200" sz="2800">
+          <a:latin typeface="Cambria"/>
+          <a:ea typeface="+mn-ea"/>
+          <a:cs typeface="+mn-cs"/>
+          <a:solidFill>
+            <a:srgbClr val="111111"/>
+          </a:solidFill>
+        </a:defRPr>
+      </a:lvl2pPr>
+      <a:lvl3pPr algn="l" defTabSz="457200" eaLnBrk="1" hangingPunct="1" indent="-228600" latinLnBrk="0" marL="1143000" rtl="0">
         <a:spcBef>
           <a:spcPct val="20000"/>
         </a:spcBef>
         <a:buFont typeface="Arial"/>
         <a:buChar char="•"/>
         <a:defRPr kern="1200" sz="2400">
-          <a:solidFill>
-            <a:schemeClr val="tx1"/>
-          </a:solidFill>
-          <a:latin typeface="+mn-lt"/>
+          <a:latin typeface="Cambria"/>
           <a:ea typeface="+mn-ea"/>
           <a:cs typeface="+mn-cs"/>
+          <a:solidFill>
+            <a:srgbClr val="111111"/>
+          </a:solidFill>
         </a:defRPr>
-      </a:lvl1pPr>
-      <a:lvl2pPr algn="l" defTabSz="342900" eaLnBrk="1" hangingPunct="1" indent="-342900" latinLnBrk="0" marL="685800" rtl="0">
+      </a:lvl3pPr>
+      <a:lvl4pPr algn="l" defTabSz="457200" eaLnBrk="1" hangingPunct="1" indent="-228600" latinLnBrk="0" marL="1600200" rtl="0">
         <a:spcBef>
           <a:spcPct val="20000"/>
         </a:spcBef>
         <a:buFont typeface="Arial"/>
         <a:buChar char="–"/>
-        <a:defRPr kern="1200" sz="2100">
-          <a:solidFill>
-            <a:schemeClr val="tx1"/>
-          </a:solidFill>
-          <a:latin typeface="+mn-lt"/>
+        <a:defRPr kern="1200" sz="2000">
+          <a:latin typeface="Cambria"/>
           <a:ea typeface="+mn-ea"/>
           <a:cs typeface="+mn-cs"/>
+          <a:solidFill>
+            <a:srgbClr val="111111"/>
+          </a:solidFill>
         </a:defRPr>
-      </a:lvl2pPr>
-      <a:lvl3pPr algn="l" defTabSz="342900" eaLnBrk="1" hangingPunct="1" indent="-342900" latinLnBrk="0" marL="1028700" rtl="0">
+      </a:lvl4pPr>
+      <a:lvl5pPr algn="l" defTabSz="457200" eaLnBrk="1" hangingPunct="1" indent="-228600" latinLnBrk="0" marL="2057400" rtl="0">
+        <a:spcBef>
+          <a:spcPct val="20000"/>
+        </a:spcBef>
+        <a:buFont typeface="Arial"/>
+        <a:buChar char="»"/>
+        <a:defRPr kern="1200" sz="2000">
+          <a:latin typeface="Cambria"/>
+          <a:ea typeface="+mn-ea"/>
+          <a:cs typeface="+mn-cs"/>
+          <a:solidFill>
+            <a:srgbClr val="111111"/>
+          </a:solidFill>
+        </a:defRPr>
+      </a:lvl5pPr>
+      <a:lvl6pPr algn="l" defTabSz="457200" eaLnBrk="1" hangingPunct="1" indent="-228600" latinLnBrk="0" marL="2514600" rtl="0">
         <a:spcBef>
           <a:spcPct val="20000"/>
         </a:spcBef>
         <a:buFont typeface="Arial"/>
         <a:buChar char="•"/>
-        <a:defRPr kern="1200" sz="1800">
-          <a:solidFill>
-            <a:schemeClr val="tx1"/>
-          </a:solidFill>
-          <a:latin typeface="+mn-lt"/>
+        <a:defRPr kern="1200" sz="2000">
+          <a:latin typeface="Cambria"/>
           <a:ea typeface="+mn-ea"/>
           <a:cs typeface="+mn-cs"/>
+          <a:solidFill>
+            <a:srgbClr val="111111"/>
+          </a:solidFill>
         </a:defRPr>
-      </a:lvl3pPr>
-      <a:lvl4pPr algn="l" defTabSz="342900" eaLnBrk="1" hangingPunct="1" indent="-342900" latinLnBrk="0" marL="1371600" rtl="0">
-        <a:spcBef>
-          <a:spcPct val="20000"/>
-        </a:spcBef>
-        <a:buFont typeface="Arial"/>
-        <a:buChar char="–"/>
-        <a:defRPr kern="1200" sz="1500">
-          <a:solidFill>
-            <a:schemeClr val="tx1"/>
-          </a:solidFill>
-          <a:latin typeface="+mn-lt"/>
-          <a:ea typeface="+mn-ea"/>
-          <a:cs typeface="+mn-cs"/>
-        </a:defRPr>
-      </a:lvl4pPr>
-      <a:lvl5pPr algn="l" defTabSz="342900" eaLnBrk="1" hangingPunct="1" indent="-342900" latinLnBrk="0" marL="1714500" rtl="0">
-        <a:spcBef>
-          <a:spcPct val="20000"/>
-        </a:spcBef>
-        <a:buFont typeface="Arial"/>
-        <a:buChar char="»"/>
-        <a:defRPr kern="1200" sz="1500">
-          <a:solidFill>
-            <a:schemeClr val="tx1"/>
-          </a:solidFill>
-          <a:latin typeface="+mn-lt"/>
-          <a:ea typeface="+mn-ea"/>
-          <a:cs typeface="+mn-cs"/>
-        </a:defRPr>
-      </a:lvl5pPr>
-      <a:lvl6pPr algn="l" defTabSz="342900" eaLnBrk="1" hangingPunct="1" indent="-342900" latinLnBrk="0" marL="2057400" rtl="0">
+      </a:lvl6pPr>
+      <a:lvl7pPr algn="l" defTabSz="457200" eaLnBrk="1" hangingPunct="1" indent="-228600" latinLnBrk="0" marL="2971800" rtl="0">
         <a:spcBef>
           <a:spcPct val="20000"/>
         </a:spcBef>
         <a:buFont typeface="Arial"/>
         <a:buChar char="•"/>
-        <a:defRPr kern="1200" sz="1500">
-          <a:solidFill>
-            <a:schemeClr val="tx1"/>
-          </a:solidFill>
-          <a:latin typeface="+mn-lt"/>
+        <a:defRPr kern="1200" sz="2000">
+          <a:latin typeface="Cambria"/>
           <a:ea typeface="+mn-ea"/>
           <a:cs typeface="+mn-cs"/>
+          <a:solidFill>
+            <a:srgbClr val="111111"/>
+          </a:solidFill>
         </a:defRPr>
-      </a:lvl6pPr>
-      <a:lvl7pPr algn="l" defTabSz="342900" eaLnBrk="1" hangingPunct="1" indent="-342900" latinLnBrk="0" marL="2400300" rtl="0">
+      </a:lvl7pPr>
+      <a:lvl8pPr algn="l" defTabSz="457200" eaLnBrk="1" hangingPunct="1" indent="-228600" latinLnBrk="0" marL="3429000" rtl="0">
         <a:spcBef>
           <a:spcPct val="20000"/>
         </a:spcBef>
         <a:buFont typeface="Arial"/>
         <a:buChar char="•"/>
-        <a:defRPr kern="1200" sz="1500">
-          <a:solidFill>
-            <a:schemeClr val="tx1"/>
-          </a:solidFill>
-          <a:latin typeface="+mn-lt"/>
+        <a:defRPr kern="1200" sz="2000">
+          <a:latin typeface="Cambria"/>
           <a:ea typeface="+mn-ea"/>
           <a:cs typeface="+mn-cs"/>
+          <a:solidFill>
+            <a:srgbClr val="111111"/>
+          </a:solidFill>
         </a:defRPr>
-      </a:lvl7pPr>
-      <a:lvl8pPr algn="l" defTabSz="342900" eaLnBrk="1" hangingPunct="1" indent="-342900" latinLnBrk="0" marL="2743200" rtl="0">
+      </a:lvl8pPr>
+      <a:lvl9pPr algn="l" defTabSz="457200" eaLnBrk="1" hangingPunct="1" indent="-228600" latinLnBrk="0" marL="3886200" rtl="0">
         <a:spcBef>
           <a:spcPct val="20000"/>
         </a:spcBef>
         <a:buFont typeface="Arial"/>
         <a:buChar char="•"/>
-        <a:defRPr kern="1200" sz="1500">
-          <a:solidFill>
-            <a:schemeClr val="tx1"/>
-          </a:solidFill>
-          <a:latin typeface="+mn-lt"/>
+        <a:defRPr kern="1200" sz="2000">
+          <a:latin typeface="Cambria"/>
           <a:ea typeface="+mn-ea"/>
           <a:cs typeface="+mn-cs"/>
-        </a:defRPr>
-      </a:lvl8pPr>
-      <a:lvl9pPr algn="l" defTabSz="342900" eaLnBrk="1" hangingPunct="1" indent="-342900" latinLnBrk="0" marL="3086100" rtl="0">
-        <a:spcBef>
-          <a:spcPct val="20000"/>
-        </a:spcBef>
-        <a:buFont typeface="Arial"/>
-        <a:buChar char="•"/>
-        <a:defRPr kern="1200" sz="1500">
           <a:solidFill>
-            <a:schemeClr val="tx1"/>
+            <a:srgbClr val="111111"/>
           </a:solidFill>
-          <a:latin typeface="+mn-lt"/>
-          <a:ea typeface="+mn-ea"/>
-          <a:cs typeface="+mn-cs"/>
         </a:defRPr>
       </a:lvl9pPr>
     </p:bodyStyle>
     <p:otherStyle>
       <a:defPPr>
-        <a:defRPr lang="en-US"/>
+        <a:defRPr lang="en-US">
+          <a:solidFill>
+            <a:srgbClr val="111111"/>
+          </a:solidFill>
+        </a:defRPr>
       </a:defPPr>
-      <a:lvl1pPr algn="l" defTabSz="342900" eaLnBrk="1" hangingPunct="1" latinLnBrk="0" marL="0" rtl="0">
-        <a:defRPr kern="1200" sz="1350">
-          <a:solidFill>
-            <a:schemeClr val="tx1"/>
-          </a:solidFill>
-          <a:latin typeface="+mn-lt"/>
+      <a:lvl1pPr algn="l" defTabSz="457200" eaLnBrk="1" hangingPunct="1" latinLnBrk="0" marL="0" rtl="0">
+        <a:defRPr kern="1200" sz="1800">
+          <a:latin typeface="Cambria"/>
           <a:ea typeface="+mn-ea"/>
           <a:cs typeface="+mn-cs"/>
+          <a:solidFill>
+            <a:srgbClr val="111111"/>
+          </a:solidFill>
         </a:defRPr>
       </a:lvl1pPr>
-      <a:lvl2pPr algn="l" defTabSz="342900" eaLnBrk="1" hangingPunct="1" latinLnBrk="0" marL="342900" rtl="0">
-        <a:defRPr kern="1200" sz="1350">
-          <a:solidFill>
-            <a:schemeClr val="tx1"/>
-          </a:solidFill>
-          <a:latin typeface="+mn-lt"/>
+      <a:lvl2pPr algn="l" defTabSz="457200" eaLnBrk="1" hangingPunct="1" latinLnBrk="0" marL="457200" rtl="0">
+        <a:defRPr kern="1200" sz="1800">
+          <a:latin typeface="Cambria"/>
           <a:ea typeface="+mn-ea"/>
           <a:cs typeface="+mn-cs"/>
+          <a:solidFill>
+            <a:srgbClr val="111111"/>
+          </a:solidFill>
         </a:defRPr>
       </a:lvl2pPr>
-      <a:lvl3pPr algn="l" defTabSz="342900" eaLnBrk="1" hangingPunct="1" latinLnBrk="0" marL="685800" rtl="0">
-        <a:defRPr kern="1200" sz="1350">
-          <a:solidFill>
-            <a:schemeClr val="tx1"/>
-          </a:solidFill>
-          <a:latin typeface="+mn-lt"/>
+      <a:lvl3pPr algn="l" defTabSz="457200" eaLnBrk="1" hangingPunct="1" latinLnBrk="0" marL="914400" rtl="0">
+        <a:defRPr kern="1200" sz="1800">
+          <a:latin typeface="Cambria"/>
           <a:ea typeface="+mn-ea"/>
           <a:cs typeface="+mn-cs"/>
+          <a:solidFill>
+            <a:srgbClr val="111111"/>
+          </a:solidFill>
         </a:defRPr>
       </a:lvl3pPr>
-      <a:lvl4pPr algn="l" defTabSz="342900" eaLnBrk="1" hangingPunct="1" latinLnBrk="0" marL="1028700" rtl="0">
-        <a:defRPr kern="1200" sz="1350">
-          <a:solidFill>
-            <a:schemeClr val="tx1"/>
-          </a:solidFill>
-          <a:latin typeface="+mn-lt"/>
+      <a:lvl4pPr algn="l" defTabSz="457200" eaLnBrk="1" hangingPunct="1" latinLnBrk="0" marL="1371600" rtl="0">
+        <a:defRPr kern="1200" sz="1800">
+          <a:latin typeface="Cambria"/>
           <a:ea typeface="+mn-ea"/>
           <a:cs typeface="+mn-cs"/>
+          <a:solidFill>
+            <a:srgbClr val="111111"/>
+          </a:solidFill>
         </a:defRPr>
       </a:lvl4pPr>
-      <a:lvl5pPr algn="l" defTabSz="342900" eaLnBrk="1" hangingPunct="1" latinLnBrk="0" marL="1371600" rtl="0">
-        <a:defRPr kern="1200" sz="1350">
-          <a:solidFill>
-            <a:schemeClr val="tx1"/>
-          </a:solidFill>
-          <a:latin typeface="+mn-lt"/>
+      <a:lvl5pPr algn="l" defTabSz="457200" eaLnBrk="1" hangingPunct="1" latinLnBrk="0" marL="1828800" rtl="0">
+        <a:defRPr kern="1200" sz="1800">
+          <a:latin typeface="Cambria"/>
           <a:ea typeface="+mn-ea"/>
           <a:cs typeface="+mn-cs"/>
+          <a:solidFill>
+            <a:srgbClr val="111111"/>
+          </a:solidFill>
         </a:defRPr>
       </a:lvl5pPr>
-      <a:lvl6pPr algn="l" defTabSz="342900" eaLnBrk="1" hangingPunct="1" latinLnBrk="0" marL="1714500" rtl="0">
-        <a:defRPr kern="1200" sz="1350">
-          <a:solidFill>
-            <a:schemeClr val="tx1"/>
-          </a:solidFill>
-          <a:latin typeface="+mn-lt"/>
+      <a:lvl6pPr algn="l" defTabSz="457200" eaLnBrk="1" hangingPunct="1" latinLnBrk="0" marL="2286000" rtl="0">
+        <a:defRPr kern="1200" sz="1800">
+          <a:latin typeface="Cambria"/>
           <a:ea typeface="+mn-ea"/>
           <a:cs typeface="+mn-cs"/>
+          <a:solidFill>
+            <a:srgbClr val="111111"/>
+          </a:solidFill>
         </a:defRPr>
       </a:lvl6pPr>
-      <a:lvl7pPr algn="l" defTabSz="342900" eaLnBrk="1" hangingPunct="1" latinLnBrk="0" marL="2057400" rtl="0">
-        <a:defRPr kern="1200" sz="1350">
-          <a:solidFill>
-            <a:schemeClr val="tx1"/>
-          </a:solidFill>
-          <a:latin typeface="+mn-lt"/>
+      <a:lvl7pPr algn="l" defTabSz="457200" eaLnBrk="1" hangingPunct="1" latinLnBrk="0" marL="2743200" rtl="0">
+        <a:defRPr kern="1200" sz="1800">
+          <a:latin typeface="Cambria"/>
           <a:ea typeface="+mn-ea"/>
           <a:cs typeface="+mn-cs"/>
+          <a:solidFill>
+            <a:srgbClr val="111111"/>
+          </a:solidFill>
         </a:defRPr>
       </a:lvl7pPr>
-      <a:lvl8pPr algn="l" defTabSz="342900" eaLnBrk="1" hangingPunct="1" latinLnBrk="0" marL="2400300" rtl="0">
-        <a:defRPr kern="1200" sz="1350">
-          <a:solidFill>
-            <a:schemeClr val="tx1"/>
-          </a:solidFill>
-          <a:latin typeface="+mn-lt"/>
+      <a:lvl8pPr algn="l" defTabSz="457200" eaLnBrk="1" hangingPunct="1" latinLnBrk="0" marL="3200400" rtl="0">
+        <a:defRPr kern="1200" sz="1800">
+          <a:latin typeface="Cambria"/>
           <a:ea typeface="+mn-ea"/>
           <a:cs typeface="+mn-cs"/>
+          <a:solidFill>
+            <a:srgbClr val="111111"/>
+          </a:solidFill>
         </a:defRPr>
       </a:lvl8pPr>
-      <a:lvl9pPr algn="l" defTabSz="342900" eaLnBrk="1" hangingPunct="1" latinLnBrk="0" marL="2743200" rtl="0">
-        <a:defRPr kern="1200" sz="1350">
-          <a:solidFill>
-            <a:schemeClr val="tx1"/>
-          </a:solidFill>
-          <a:latin typeface="+mn-lt"/>
+      <a:lvl9pPr algn="l" defTabSz="457200" eaLnBrk="1" hangingPunct="1" latinLnBrk="0" marL="3657600" rtl="0">
+        <a:defRPr kern="1200" sz="1800">
+          <a:latin typeface="Cambria"/>
           <a:ea typeface="+mn-ea"/>
           <a:cs typeface="+mn-cs"/>
+          <a:solidFill>
+            <a:srgbClr val="111111"/>
+          </a:solidFill>
         </a:defRPr>
       </a:lvl9pPr>
     </p:otherStyle>
@@ -3583,8 +4223,8 @@
         </p:nvSpPr>
         <p:spPr>
           <a:xfrm>
-            <a:off x="685800" y="1597819"/>
-            <a:ext cx="7772400" cy="1102519"/>
+            <a:off x="685800" y="2130425"/>
+            <a:ext cx="7772400" cy="1470025"/>
           </a:xfrm>
         </p:spPr>
         <p:txBody>
@@ -3613,8 +4253,8 @@
         </p:nvSpPr>
         <p:spPr>
           <a:xfrm>
-            <a:off x="1371600" y="2914650"/>
-            <a:ext cx="6400800" cy="1314450"/>
+            <a:off x="1371600" y="3886200"/>
+            <a:ext cx="6400800" cy="1752600"/>
           </a:xfrm>
         </p:spPr>
         <p:txBody>
@@ -3701,8 +4341,8 @@
         </p:nvSpPr>
         <p:spPr>
           <a:xfrm>
-            <a:off x="722313" y="3305176"/>
-            <a:ext cx="7772400" cy="1021556"/>
+            <a:off x="722313" y="4406900"/>
+            <a:ext cx="7772400" cy="1362075"/>
           </a:xfrm>
         </p:spPr>
         <p:txBody>
@@ -4271,7 +4911,7 @@
             </a:r>
           </a:p>
           <a:p>
-            <a:pPr lvl="1" indent="-342900" marL="685800">
+            <a:pPr lvl="1" indent="-457200" marL="914400">
               <a:buAutoNum type="arabicPeriod"/>
             </a:pPr>
             <a:r>
@@ -4280,7 +4920,7 @@
             </a:r>
           </a:p>
           <a:p>
-            <a:pPr lvl="1" indent="-342900" marL="685800">
+            <a:pPr lvl="1" indent="-457200" marL="914400">
               <a:buAutoNum type="arabicPeriod"/>
             </a:pPr>
             <a:r>
@@ -5792,8 +6432,8 @@
         </p:nvSpPr>
         <p:spPr>
           <a:xfrm>
-            <a:off x="722313" y="3305176"/>
-            <a:ext cx="7772400" cy="1021556"/>
+            <a:off x="722313" y="4406900"/>
+            <a:ext cx="7772400" cy="1362075"/>
           </a:xfrm>
         </p:spPr>
         <p:txBody>
@@ -6574,8 +7214,8 @@
           </p:nvPr>
         </p:nvGraphicFramePr>
         <p:xfrm>
-          <a:off x="457200" y="1193800"/>
-          <a:ext cx="8229600" cy="3390900"/>
+          <a:off x="457200" y="1600200"/>
+          <a:ext cx="8229600" cy="4521200"/>
         </p:xfrm>
         <a:graphic>
           <a:graphicData uri="http://schemas.openxmlformats.org/drawingml/2006/table">
@@ -8063,7 +8703,7 @@
           <a:bodyPr/>
           <a:lstStyle/>
           <a:p>
-            <a:pPr lvl="0" indent="-342900" marL="342900">
+            <a:pPr lvl="0" indent="-457200" marL="457200">
               <a:buAutoNum type="arabicPeriod"/>
             </a:pPr>
             <a:r>
@@ -8072,7 +8712,7 @@
             </a:r>
           </a:p>
           <a:p>
-            <a:pPr lvl="0" indent="-342900" marL="342900">
+            <a:pPr lvl="0" indent="-457200" marL="457200">
               <a:buAutoNum type="arabicPeriod"/>
             </a:pPr>
             <a:r>
@@ -8081,7 +8721,7 @@
             </a:r>
           </a:p>
           <a:p>
-            <a:pPr lvl="0" indent="-342900" marL="342900">
+            <a:pPr lvl="0" indent="-457200" marL="457200">
               <a:buAutoNum type="arabicPeriod"/>
             </a:pPr>
             <a:r>
@@ -8596,8 +9236,8 @@
         </p:nvSpPr>
         <p:spPr>
           <a:xfrm>
-            <a:off x="722313" y="3305176"/>
-            <a:ext cx="7772400" cy="1021556"/>
+            <a:off x="722313" y="4406900"/>
+            <a:ext cx="7772400" cy="1362075"/>
           </a:xfrm>
         </p:spPr>
         <p:txBody>
@@ -8685,7 +9325,7 @@
             </a:r>
           </a:p>
           <a:p>
-            <a:pPr lvl="0" indent="-342900" marL="342900">
+            <a:pPr lvl="0" indent="-457200" marL="457200">
               <a:buAutoNum type="arabicPeriod"/>
             </a:pPr>
             <a:r>
@@ -8694,7 +9334,7 @@
             </a:r>
           </a:p>
           <a:p>
-            <a:pPr lvl="0" indent="-342900" marL="342900">
+            <a:pPr lvl="0" indent="-457200" marL="457200">
               <a:buAutoNum type="arabicPeriod"/>
             </a:pPr>
             <a:r>
@@ -8703,7 +9343,7 @@
             </a:r>
           </a:p>
           <a:p>
-            <a:pPr lvl="0" indent="-342900" marL="342900">
+            <a:pPr lvl="0" indent="-457200" marL="457200">
               <a:buAutoNum type="arabicPeriod"/>
             </a:pPr>
             <a:r>
@@ -10048,8 +10688,8 @@
         </p:nvSpPr>
         <p:spPr>
           <a:xfrm>
-            <a:off x="722313" y="3305176"/>
-            <a:ext cx="7772400" cy="1021556"/>
+            <a:off x="722313" y="4406900"/>
+            <a:ext cx="7772400" cy="1362075"/>
           </a:xfrm>
         </p:spPr>
         <p:txBody>
@@ -10352,8 +10992,8 @@
         </p:nvSpPr>
         <p:spPr>
           <a:xfrm>
-            <a:off x="722313" y="3305176"/>
-            <a:ext cx="7772400" cy="1021556"/>
+            <a:off x="722313" y="4406900"/>
+            <a:ext cx="7772400" cy="1362075"/>
           </a:xfrm>
         </p:spPr>
         <p:txBody>

--- a/courses/research-in-finance/lectures/lecture-04-academic-publishing/slides.pptx
+++ b/courses/research-in-finance/lectures/lecture-04-academic-publishing/slides.pptx
@@ -7,7 +7,57 @@
   <p:notesMasterIdLst>
     <p:notesMasterId r:id="rId50"/>
   </p:notesMasterIdLst>
-  <p:sldSz cx="12191695" cy="6858000" type="screen4x3"/>
+  <p:sldIdLst>
+    <p:sldId id="256" r:id="rId2"/>
+    <p:sldId id="257" r:id="rId3"/>
+    <p:sldId id="258" r:id="rId4"/>
+    <p:sldId id="259" r:id="rId5"/>
+    <p:sldId id="260" r:id="rId6"/>
+    <p:sldId id="261" r:id="rId7"/>
+    <p:sldId id="262" r:id="rId8"/>
+    <p:sldId id="263" r:id="rId9"/>
+    <p:sldId id="264" r:id="rId10"/>
+    <p:sldId id="265" r:id="rId11"/>
+    <p:sldId id="266" r:id="rId12"/>
+    <p:sldId id="267" r:id="rId13"/>
+    <p:sldId id="268" r:id="rId14"/>
+    <p:sldId id="269" r:id="rId15"/>
+    <p:sldId id="270" r:id="rId16"/>
+    <p:sldId id="271" r:id="rId17"/>
+    <p:sldId id="272" r:id="rId18"/>
+    <p:sldId id="273" r:id="rId19"/>
+    <p:sldId id="274" r:id="rId20"/>
+    <p:sldId id="275" r:id="rId21"/>
+    <p:sldId id="276" r:id="rId22"/>
+    <p:sldId id="277" r:id="rId23"/>
+    <p:sldId id="278" r:id="rId24"/>
+    <p:sldId id="279" r:id="rId25"/>
+    <p:sldId id="280" r:id="rId26"/>
+    <p:sldId id="281" r:id="rId27"/>
+    <p:sldId id="282" r:id="rId28"/>
+    <p:sldId id="283" r:id="rId29"/>
+    <p:sldId id="284" r:id="rId30"/>
+    <p:sldId id="285" r:id="rId31"/>
+    <p:sldId id="286" r:id="rId32"/>
+    <p:sldId id="287" r:id="rId33"/>
+    <p:sldId id="288" r:id="rId34"/>
+    <p:sldId id="289" r:id="rId35"/>
+    <p:sldId id="290" r:id="rId36"/>
+    <p:sldId id="291" r:id="rId37"/>
+    <p:sldId id="292" r:id="rId38"/>
+    <p:sldId id="293" r:id="rId39"/>
+    <p:sldId id="294" r:id="rId40"/>
+    <p:sldId id="295" r:id="rId41"/>
+    <p:sldId id="296" r:id="rId42"/>
+    <p:sldId id="297" r:id="rId43"/>
+    <p:sldId id="298" r:id="rId44"/>
+    <p:sldId id="299" r:id="rId45"/>
+    <p:sldId id="300" r:id="rId46"/>
+    <p:sldId id="301" r:id="rId47"/>
+    <p:sldId id="302" r:id="rId48"/>
+    <p:sldId id="303" r:id="rId49"/>
+  </p:sldIdLst>
+  <p:sldSz cx="9144000" cy="5143500" type="screen16x9"/>
   <p:notesSz cx="6858000" cy="9144000"/>
   <p:defaultTextStyle>
     <a:defPPr>
@@ -104,6 +154,22 @@
       </a:defRPr>
     </a:lvl9pPr>
   </p:defaultTextStyle>
+  <p:extLst>
+    <p:ext uri="{EFAFB233-063F-42B5-8137-9DF3F51BA10A}">
+      <p15:sldGuideLst xmlns:p15="http://schemas.microsoft.com/office/powerpoint/2012/main">
+        <p15:guide id="1" orient="horz" pos="1620" userDrawn="1">
+          <p15:clr>
+            <a:srgbClr val="A4A3A4"/>
+          </p15:clr>
+        </p15:guide>
+        <p15:guide id="2" pos="2880" userDrawn="1">
+          <p15:clr>
+            <a:srgbClr val="A4A3A4"/>
+          </p15:clr>
+        </p15:guide>
+      </p15:sldGuideLst>
+    </p:ext>
+  </p:extLst>
 </p:presentation>
 </file>
 
@@ -567,8 +633,8 @@
         </p:nvSpPr>
         <p:spPr>
           <a:xfrm>
-            <a:off x="685800" y="2130425"/>
-            <a:ext cx="7772400" cy="1470025"/>
+            <a:off x="685800" y="1597819"/>
+            <a:ext cx="7772400" cy="1102519"/>
           </a:xfrm>
         </p:spPr>
         <p:txBody>
@@ -576,14 +642,13 @@
           <a:lstStyle/>
           <a:p>
             <a:r>
-              <a:rPr lang="en-US" smtClean="0">
+              <a:rPr lang="en-US">
                 <a:solidFill>
                   <a:srgbClr val="111111"/>
                 </a:solidFill>
               </a:rPr>
               <a:t>Click to edit Master title style</a:t>
             </a:r>
-            <a:endParaRPr lang="en-US"/>
           </a:p>
         </p:txBody>
       </p:sp>
@@ -599,8 +664,8 @@
         </p:nvSpPr>
         <p:spPr>
           <a:xfrm>
-            <a:off x="1371600" y="3886200"/>
-            <a:ext cx="6400800" cy="1752600"/>
+            <a:off x="1371600" y="2914650"/>
+            <a:ext cx="6400800" cy="1314450"/>
           </a:xfrm>
         </p:spPr>
         <p:txBody>
@@ -614,7 +679,7 @@
                 </a:solidFill>
               </a:defRPr>
             </a:lvl1pPr>
-            <a:lvl2pPr marL="457200" indent="0" algn="ctr">
+            <a:lvl2pPr marL="342900" indent="0" algn="ctr">
               <a:buNone/>
               <a:defRPr>
                 <a:solidFill>
@@ -622,7 +687,7 @@
                 </a:solidFill>
               </a:defRPr>
             </a:lvl2pPr>
-            <a:lvl3pPr marL="914400" indent="0" algn="ctr">
+            <a:lvl3pPr marL="685800" indent="0" algn="ctr">
               <a:buNone/>
               <a:defRPr>
                 <a:solidFill>
@@ -630,7 +695,7 @@
                 </a:solidFill>
               </a:defRPr>
             </a:lvl3pPr>
-            <a:lvl4pPr marL="1371600" indent="0" algn="ctr">
+            <a:lvl4pPr marL="1028700" indent="0" algn="ctr">
               <a:buNone/>
               <a:defRPr>
                 <a:solidFill>
@@ -638,7 +703,7 @@
                 </a:solidFill>
               </a:defRPr>
             </a:lvl4pPr>
-            <a:lvl5pPr marL="1828800" indent="0" algn="ctr">
+            <a:lvl5pPr marL="1371600" indent="0" algn="ctr">
               <a:buNone/>
               <a:defRPr>
                 <a:solidFill>
@@ -646,7 +711,7 @@
                 </a:solidFill>
               </a:defRPr>
             </a:lvl5pPr>
-            <a:lvl6pPr marL="2286000" indent="0" algn="ctr">
+            <a:lvl6pPr marL="1714500" indent="0" algn="ctr">
               <a:buNone/>
               <a:defRPr>
                 <a:solidFill>
@@ -654,7 +719,7 @@
                 </a:solidFill>
               </a:defRPr>
             </a:lvl6pPr>
-            <a:lvl7pPr marL="2743200" indent="0" algn="ctr">
+            <a:lvl7pPr marL="2057400" indent="0" algn="ctr">
               <a:buNone/>
               <a:defRPr>
                 <a:solidFill>
@@ -662,7 +727,7 @@
                 </a:solidFill>
               </a:defRPr>
             </a:lvl7pPr>
-            <a:lvl8pPr marL="3200400" indent="0" algn="ctr">
+            <a:lvl8pPr marL="2400300" indent="0" algn="ctr">
               <a:buNone/>
               <a:defRPr>
                 <a:solidFill>
@@ -670,7 +735,7 @@
                 </a:solidFill>
               </a:defRPr>
             </a:lvl8pPr>
-            <a:lvl9pPr marL="3657600" indent="0" algn="ctr">
+            <a:lvl9pPr marL="2743200" indent="0" algn="ctr">
               <a:buNone/>
               <a:defRPr>
                 <a:solidFill>
@@ -681,14 +746,13 @@
           </a:lstStyle>
           <a:p>
             <a:r>
-              <a:rPr lang="en-US" smtClean="0">
+              <a:rPr lang="en-US">
                 <a:solidFill>
                   <a:srgbClr val="111111"/>
                 </a:solidFill>
               </a:rPr>
               <a:t>Click to edit Master subtitle style</a:t>
             </a:r>
-            <a:endParaRPr lang="en-US"/>
           </a:p>
         </p:txBody>
       </p:sp>
@@ -707,15 +771,19 @@
           <a:bodyPr/>
           <a:lstStyle/>
           <a:p>
-            <a:fld id="{5BCAD085-E8A6-8845-BD4E-CB4CCA059FC4}" type="datetimeFigureOut">
+            <a:fld id="{241EB5C9-1307-BA42-ABA2-0BC069CD8E7F}" type="datetimeFigureOut">
               <a:rPr lang="en-US" smtClean="0">
                 <a:solidFill>
                   <a:srgbClr val="111111"/>
                 </a:solidFill>
               </a:rPr>
-              <a:t>1/27/13</a:t>
+              <a:t>1/2/22</a:t>
             </a:fld>
-            <a:endParaRPr lang="en-US"/>
+            <a:endParaRPr lang="en-US">
+              <a:solidFill>
+                <a:srgbClr val="111111"/>
+              </a:solidFill>
+            </a:endParaRPr>
           </a:p>
         </p:txBody>
       </p:sp>
@@ -734,7 +802,11 @@
           <a:bodyPr/>
           <a:lstStyle/>
           <a:p>
-            <a:endParaRPr lang="en-US"/>
+            <a:endParaRPr lang="en-US">
+              <a:solidFill>
+                <a:srgbClr val="111111"/>
+              </a:solidFill>
+            </a:endParaRPr>
           </a:p>
         </p:txBody>
       </p:sp>
@@ -753,7 +825,7 @@
           <a:bodyPr/>
           <a:lstStyle/>
           <a:p>
-            <a:fld id="{C1FF6DA9-008F-8B48-92A6-B652298478BF}" type="slidenum">
+            <a:fld id="{C5EF2332-01BF-834F-8236-50238282D533}" type="slidenum">
               <a:rPr lang="en-US" smtClean="0">
                 <a:solidFill>
                   <a:srgbClr val="111111"/>
@@ -761,14 +833,18 @@
               </a:rPr>
               <a:t>‹#›</a:t>
             </a:fld>
-            <a:endParaRPr lang="en-US"/>
+            <a:endParaRPr lang="en-US">
+              <a:solidFill>
+                <a:srgbClr val="111111"/>
+              </a:solidFill>
+            </a:endParaRPr>
           </a:p>
         </p:txBody>
       </p:sp>
     </p:spTree>
     <p:extLst>
       <p:ext uri="{BB962C8B-B14F-4D97-AF65-F5344CB8AC3E}">
-        <p14:creationId xmlns:p14="http://schemas.microsoft.com/office/powerpoint/2010/main" val="3168075583"/>
+        <p14:creationId xmlns:p14="http://schemas.microsoft.com/office/powerpoint/2010/main" val="1444357513"/>
       </p:ext>
     </p:extLst>
   </p:cSld>
@@ -811,14 +887,13 @@
           <a:lstStyle/>
           <a:p>
             <a:r>
-              <a:rPr lang="en-US" smtClean="0">
+              <a:rPr lang="en-US">
                 <a:solidFill>
                   <a:srgbClr val="111111"/>
                 </a:solidFill>
               </a:rPr>
               <a:t>Click to edit Master title style</a:t>
             </a:r>
-            <a:endParaRPr lang="en-US"/>
           </a:p>
         </p:txBody>
       </p:sp>
@@ -839,7 +914,7 @@
           <a:p>
             <a:pPr lvl="0"/>
             <a:r>
-              <a:rPr lang="en-US" smtClean="0">
+              <a:rPr lang="en-US">
                 <a:solidFill>
                   <a:srgbClr val="111111"/>
                 </a:solidFill>
@@ -850,7 +925,7 @@
           <a:p>
             <a:pPr lvl="1"/>
             <a:r>
-              <a:rPr lang="en-US" smtClean="0">
+              <a:rPr lang="en-US">
                 <a:solidFill>
                   <a:srgbClr val="111111"/>
                 </a:solidFill>
@@ -861,7 +936,7 @@
           <a:p>
             <a:pPr lvl="2"/>
             <a:r>
-              <a:rPr lang="en-US" smtClean="0">
+              <a:rPr lang="en-US">
                 <a:solidFill>
                   <a:srgbClr val="111111"/>
                 </a:solidFill>
@@ -872,7 +947,7 @@
           <a:p>
             <a:pPr lvl="3"/>
             <a:r>
-              <a:rPr lang="en-US" smtClean="0">
+              <a:rPr lang="en-US">
                 <a:solidFill>
                   <a:srgbClr val="111111"/>
                 </a:solidFill>
@@ -883,14 +958,13 @@
           <a:p>
             <a:pPr lvl="4"/>
             <a:r>
-              <a:rPr lang="en-US" smtClean="0">
+              <a:rPr lang="en-US">
                 <a:solidFill>
                   <a:srgbClr val="111111"/>
                 </a:solidFill>
               </a:rPr>
               <a:t>Fifth level</a:t>
             </a:r>
-            <a:endParaRPr lang="en-US"/>
           </a:p>
         </p:txBody>
       </p:sp>
@@ -909,15 +983,19 @@
           <a:bodyPr/>
           <a:lstStyle/>
           <a:p>
-            <a:fld id="{5BCAD085-E8A6-8845-BD4E-CB4CCA059FC4}" type="datetimeFigureOut">
+            <a:fld id="{241EB5C9-1307-BA42-ABA2-0BC069CD8E7F}" type="datetimeFigureOut">
               <a:rPr lang="en-US" smtClean="0">
                 <a:solidFill>
                   <a:srgbClr val="111111"/>
                 </a:solidFill>
               </a:rPr>
-              <a:t>1/27/13</a:t>
+              <a:t>1/2/22</a:t>
             </a:fld>
-            <a:endParaRPr lang="en-US"/>
+            <a:endParaRPr lang="en-US">
+              <a:solidFill>
+                <a:srgbClr val="111111"/>
+              </a:solidFill>
+            </a:endParaRPr>
           </a:p>
         </p:txBody>
       </p:sp>
@@ -936,7 +1014,11 @@
           <a:bodyPr/>
           <a:lstStyle/>
           <a:p>
-            <a:endParaRPr lang="en-US"/>
+            <a:endParaRPr lang="en-US">
+              <a:solidFill>
+                <a:srgbClr val="111111"/>
+              </a:solidFill>
+            </a:endParaRPr>
           </a:p>
         </p:txBody>
       </p:sp>
@@ -955,7 +1037,7 @@
           <a:bodyPr/>
           <a:lstStyle/>
           <a:p>
-            <a:fld id="{C1FF6DA9-008F-8B48-92A6-B652298478BF}" type="slidenum">
+            <a:fld id="{C5EF2332-01BF-834F-8236-50238282D533}" type="slidenum">
               <a:rPr lang="en-US" smtClean="0">
                 <a:solidFill>
                   <a:srgbClr val="111111"/>
@@ -963,14 +1045,18 @@
               </a:rPr>
               <a:t>‹#›</a:t>
             </a:fld>
-            <a:endParaRPr lang="en-US"/>
+            <a:endParaRPr lang="en-US">
+              <a:solidFill>
+                <a:srgbClr val="111111"/>
+              </a:solidFill>
+            </a:endParaRPr>
           </a:p>
         </p:txBody>
       </p:sp>
     </p:spTree>
     <p:extLst>
       <p:ext uri="{BB962C8B-B14F-4D97-AF65-F5344CB8AC3E}">
-        <p14:creationId xmlns:p14="http://schemas.microsoft.com/office/powerpoint/2010/main" val="2910927964"/>
+        <p14:creationId xmlns:p14="http://schemas.microsoft.com/office/powerpoint/2010/main" val="313914798"/>
       </p:ext>
     </p:extLst>
   </p:cSld>
@@ -1009,8 +1095,8 @@
         </p:nvSpPr>
         <p:spPr>
           <a:xfrm>
-            <a:off x="6629400" y="274638"/>
-            <a:ext cx="2057400" cy="5851525"/>
+            <a:off x="6629400" y="205979"/>
+            <a:ext cx="2057400" cy="4388644"/>
           </a:xfrm>
         </p:spPr>
         <p:txBody>
@@ -1018,14 +1104,13 @@
           <a:lstStyle/>
           <a:p>
             <a:r>
-              <a:rPr lang="en-US" smtClean="0">
+              <a:rPr lang="en-US">
                 <a:solidFill>
                   <a:srgbClr val="111111"/>
                 </a:solidFill>
               </a:rPr>
               <a:t>Click to edit Master title style</a:t>
             </a:r>
-            <a:endParaRPr lang="en-US"/>
           </a:p>
         </p:txBody>
       </p:sp>
@@ -1041,8 +1126,8 @@
         </p:nvSpPr>
         <p:spPr>
           <a:xfrm>
-            <a:off x="457200" y="274638"/>
-            <a:ext cx="6019800" cy="5851525"/>
+            <a:off x="457200" y="205979"/>
+            <a:ext cx="6019800" cy="4388644"/>
           </a:xfrm>
         </p:spPr>
         <p:txBody>
@@ -1051,7 +1136,7 @@
           <a:p>
             <a:pPr lvl="0"/>
             <a:r>
-              <a:rPr lang="en-US" smtClean="0">
+              <a:rPr lang="en-US">
                 <a:solidFill>
                   <a:srgbClr val="111111"/>
                 </a:solidFill>
@@ -1062,7 +1147,7 @@
           <a:p>
             <a:pPr lvl="1"/>
             <a:r>
-              <a:rPr lang="en-US" smtClean="0">
+              <a:rPr lang="en-US">
                 <a:solidFill>
                   <a:srgbClr val="111111"/>
                 </a:solidFill>
@@ -1073,7 +1158,7 @@
           <a:p>
             <a:pPr lvl="2"/>
             <a:r>
-              <a:rPr lang="en-US" smtClean="0">
+              <a:rPr lang="en-US">
                 <a:solidFill>
                   <a:srgbClr val="111111"/>
                 </a:solidFill>
@@ -1084,7 +1169,7 @@
           <a:p>
             <a:pPr lvl="3"/>
             <a:r>
-              <a:rPr lang="en-US" smtClean="0">
+              <a:rPr lang="en-US">
                 <a:solidFill>
                   <a:srgbClr val="111111"/>
                 </a:solidFill>
@@ -1095,14 +1180,13 @@
           <a:p>
             <a:pPr lvl="4"/>
             <a:r>
-              <a:rPr lang="en-US" smtClean="0">
+              <a:rPr lang="en-US">
                 <a:solidFill>
                   <a:srgbClr val="111111"/>
                 </a:solidFill>
               </a:rPr>
               <a:t>Fifth level</a:t>
             </a:r>
-            <a:endParaRPr lang="en-US"/>
           </a:p>
         </p:txBody>
       </p:sp>
@@ -1121,15 +1205,19 @@
           <a:bodyPr/>
           <a:lstStyle/>
           <a:p>
-            <a:fld id="{5BCAD085-E8A6-8845-BD4E-CB4CCA059FC4}" type="datetimeFigureOut">
+            <a:fld id="{241EB5C9-1307-BA42-ABA2-0BC069CD8E7F}" type="datetimeFigureOut">
               <a:rPr lang="en-US" smtClean="0">
                 <a:solidFill>
                   <a:srgbClr val="111111"/>
                 </a:solidFill>
               </a:rPr>
-              <a:t>1/27/13</a:t>
+              <a:t>1/2/22</a:t>
             </a:fld>
-            <a:endParaRPr lang="en-US"/>
+            <a:endParaRPr lang="en-US">
+              <a:solidFill>
+                <a:srgbClr val="111111"/>
+              </a:solidFill>
+            </a:endParaRPr>
           </a:p>
         </p:txBody>
       </p:sp>
@@ -1148,7 +1236,11 @@
           <a:bodyPr/>
           <a:lstStyle/>
           <a:p>
-            <a:endParaRPr lang="en-US"/>
+            <a:endParaRPr lang="en-US">
+              <a:solidFill>
+                <a:srgbClr val="111111"/>
+              </a:solidFill>
+            </a:endParaRPr>
           </a:p>
         </p:txBody>
       </p:sp>
@@ -1167,7 +1259,7 @@
           <a:bodyPr/>
           <a:lstStyle/>
           <a:p>
-            <a:fld id="{C1FF6DA9-008F-8B48-92A6-B652298478BF}" type="slidenum">
+            <a:fld id="{C5EF2332-01BF-834F-8236-50238282D533}" type="slidenum">
               <a:rPr lang="en-US" smtClean="0">
                 <a:solidFill>
                   <a:srgbClr val="111111"/>
@@ -1175,14 +1267,18 @@
               </a:rPr>
               <a:t>‹#›</a:t>
             </a:fld>
-            <a:endParaRPr lang="en-US"/>
+            <a:endParaRPr lang="en-US">
+              <a:solidFill>
+                <a:srgbClr val="111111"/>
+              </a:solidFill>
+            </a:endParaRPr>
           </a:p>
         </p:txBody>
       </p:sp>
     </p:spTree>
     <p:extLst>
       <p:ext uri="{BB962C8B-B14F-4D97-AF65-F5344CB8AC3E}">
-        <p14:creationId xmlns:p14="http://schemas.microsoft.com/office/powerpoint/2010/main" val="3612223792"/>
+        <p14:creationId xmlns:p14="http://schemas.microsoft.com/office/powerpoint/2010/main" val="2581529045"/>
       </p:ext>
     </p:extLst>
   </p:cSld>
@@ -1225,14 +1321,13 @@
           <a:lstStyle/>
           <a:p>
             <a:r>
-              <a:rPr lang="en-US" smtClean="0">
+              <a:rPr lang="en-US">
                 <a:solidFill>
                   <a:srgbClr val="111111"/>
                 </a:solidFill>
               </a:rPr>
               <a:t>Click to edit Master title style</a:t>
             </a:r>
-            <a:endParaRPr lang="en-US"/>
           </a:p>
         </p:txBody>
       </p:sp>
@@ -1253,7 +1348,7 @@
           <a:p>
             <a:pPr lvl="0"/>
             <a:r>
-              <a:rPr lang="en-US" smtClean="0">
+              <a:rPr lang="en-US">
                 <a:solidFill>
                   <a:srgbClr val="111111"/>
                 </a:solidFill>
@@ -1264,7 +1359,7 @@
           <a:p>
             <a:pPr lvl="1"/>
             <a:r>
-              <a:rPr lang="en-US" smtClean="0">
+              <a:rPr lang="en-US">
                 <a:solidFill>
                   <a:srgbClr val="111111"/>
                 </a:solidFill>
@@ -1275,7 +1370,7 @@
           <a:p>
             <a:pPr lvl="2"/>
             <a:r>
-              <a:rPr lang="en-US" smtClean="0">
+              <a:rPr lang="en-US">
                 <a:solidFill>
                   <a:srgbClr val="111111"/>
                 </a:solidFill>
@@ -1286,7 +1381,7 @@
           <a:p>
             <a:pPr lvl="3"/>
             <a:r>
-              <a:rPr lang="en-US" smtClean="0">
+              <a:rPr lang="en-US">
                 <a:solidFill>
                   <a:srgbClr val="111111"/>
                 </a:solidFill>
@@ -1297,14 +1392,13 @@
           <a:p>
             <a:pPr lvl="4"/>
             <a:r>
-              <a:rPr lang="en-US" smtClean="0">
+              <a:rPr lang="en-US">
                 <a:solidFill>
                   <a:srgbClr val="111111"/>
                 </a:solidFill>
               </a:rPr>
               <a:t>Fifth level</a:t>
             </a:r>
-            <a:endParaRPr lang="en-US"/>
           </a:p>
         </p:txBody>
       </p:sp>
@@ -1323,15 +1417,19 @@
           <a:bodyPr/>
           <a:lstStyle/>
           <a:p>
-            <a:fld id="{5BCAD085-E8A6-8845-BD4E-CB4CCA059FC4}" type="datetimeFigureOut">
+            <a:fld id="{241EB5C9-1307-BA42-ABA2-0BC069CD8E7F}" type="datetimeFigureOut">
               <a:rPr lang="en-US" smtClean="0">
                 <a:solidFill>
                   <a:srgbClr val="111111"/>
                 </a:solidFill>
               </a:rPr>
-              <a:t>1/27/13</a:t>
+              <a:t>1/2/22</a:t>
             </a:fld>
-            <a:endParaRPr lang="en-US"/>
+            <a:endParaRPr lang="en-US">
+              <a:solidFill>
+                <a:srgbClr val="111111"/>
+              </a:solidFill>
+            </a:endParaRPr>
           </a:p>
         </p:txBody>
       </p:sp>
@@ -1350,7 +1448,11 @@
           <a:bodyPr/>
           <a:lstStyle/>
           <a:p>
-            <a:endParaRPr lang="en-US"/>
+            <a:endParaRPr lang="en-US">
+              <a:solidFill>
+                <a:srgbClr val="111111"/>
+              </a:solidFill>
+            </a:endParaRPr>
           </a:p>
         </p:txBody>
       </p:sp>
@@ -1369,7 +1471,7 @@
           <a:bodyPr/>
           <a:lstStyle/>
           <a:p>
-            <a:fld id="{C1FF6DA9-008F-8B48-92A6-B652298478BF}" type="slidenum">
+            <a:fld id="{C5EF2332-01BF-834F-8236-50238282D533}" type="slidenum">
               <a:rPr lang="en-US" smtClean="0">
                 <a:solidFill>
                   <a:srgbClr val="111111"/>
@@ -1377,14 +1479,18 @@
               </a:rPr>
               <a:t>‹#›</a:t>
             </a:fld>
-            <a:endParaRPr lang="en-US"/>
+            <a:endParaRPr lang="en-US">
+              <a:solidFill>
+                <a:srgbClr val="111111"/>
+              </a:solidFill>
+            </a:endParaRPr>
           </a:p>
         </p:txBody>
       </p:sp>
     </p:spTree>
     <p:extLst>
       <p:ext uri="{BB962C8B-B14F-4D97-AF65-F5344CB8AC3E}">
-        <p14:creationId xmlns:p14="http://schemas.microsoft.com/office/powerpoint/2010/main" val="2614314258"/>
+        <p14:creationId xmlns:p14="http://schemas.microsoft.com/office/powerpoint/2010/main" val="338346009"/>
       </p:ext>
     </p:extLst>
   </p:cSld>
@@ -1423,15 +1529,15 @@
         </p:nvSpPr>
         <p:spPr>
           <a:xfrm>
-            <a:off x="722313" y="4406900"/>
-            <a:ext cx="7772400" cy="1362075"/>
+            <a:off x="722313" y="3305176"/>
+            <a:ext cx="7772400" cy="1021556"/>
           </a:xfrm>
         </p:spPr>
         <p:txBody>
           <a:bodyPr anchor="t"/>
           <a:lstStyle>
             <a:lvl1pPr algn="l">
-              <a:defRPr sz="4000" b="1" cap="all">
+              <a:defRPr sz="3000" b="1" cap="all">
                 <a:solidFill>
                   <a:srgbClr val="111111"/>
                 </a:solidFill>
@@ -1440,14 +1546,13 @@
           </a:lstStyle>
           <a:p>
             <a:r>
-              <a:rPr lang="en-US" smtClean="0">
+              <a:rPr lang="en-US">
                 <a:solidFill>
                   <a:srgbClr val="111111"/>
                 </a:solidFill>
               </a:rPr>
               <a:t>Click to edit Master title style</a:t>
             </a:r>
-            <a:endParaRPr lang="en-US"/>
           </a:p>
         </p:txBody>
       </p:sp>
@@ -1463,8 +1568,8 @@
         </p:nvSpPr>
         <p:spPr>
           <a:xfrm>
-            <a:off x="722313" y="2906713"/>
-            <a:ext cx="7772400" cy="1500187"/>
+            <a:off x="722313" y="2180035"/>
+            <a:ext cx="7772400" cy="1125140"/>
           </a:xfrm>
         </p:spPr>
         <p:txBody>
@@ -1472,71 +1577,71 @@
           <a:lstStyle>
             <a:lvl1pPr marL="0" indent="0">
               <a:buNone/>
-              <a:defRPr sz="2000">
+              <a:defRPr sz="1500">
                 <a:solidFill>
                   <a:srgbClr val="111111"/>
                 </a:solidFill>
               </a:defRPr>
             </a:lvl1pPr>
-            <a:lvl2pPr marL="457200" indent="0">
-              <a:buNone/>
-              <a:defRPr sz="1800">
+            <a:lvl2pPr marL="342900" indent="0">
+              <a:buNone/>
+              <a:defRPr sz="1350">
                 <a:solidFill>
                   <a:srgbClr val="111111"/>
                 </a:solidFill>
               </a:defRPr>
             </a:lvl2pPr>
-            <a:lvl3pPr marL="914400" indent="0">
-              <a:buNone/>
-              <a:defRPr sz="1600">
+            <a:lvl3pPr marL="685800" indent="0">
+              <a:buNone/>
+              <a:defRPr sz="1200">
                 <a:solidFill>
                   <a:srgbClr val="111111"/>
                 </a:solidFill>
               </a:defRPr>
             </a:lvl3pPr>
-            <a:lvl4pPr marL="1371600" indent="0">
-              <a:buNone/>
-              <a:defRPr sz="1400">
+            <a:lvl4pPr marL="1028700" indent="0">
+              <a:buNone/>
+              <a:defRPr sz="1050">
                 <a:solidFill>
                   <a:srgbClr val="111111"/>
                 </a:solidFill>
               </a:defRPr>
             </a:lvl4pPr>
-            <a:lvl5pPr marL="1828800" indent="0">
-              <a:buNone/>
-              <a:defRPr sz="1400">
+            <a:lvl5pPr marL="1371600" indent="0">
+              <a:buNone/>
+              <a:defRPr sz="1050">
                 <a:solidFill>
                   <a:srgbClr val="111111"/>
                 </a:solidFill>
               </a:defRPr>
             </a:lvl5pPr>
-            <a:lvl6pPr marL="2286000" indent="0">
-              <a:buNone/>
-              <a:defRPr sz="1400">
+            <a:lvl6pPr marL="1714500" indent="0">
+              <a:buNone/>
+              <a:defRPr sz="1050">
                 <a:solidFill>
                   <a:srgbClr val="111111"/>
                 </a:solidFill>
               </a:defRPr>
             </a:lvl6pPr>
-            <a:lvl7pPr marL="2743200" indent="0">
-              <a:buNone/>
-              <a:defRPr sz="1400">
+            <a:lvl7pPr marL="2057400" indent="0">
+              <a:buNone/>
+              <a:defRPr sz="1050">
                 <a:solidFill>
                   <a:srgbClr val="111111"/>
                 </a:solidFill>
               </a:defRPr>
             </a:lvl7pPr>
-            <a:lvl8pPr marL="3200400" indent="0">
-              <a:buNone/>
-              <a:defRPr sz="1400">
+            <a:lvl8pPr marL="2400300" indent="0">
+              <a:buNone/>
+              <a:defRPr sz="1050">
                 <a:solidFill>
                   <a:srgbClr val="111111"/>
                 </a:solidFill>
               </a:defRPr>
             </a:lvl8pPr>
-            <a:lvl9pPr marL="3657600" indent="0">
-              <a:buNone/>
-              <a:defRPr sz="1400">
+            <a:lvl9pPr marL="2743200" indent="0">
+              <a:buNone/>
+              <a:defRPr sz="1050">
                 <a:solidFill>
                   <a:srgbClr val="111111"/>
                 </a:solidFill>
@@ -1546,7 +1651,7 @@
           <a:p>
             <a:pPr lvl="0"/>
             <a:r>
-              <a:rPr lang="en-US" smtClean="0">
+              <a:rPr lang="en-US">
                 <a:solidFill>
                   <a:srgbClr val="111111"/>
                 </a:solidFill>
@@ -1571,15 +1676,19 @@
           <a:bodyPr/>
           <a:lstStyle/>
           <a:p>
-            <a:fld id="{5BCAD085-E8A6-8845-BD4E-CB4CCA059FC4}" type="datetimeFigureOut">
+            <a:fld id="{241EB5C9-1307-BA42-ABA2-0BC069CD8E7F}" type="datetimeFigureOut">
               <a:rPr lang="en-US" smtClean="0">
                 <a:solidFill>
                   <a:srgbClr val="111111"/>
                 </a:solidFill>
               </a:rPr>
-              <a:t>1/27/13</a:t>
+              <a:t>1/2/22</a:t>
             </a:fld>
-            <a:endParaRPr lang="en-US"/>
+            <a:endParaRPr lang="en-US">
+              <a:solidFill>
+                <a:srgbClr val="111111"/>
+              </a:solidFill>
+            </a:endParaRPr>
           </a:p>
         </p:txBody>
       </p:sp>
@@ -1598,7 +1707,11 @@
           <a:bodyPr/>
           <a:lstStyle/>
           <a:p>
-            <a:endParaRPr lang="en-US"/>
+            <a:endParaRPr lang="en-US">
+              <a:solidFill>
+                <a:srgbClr val="111111"/>
+              </a:solidFill>
+            </a:endParaRPr>
           </a:p>
         </p:txBody>
       </p:sp>
@@ -1617,7 +1730,7 @@
           <a:bodyPr/>
           <a:lstStyle/>
           <a:p>
-            <a:fld id="{C1FF6DA9-008F-8B48-92A6-B652298478BF}" type="slidenum">
+            <a:fld id="{C5EF2332-01BF-834F-8236-50238282D533}" type="slidenum">
               <a:rPr lang="en-US" smtClean="0">
                 <a:solidFill>
                   <a:srgbClr val="111111"/>
@@ -1625,14 +1738,18 @@
               </a:rPr>
               <a:t>‹#›</a:t>
             </a:fld>
-            <a:endParaRPr lang="en-US"/>
+            <a:endParaRPr lang="en-US">
+              <a:solidFill>
+                <a:srgbClr val="111111"/>
+              </a:solidFill>
+            </a:endParaRPr>
           </a:p>
         </p:txBody>
       </p:sp>
     </p:spTree>
     <p:extLst>
       <p:ext uri="{BB962C8B-B14F-4D97-AF65-F5344CB8AC3E}">
-        <p14:creationId xmlns:p14="http://schemas.microsoft.com/office/powerpoint/2010/main" val="960648375"/>
+        <p14:creationId xmlns:p14="http://schemas.microsoft.com/office/powerpoint/2010/main" val="1073069076"/>
       </p:ext>
     </p:extLst>
   </p:cSld>
@@ -1675,14 +1792,13 @@
           <a:lstStyle/>
           <a:p>
             <a:r>
-              <a:rPr lang="en-US" smtClean="0">
+              <a:rPr lang="en-US">
                 <a:solidFill>
                   <a:srgbClr val="111111"/>
                 </a:solidFill>
               </a:rPr>
               <a:t>Click to edit Master title style</a:t>
             </a:r>
-            <a:endParaRPr lang="en-US"/>
           </a:p>
         </p:txBody>
       </p:sp>
@@ -1698,71 +1814,71 @@
         </p:nvSpPr>
         <p:spPr>
           <a:xfrm>
-            <a:off x="457200" y="1600200"/>
-            <a:ext cx="4038600" cy="4525963"/>
+            <a:off x="457200" y="1200151"/>
+            <a:ext cx="4038600" cy="3394472"/>
           </a:xfrm>
         </p:spPr>
         <p:txBody>
           <a:bodyPr/>
           <a:lstStyle>
             <a:lvl1pPr>
-              <a:defRPr sz="2800">
+              <a:defRPr sz="2100">
                 <a:solidFill>
                   <a:srgbClr val="111111"/>
                 </a:solidFill>
               </a:defRPr>
             </a:lvl1pPr>
             <a:lvl2pPr>
-              <a:defRPr sz="2400">
+              <a:defRPr sz="1800">
                 <a:solidFill>
                   <a:srgbClr val="111111"/>
                 </a:solidFill>
               </a:defRPr>
             </a:lvl2pPr>
             <a:lvl3pPr>
-              <a:defRPr sz="2000">
+              <a:defRPr sz="1500">
                 <a:solidFill>
                   <a:srgbClr val="111111"/>
                 </a:solidFill>
               </a:defRPr>
             </a:lvl3pPr>
             <a:lvl4pPr>
-              <a:defRPr sz="1800">
+              <a:defRPr sz="1350">
                 <a:solidFill>
                   <a:srgbClr val="111111"/>
                 </a:solidFill>
               </a:defRPr>
             </a:lvl4pPr>
             <a:lvl5pPr>
-              <a:defRPr sz="1800">
+              <a:defRPr sz="1350">
                 <a:solidFill>
                   <a:srgbClr val="111111"/>
                 </a:solidFill>
               </a:defRPr>
             </a:lvl5pPr>
             <a:lvl6pPr>
-              <a:defRPr sz="1800">
+              <a:defRPr sz="1350">
                 <a:solidFill>
                   <a:srgbClr val="111111"/>
                 </a:solidFill>
               </a:defRPr>
             </a:lvl6pPr>
             <a:lvl7pPr>
-              <a:defRPr sz="1800">
+              <a:defRPr sz="1350">
                 <a:solidFill>
                   <a:srgbClr val="111111"/>
                 </a:solidFill>
               </a:defRPr>
             </a:lvl7pPr>
             <a:lvl8pPr>
-              <a:defRPr sz="1800">
+              <a:defRPr sz="1350">
                 <a:solidFill>
                   <a:srgbClr val="111111"/>
                 </a:solidFill>
               </a:defRPr>
             </a:lvl8pPr>
             <a:lvl9pPr>
-              <a:defRPr sz="1800">
+              <a:defRPr sz="1350">
                 <a:solidFill>
                   <a:srgbClr val="111111"/>
                 </a:solidFill>
@@ -1772,7 +1888,7 @@
           <a:p>
             <a:pPr lvl="0"/>
             <a:r>
-              <a:rPr lang="en-US" smtClean="0">
+              <a:rPr lang="en-US">
                 <a:solidFill>
                   <a:srgbClr val="111111"/>
                 </a:solidFill>
@@ -1783,7 +1899,7 @@
           <a:p>
             <a:pPr lvl="1"/>
             <a:r>
-              <a:rPr lang="en-US" smtClean="0">
+              <a:rPr lang="en-US">
                 <a:solidFill>
                   <a:srgbClr val="111111"/>
                 </a:solidFill>
@@ -1794,7 +1910,7 @@
           <a:p>
             <a:pPr lvl="2"/>
             <a:r>
-              <a:rPr lang="en-US" smtClean="0">
+              <a:rPr lang="en-US">
                 <a:solidFill>
                   <a:srgbClr val="111111"/>
                 </a:solidFill>
@@ -1805,7 +1921,7 @@
           <a:p>
             <a:pPr lvl="3"/>
             <a:r>
-              <a:rPr lang="en-US" smtClean="0">
+              <a:rPr lang="en-US">
                 <a:solidFill>
                   <a:srgbClr val="111111"/>
                 </a:solidFill>
@@ -1816,14 +1932,13 @@
           <a:p>
             <a:pPr lvl="4"/>
             <a:r>
-              <a:rPr lang="en-US" smtClean="0">
+              <a:rPr lang="en-US">
                 <a:solidFill>
                   <a:srgbClr val="111111"/>
                 </a:solidFill>
               </a:rPr>
               <a:t>Fifth level</a:t>
             </a:r>
-            <a:endParaRPr lang="en-US"/>
           </a:p>
         </p:txBody>
       </p:sp>
@@ -1839,71 +1954,71 @@
         </p:nvSpPr>
         <p:spPr>
           <a:xfrm>
-            <a:off x="4648200" y="1600200"/>
-            <a:ext cx="4038600" cy="4525963"/>
+            <a:off x="4648200" y="1200151"/>
+            <a:ext cx="4038600" cy="3394472"/>
           </a:xfrm>
         </p:spPr>
         <p:txBody>
           <a:bodyPr/>
           <a:lstStyle>
             <a:lvl1pPr>
-              <a:defRPr sz="2800">
+              <a:defRPr sz="2100">
                 <a:solidFill>
                   <a:srgbClr val="111111"/>
                 </a:solidFill>
               </a:defRPr>
             </a:lvl1pPr>
             <a:lvl2pPr>
-              <a:defRPr sz="2400">
+              <a:defRPr sz="1800">
                 <a:solidFill>
                   <a:srgbClr val="111111"/>
                 </a:solidFill>
               </a:defRPr>
             </a:lvl2pPr>
             <a:lvl3pPr>
-              <a:defRPr sz="2000">
+              <a:defRPr sz="1500">
                 <a:solidFill>
                   <a:srgbClr val="111111"/>
                 </a:solidFill>
               </a:defRPr>
             </a:lvl3pPr>
             <a:lvl4pPr>
-              <a:defRPr sz="1800">
+              <a:defRPr sz="1350">
                 <a:solidFill>
                   <a:srgbClr val="111111"/>
                 </a:solidFill>
               </a:defRPr>
             </a:lvl4pPr>
             <a:lvl5pPr>
-              <a:defRPr sz="1800">
+              <a:defRPr sz="1350">
                 <a:solidFill>
                   <a:srgbClr val="111111"/>
                 </a:solidFill>
               </a:defRPr>
             </a:lvl5pPr>
             <a:lvl6pPr>
-              <a:defRPr sz="1800">
+              <a:defRPr sz="1350">
                 <a:solidFill>
                   <a:srgbClr val="111111"/>
                 </a:solidFill>
               </a:defRPr>
             </a:lvl6pPr>
             <a:lvl7pPr>
-              <a:defRPr sz="1800">
+              <a:defRPr sz="1350">
                 <a:solidFill>
                   <a:srgbClr val="111111"/>
                 </a:solidFill>
               </a:defRPr>
             </a:lvl7pPr>
             <a:lvl8pPr>
-              <a:defRPr sz="1800">
+              <a:defRPr sz="1350">
                 <a:solidFill>
                   <a:srgbClr val="111111"/>
                 </a:solidFill>
               </a:defRPr>
             </a:lvl8pPr>
             <a:lvl9pPr>
-              <a:defRPr sz="1800">
+              <a:defRPr sz="1350">
                 <a:solidFill>
                   <a:srgbClr val="111111"/>
                 </a:solidFill>
@@ -1913,7 +2028,7 @@
           <a:p>
             <a:pPr lvl="0"/>
             <a:r>
-              <a:rPr lang="en-US" smtClean="0">
+              <a:rPr lang="en-US">
                 <a:solidFill>
                   <a:srgbClr val="111111"/>
                 </a:solidFill>
@@ -1924,7 +2039,7 @@
           <a:p>
             <a:pPr lvl="1"/>
             <a:r>
-              <a:rPr lang="en-US" smtClean="0">
+              <a:rPr lang="en-US">
                 <a:solidFill>
                   <a:srgbClr val="111111"/>
                 </a:solidFill>
@@ -1935,7 +2050,7 @@
           <a:p>
             <a:pPr lvl="2"/>
             <a:r>
-              <a:rPr lang="en-US" smtClean="0">
+              <a:rPr lang="en-US">
                 <a:solidFill>
                   <a:srgbClr val="111111"/>
                 </a:solidFill>
@@ -1946,7 +2061,7 @@
           <a:p>
             <a:pPr lvl="3"/>
             <a:r>
-              <a:rPr lang="en-US" smtClean="0">
+              <a:rPr lang="en-US">
                 <a:solidFill>
                   <a:srgbClr val="111111"/>
                 </a:solidFill>
@@ -1957,14 +2072,13 @@
           <a:p>
             <a:pPr lvl="4"/>
             <a:r>
-              <a:rPr lang="en-US" smtClean="0">
+              <a:rPr lang="en-US">
                 <a:solidFill>
                   <a:srgbClr val="111111"/>
                 </a:solidFill>
               </a:rPr>
               <a:t>Fifth level</a:t>
             </a:r>
-            <a:endParaRPr lang="en-US"/>
           </a:p>
         </p:txBody>
       </p:sp>
@@ -1983,15 +2097,19 @@
           <a:bodyPr/>
           <a:lstStyle/>
           <a:p>
-            <a:fld id="{5BCAD085-E8A6-8845-BD4E-CB4CCA059FC4}" type="datetimeFigureOut">
+            <a:fld id="{241EB5C9-1307-BA42-ABA2-0BC069CD8E7F}" type="datetimeFigureOut">
               <a:rPr lang="en-US" smtClean="0">
                 <a:solidFill>
                   <a:srgbClr val="111111"/>
                 </a:solidFill>
               </a:rPr>
-              <a:t>1/27/13</a:t>
+              <a:t>1/2/22</a:t>
             </a:fld>
-            <a:endParaRPr lang="en-US"/>
+            <a:endParaRPr lang="en-US">
+              <a:solidFill>
+                <a:srgbClr val="111111"/>
+              </a:solidFill>
+            </a:endParaRPr>
           </a:p>
         </p:txBody>
       </p:sp>
@@ -2010,7 +2128,11 @@
           <a:bodyPr/>
           <a:lstStyle/>
           <a:p>
-            <a:endParaRPr lang="en-US"/>
+            <a:endParaRPr lang="en-US">
+              <a:solidFill>
+                <a:srgbClr val="111111"/>
+              </a:solidFill>
+            </a:endParaRPr>
           </a:p>
         </p:txBody>
       </p:sp>
@@ -2029,7 +2151,7 @@
           <a:bodyPr/>
           <a:lstStyle/>
           <a:p>
-            <a:fld id="{C1FF6DA9-008F-8B48-92A6-B652298478BF}" type="slidenum">
+            <a:fld id="{C5EF2332-01BF-834F-8236-50238282D533}" type="slidenum">
               <a:rPr lang="en-US" smtClean="0">
                 <a:solidFill>
                   <a:srgbClr val="111111"/>
@@ -2037,14 +2159,18 @@
               </a:rPr>
               <a:t>‹#›</a:t>
             </a:fld>
-            <a:endParaRPr lang="en-US"/>
+            <a:endParaRPr lang="en-US">
+              <a:solidFill>
+                <a:srgbClr val="111111"/>
+              </a:solidFill>
+            </a:endParaRPr>
           </a:p>
         </p:txBody>
       </p:sp>
     </p:spTree>
     <p:extLst>
       <p:ext uri="{BB962C8B-B14F-4D97-AF65-F5344CB8AC3E}">
-        <p14:creationId xmlns:p14="http://schemas.microsoft.com/office/powerpoint/2010/main" val="2782244947"/>
+        <p14:creationId xmlns:p14="http://schemas.microsoft.com/office/powerpoint/2010/main" val="2619886245"/>
       </p:ext>
     </p:extLst>
   </p:cSld>
@@ -2095,14 +2221,13 @@
           </a:lstStyle>
           <a:p>
             <a:r>
-              <a:rPr lang="en-US" smtClean="0">
+              <a:rPr lang="en-US">
                 <a:solidFill>
                   <a:srgbClr val="111111"/>
                 </a:solidFill>
               </a:rPr>
               <a:t>Click to edit Master title style</a:t>
             </a:r>
-            <a:endParaRPr lang="en-US"/>
           </a:p>
         </p:txBody>
       </p:sp>
@@ -2118,8 +2243,8 @@
         </p:nvSpPr>
         <p:spPr>
           <a:xfrm>
-            <a:off x="457200" y="1535113"/>
-            <a:ext cx="4040188" cy="639762"/>
+            <a:off x="457200" y="1151335"/>
+            <a:ext cx="4040188" cy="479822"/>
           </a:xfrm>
         </p:spPr>
         <p:txBody>
@@ -2127,71 +2252,71 @@
           <a:lstStyle>
             <a:lvl1pPr marL="0" indent="0">
               <a:buNone/>
-              <a:defRPr sz="2400" b="1">
+              <a:defRPr sz="1800" b="1">
                 <a:solidFill>
                   <a:srgbClr val="111111"/>
                 </a:solidFill>
               </a:defRPr>
             </a:lvl1pPr>
-            <a:lvl2pPr marL="457200" indent="0">
-              <a:buNone/>
-              <a:defRPr sz="2000" b="1">
+            <a:lvl2pPr marL="342900" indent="0">
+              <a:buNone/>
+              <a:defRPr sz="1500" b="1">
                 <a:solidFill>
                   <a:srgbClr val="111111"/>
                 </a:solidFill>
               </a:defRPr>
             </a:lvl2pPr>
-            <a:lvl3pPr marL="914400" indent="0">
-              <a:buNone/>
-              <a:defRPr sz="1800" b="1">
+            <a:lvl3pPr marL="685800" indent="0">
+              <a:buNone/>
+              <a:defRPr sz="1350" b="1">
                 <a:solidFill>
                   <a:srgbClr val="111111"/>
                 </a:solidFill>
               </a:defRPr>
             </a:lvl3pPr>
-            <a:lvl4pPr marL="1371600" indent="0">
-              <a:buNone/>
-              <a:defRPr sz="1600" b="1">
+            <a:lvl4pPr marL="1028700" indent="0">
+              <a:buNone/>
+              <a:defRPr sz="1200" b="1">
                 <a:solidFill>
                   <a:srgbClr val="111111"/>
                 </a:solidFill>
               </a:defRPr>
             </a:lvl4pPr>
-            <a:lvl5pPr marL="1828800" indent="0">
-              <a:buNone/>
-              <a:defRPr sz="1600" b="1">
+            <a:lvl5pPr marL="1371600" indent="0">
+              <a:buNone/>
+              <a:defRPr sz="1200" b="1">
                 <a:solidFill>
                   <a:srgbClr val="111111"/>
                 </a:solidFill>
               </a:defRPr>
             </a:lvl5pPr>
-            <a:lvl6pPr marL="2286000" indent="0">
-              <a:buNone/>
-              <a:defRPr sz="1600" b="1">
+            <a:lvl6pPr marL="1714500" indent="0">
+              <a:buNone/>
+              <a:defRPr sz="1200" b="1">
                 <a:solidFill>
                   <a:srgbClr val="111111"/>
                 </a:solidFill>
               </a:defRPr>
             </a:lvl6pPr>
-            <a:lvl7pPr marL="2743200" indent="0">
-              <a:buNone/>
-              <a:defRPr sz="1600" b="1">
+            <a:lvl7pPr marL="2057400" indent="0">
+              <a:buNone/>
+              <a:defRPr sz="1200" b="1">
                 <a:solidFill>
                   <a:srgbClr val="111111"/>
                 </a:solidFill>
               </a:defRPr>
             </a:lvl7pPr>
-            <a:lvl8pPr marL="3200400" indent="0">
-              <a:buNone/>
-              <a:defRPr sz="1600" b="1">
+            <a:lvl8pPr marL="2400300" indent="0">
+              <a:buNone/>
+              <a:defRPr sz="1200" b="1">
                 <a:solidFill>
                   <a:srgbClr val="111111"/>
                 </a:solidFill>
               </a:defRPr>
             </a:lvl8pPr>
-            <a:lvl9pPr marL="3657600" indent="0">
-              <a:buNone/>
-              <a:defRPr sz="1600" b="1">
+            <a:lvl9pPr marL="2743200" indent="0">
+              <a:buNone/>
+              <a:defRPr sz="1200" b="1">
                 <a:solidFill>
                   <a:srgbClr val="111111"/>
                 </a:solidFill>
@@ -2201,7 +2326,7 @@
           <a:p>
             <a:pPr lvl="0"/>
             <a:r>
-              <a:rPr lang="en-US" smtClean="0">
+              <a:rPr lang="en-US">
                 <a:solidFill>
                   <a:srgbClr val="111111"/>
                 </a:solidFill>
@@ -2223,71 +2348,71 @@
         </p:nvSpPr>
         <p:spPr>
           <a:xfrm>
-            <a:off x="457200" y="2174875"/>
-            <a:ext cx="4040188" cy="3951288"/>
+            <a:off x="457200" y="1631156"/>
+            <a:ext cx="4040188" cy="2963466"/>
           </a:xfrm>
         </p:spPr>
         <p:txBody>
           <a:bodyPr/>
           <a:lstStyle>
             <a:lvl1pPr>
-              <a:defRPr sz="2400">
+              <a:defRPr sz="1800">
                 <a:solidFill>
                   <a:srgbClr val="111111"/>
                 </a:solidFill>
               </a:defRPr>
             </a:lvl1pPr>
             <a:lvl2pPr>
-              <a:defRPr sz="2000">
+              <a:defRPr sz="1500">
                 <a:solidFill>
                   <a:srgbClr val="111111"/>
                 </a:solidFill>
               </a:defRPr>
             </a:lvl2pPr>
             <a:lvl3pPr>
-              <a:defRPr sz="1800">
+              <a:defRPr sz="1350">
                 <a:solidFill>
                   <a:srgbClr val="111111"/>
                 </a:solidFill>
               </a:defRPr>
             </a:lvl3pPr>
             <a:lvl4pPr>
-              <a:defRPr sz="1600">
+              <a:defRPr sz="1200">
                 <a:solidFill>
                   <a:srgbClr val="111111"/>
                 </a:solidFill>
               </a:defRPr>
             </a:lvl4pPr>
             <a:lvl5pPr>
-              <a:defRPr sz="1600">
+              <a:defRPr sz="1200">
                 <a:solidFill>
                   <a:srgbClr val="111111"/>
                 </a:solidFill>
               </a:defRPr>
             </a:lvl5pPr>
             <a:lvl6pPr>
-              <a:defRPr sz="1600">
+              <a:defRPr sz="1200">
                 <a:solidFill>
                   <a:srgbClr val="111111"/>
                 </a:solidFill>
               </a:defRPr>
             </a:lvl6pPr>
             <a:lvl7pPr>
-              <a:defRPr sz="1600">
+              <a:defRPr sz="1200">
                 <a:solidFill>
                   <a:srgbClr val="111111"/>
                 </a:solidFill>
               </a:defRPr>
             </a:lvl7pPr>
             <a:lvl8pPr>
-              <a:defRPr sz="1600">
+              <a:defRPr sz="1200">
                 <a:solidFill>
                   <a:srgbClr val="111111"/>
                 </a:solidFill>
               </a:defRPr>
             </a:lvl8pPr>
             <a:lvl9pPr>
-              <a:defRPr sz="1600">
+              <a:defRPr sz="1200">
                 <a:solidFill>
                   <a:srgbClr val="111111"/>
                 </a:solidFill>
@@ -2297,7 +2422,7 @@
           <a:p>
             <a:pPr lvl="0"/>
             <a:r>
-              <a:rPr lang="en-US" smtClean="0">
+              <a:rPr lang="en-US">
                 <a:solidFill>
                   <a:srgbClr val="111111"/>
                 </a:solidFill>
@@ -2308,7 +2433,7 @@
           <a:p>
             <a:pPr lvl="1"/>
             <a:r>
-              <a:rPr lang="en-US" smtClean="0">
+              <a:rPr lang="en-US">
                 <a:solidFill>
                   <a:srgbClr val="111111"/>
                 </a:solidFill>
@@ -2319,7 +2444,7 @@
           <a:p>
             <a:pPr lvl="2"/>
             <a:r>
-              <a:rPr lang="en-US" smtClean="0">
+              <a:rPr lang="en-US">
                 <a:solidFill>
                   <a:srgbClr val="111111"/>
                 </a:solidFill>
@@ -2330,7 +2455,7 @@
           <a:p>
             <a:pPr lvl="3"/>
             <a:r>
-              <a:rPr lang="en-US" smtClean="0">
+              <a:rPr lang="en-US">
                 <a:solidFill>
                   <a:srgbClr val="111111"/>
                 </a:solidFill>
@@ -2341,14 +2466,13 @@
           <a:p>
             <a:pPr lvl="4"/>
             <a:r>
-              <a:rPr lang="en-US" smtClean="0">
+              <a:rPr lang="en-US">
                 <a:solidFill>
                   <a:srgbClr val="111111"/>
                 </a:solidFill>
               </a:rPr>
               <a:t>Fifth level</a:t>
             </a:r>
-            <a:endParaRPr lang="en-US"/>
           </a:p>
         </p:txBody>
       </p:sp>
@@ -2364,8 +2488,8 @@
         </p:nvSpPr>
         <p:spPr>
           <a:xfrm>
-            <a:off x="4645025" y="1535113"/>
-            <a:ext cx="4041775" cy="639762"/>
+            <a:off x="4645026" y="1151335"/>
+            <a:ext cx="4041775" cy="479822"/>
           </a:xfrm>
         </p:spPr>
         <p:txBody>
@@ -2373,71 +2497,71 @@
           <a:lstStyle>
             <a:lvl1pPr marL="0" indent="0">
               <a:buNone/>
-              <a:defRPr sz="2400" b="1">
+              <a:defRPr sz="1800" b="1">
                 <a:solidFill>
                   <a:srgbClr val="111111"/>
                 </a:solidFill>
               </a:defRPr>
             </a:lvl1pPr>
-            <a:lvl2pPr marL="457200" indent="0">
-              <a:buNone/>
-              <a:defRPr sz="2000" b="1">
+            <a:lvl2pPr marL="342900" indent="0">
+              <a:buNone/>
+              <a:defRPr sz="1500" b="1">
                 <a:solidFill>
                   <a:srgbClr val="111111"/>
                 </a:solidFill>
               </a:defRPr>
             </a:lvl2pPr>
-            <a:lvl3pPr marL="914400" indent="0">
-              <a:buNone/>
-              <a:defRPr sz="1800" b="1">
+            <a:lvl3pPr marL="685800" indent="0">
+              <a:buNone/>
+              <a:defRPr sz="1350" b="1">
                 <a:solidFill>
                   <a:srgbClr val="111111"/>
                 </a:solidFill>
               </a:defRPr>
             </a:lvl3pPr>
-            <a:lvl4pPr marL="1371600" indent="0">
-              <a:buNone/>
-              <a:defRPr sz="1600" b="1">
+            <a:lvl4pPr marL="1028700" indent="0">
+              <a:buNone/>
+              <a:defRPr sz="1200" b="1">
                 <a:solidFill>
                   <a:srgbClr val="111111"/>
                 </a:solidFill>
               </a:defRPr>
             </a:lvl4pPr>
-            <a:lvl5pPr marL="1828800" indent="0">
-              <a:buNone/>
-              <a:defRPr sz="1600" b="1">
+            <a:lvl5pPr marL="1371600" indent="0">
+              <a:buNone/>
+              <a:defRPr sz="1200" b="1">
                 <a:solidFill>
                   <a:srgbClr val="111111"/>
                 </a:solidFill>
               </a:defRPr>
             </a:lvl5pPr>
-            <a:lvl6pPr marL="2286000" indent="0">
-              <a:buNone/>
-              <a:defRPr sz="1600" b="1">
+            <a:lvl6pPr marL="1714500" indent="0">
+              <a:buNone/>
+              <a:defRPr sz="1200" b="1">
                 <a:solidFill>
                   <a:srgbClr val="111111"/>
                 </a:solidFill>
               </a:defRPr>
             </a:lvl6pPr>
-            <a:lvl7pPr marL="2743200" indent="0">
-              <a:buNone/>
-              <a:defRPr sz="1600" b="1">
+            <a:lvl7pPr marL="2057400" indent="0">
+              <a:buNone/>
+              <a:defRPr sz="1200" b="1">
                 <a:solidFill>
                   <a:srgbClr val="111111"/>
                 </a:solidFill>
               </a:defRPr>
             </a:lvl7pPr>
-            <a:lvl8pPr marL="3200400" indent="0">
-              <a:buNone/>
-              <a:defRPr sz="1600" b="1">
+            <a:lvl8pPr marL="2400300" indent="0">
+              <a:buNone/>
+              <a:defRPr sz="1200" b="1">
                 <a:solidFill>
                   <a:srgbClr val="111111"/>
                 </a:solidFill>
               </a:defRPr>
             </a:lvl8pPr>
-            <a:lvl9pPr marL="3657600" indent="0">
-              <a:buNone/>
-              <a:defRPr sz="1600" b="1">
+            <a:lvl9pPr marL="2743200" indent="0">
+              <a:buNone/>
+              <a:defRPr sz="1200" b="1">
                 <a:solidFill>
                   <a:srgbClr val="111111"/>
                 </a:solidFill>
@@ -2447,7 +2571,7 @@
           <a:p>
             <a:pPr lvl="0"/>
             <a:r>
-              <a:rPr lang="en-US" smtClean="0">
+              <a:rPr lang="en-US">
                 <a:solidFill>
                   <a:srgbClr val="111111"/>
                 </a:solidFill>
@@ -2469,71 +2593,71 @@
         </p:nvSpPr>
         <p:spPr>
           <a:xfrm>
-            <a:off x="4645025" y="2174875"/>
-            <a:ext cx="4041775" cy="3951288"/>
+            <a:off x="4645026" y="1631156"/>
+            <a:ext cx="4041775" cy="2963466"/>
           </a:xfrm>
         </p:spPr>
         <p:txBody>
           <a:bodyPr/>
           <a:lstStyle>
             <a:lvl1pPr>
-              <a:defRPr sz="2400">
+              <a:defRPr sz="1800">
                 <a:solidFill>
                   <a:srgbClr val="111111"/>
                 </a:solidFill>
               </a:defRPr>
             </a:lvl1pPr>
             <a:lvl2pPr>
-              <a:defRPr sz="2000">
+              <a:defRPr sz="1500">
                 <a:solidFill>
                   <a:srgbClr val="111111"/>
                 </a:solidFill>
               </a:defRPr>
             </a:lvl2pPr>
             <a:lvl3pPr>
-              <a:defRPr sz="1800">
+              <a:defRPr sz="1350">
                 <a:solidFill>
                   <a:srgbClr val="111111"/>
                 </a:solidFill>
               </a:defRPr>
             </a:lvl3pPr>
             <a:lvl4pPr>
-              <a:defRPr sz="1600">
+              <a:defRPr sz="1200">
                 <a:solidFill>
                   <a:srgbClr val="111111"/>
                 </a:solidFill>
               </a:defRPr>
             </a:lvl4pPr>
             <a:lvl5pPr>
-              <a:defRPr sz="1600">
+              <a:defRPr sz="1200">
                 <a:solidFill>
                   <a:srgbClr val="111111"/>
                 </a:solidFill>
               </a:defRPr>
             </a:lvl5pPr>
             <a:lvl6pPr>
-              <a:defRPr sz="1600">
+              <a:defRPr sz="1200">
                 <a:solidFill>
                   <a:srgbClr val="111111"/>
                 </a:solidFill>
               </a:defRPr>
             </a:lvl6pPr>
             <a:lvl7pPr>
-              <a:defRPr sz="1600">
+              <a:defRPr sz="1200">
                 <a:solidFill>
                   <a:srgbClr val="111111"/>
                 </a:solidFill>
               </a:defRPr>
             </a:lvl7pPr>
             <a:lvl8pPr>
-              <a:defRPr sz="1600">
+              <a:defRPr sz="1200">
                 <a:solidFill>
                   <a:srgbClr val="111111"/>
                 </a:solidFill>
               </a:defRPr>
             </a:lvl8pPr>
             <a:lvl9pPr>
-              <a:defRPr sz="1600">
+              <a:defRPr sz="1200">
                 <a:solidFill>
                   <a:srgbClr val="111111"/>
                 </a:solidFill>
@@ -2543,7 +2667,7 @@
           <a:p>
             <a:pPr lvl="0"/>
             <a:r>
-              <a:rPr lang="en-US" smtClean="0">
+              <a:rPr lang="en-US">
                 <a:solidFill>
                   <a:srgbClr val="111111"/>
                 </a:solidFill>
@@ -2554,7 +2678,7 @@
           <a:p>
             <a:pPr lvl="1"/>
             <a:r>
-              <a:rPr lang="en-US" smtClean="0">
+              <a:rPr lang="en-US">
                 <a:solidFill>
                   <a:srgbClr val="111111"/>
                 </a:solidFill>
@@ -2565,7 +2689,7 @@
           <a:p>
             <a:pPr lvl="2"/>
             <a:r>
-              <a:rPr lang="en-US" smtClean="0">
+              <a:rPr lang="en-US">
                 <a:solidFill>
                   <a:srgbClr val="111111"/>
                 </a:solidFill>
@@ -2576,7 +2700,7 @@
           <a:p>
             <a:pPr lvl="3"/>
             <a:r>
-              <a:rPr lang="en-US" smtClean="0">
+              <a:rPr lang="en-US">
                 <a:solidFill>
                   <a:srgbClr val="111111"/>
                 </a:solidFill>
@@ -2587,14 +2711,13 @@
           <a:p>
             <a:pPr lvl="4"/>
             <a:r>
-              <a:rPr lang="en-US" smtClean="0">
+              <a:rPr lang="en-US">
                 <a:solidFill>
                   <a:srgbClr val="111111"/>
                 </a:solidFill>
               </a:rPr>
               <a:t>Fifth level</a:t>
             </a:r>
-            <a:endParaRPr lang="en-US"/>
           </a:p>
         </p:txBody>
       </p:sp>
@@ -2613,15 +2736,19 @@
           <a:bodyPr/>
           <a:lstStyle/>
           <a:p>
-            <a:fld id="{5BCAD085-E8A6-8845-BD4E-CB4CCA059FC4}" type="datetimeFigureOut">
+            <a:fld id="{241EB5C9-1307-BA42-ABA2-0BC069CD8E7F}" type="datetimeFigureOut">
               <a:rPr lang="en-US" smtClean="0">
                 <a:solidFill>
                   <a:srgbClr val="111111"/>
                 </a:solidFill>
               </a:rPr>
-              <a:t>1/27/13</a:t>
+              <a:t>1/2/22</a:t>
             </a:fld>
-            <a:endParaRPr lang="en-US"/>
+            <a:endParaRPr lang="en-US">
+              <a:solidFill>
+                <a:srgbClr val="111111"/>
+              </a:solidFill>
+            </a:endParaRPr>
           </a:p>
         </p:txBody>
       </p:sp>
@@ -2640,7 +2767,11 @@
           <a:bodyPr/>
           <a:lstStyle/>
           <a:p>
-            <a:endParaRPr lang="en-US"/>
+            <a:endParaRPr lang="en-US">
+              <a:solidFill>
+                <a:srgbClr val="111111"/>
+              </a:solidFill>
+            </a:endParaRPr>
           </a:p>
         </p:txBody>
       </p:sp>
@@ -2659,7 +2790,7 @@
           <a:bodyPr/>
           <a:lstStyle/>
           <a:p>
-            <a:fld id="{C1FF6DA9-008F-8B48-92A6-B652298478BF}" type="slidenum">
+            <a:fld id="{C5EF2332-01BF-834F-8236-50238282D533}" type="slidenum">
               <a:rPr lang="en-US" smtClean="0">
                 <a:solidFill>
                   <a:srgbClr val="111111"/>
@@ -2667,14 +2798,18 @@
               </a:rPr>
               <a:t>‹#›</a:t>
             </a:fld>
-            <a:endParaRPr lang="en-US"/>
+            <a:endParaRPr lang="en-US">
+              <a:solidFill>
+                <a:srgbClr val="111111"/>
+              </a:solidFill>
+            </a:endParaRPr>
           </a:p>
         </p:txBody>
       </p:sp>
     </p:spTree>
     <p:extLst>
       <p:ext uri="{BB962C8B-B14F-4D97-AF65-F5344CB8AC3E}">
-        <p14:creationId xmlns:p14="http://schemas.microsoft.com/office/powerpoint/2010/main" val="990158736"/>
+        <p14:creationId xmlns:p14="http://schemas.microsoft.com/office/powerpoint/2010/main" val="2535793967"/>
       </p:ext>
     </p:extLst>
   </p:cSld>
@@ -2717,14 +2852,13 @@
           <a:lstStyle/>
           <a:p>
             <a:r>
-              <a:rPr lang="en-US" smtClean="0">
+              <a:rPr lang="en-US">
                 <a:solidFill>
                   <a:srgbClr val="111111"/>
                 </a:solidFill>
               </a:rPr>
               <a:t>Click to edit Master title style</a:t>
             </a:r>
-            <a:endParaRPr lang="en-US"/>
           </a:p>
         </p:txBody>
       </p:sp>
@@ -2743,15 +2877,19 @@
           <a:bodyPr/>
           <a:lstStyle/>
           <a:p>
-            <a:fld id="{5BCAD085-E8A6-8845-BD4E-CB4CCA059FC4}" type="datetimeFigureOut">
+            <a:fld id="{241EB5C9-1307-BA42-ABA2-0BC069CD8E7F}" type="datetimeFigureOut">
               <a:rPr lang="en-US" smtClean="0">
                 <a:solidFill>
                   <a:srgbClr val="111111"/>
                 </a:solidFill>
               </a:rPr>
-              <a:t>1/27/13</a:t>
+              <a:t>1/2/22</a:t>
             </a:fld>
-            <a:endParaRPr lang="en-US"/>
+            <a:endParaRPr lang="en-US">
+              <a:solidFill>
+                <a:srgbClr val="111111"/>
+              </a:solidFill>
+            </a:endParaRPr>
           </a:p>
         </p:txBody>
       </p:sp>
@@ -2770,7 +2908,11 @@
           <a:bodyPr/>
           <a:lstStyle/>
           <a:p>
-            <a:endParaRPr lang="en-US"/>
+            <a:endParaRPr lang="en-US">
+              <a:solidFill>
+                <a:srgbClr val="111111"/>
+              </a:solidFill>
+            </a:endParaRPr>
           </a:p>
         </p:txBody>
       </p:sp>
@@ -2789,7 +2931,7 @@
           <a:bodyPr/>
           <a:lstStyle/>
           <a:p>
-            <a:fld id="{C1FF6DA9-008F-8B48-92A6-B652298478BF}" type="slidenum">
+            <a:fld id="{C5EF2332-01BF-834F-8236-50238282D533}" type="slidenum">
               <a:rPr lang="en-US" smtClean="0">
                 <a:solidFill>
                   <a:srgbClr val="111111"/>
@@ -2797,14 +2939,18 @@
               </a:rPr>
               <a:t>‹#›</a:t>
             </a:fld>
-            <a:endParaRPr lang="en-US"/>
+            <a:endParaRPr lang="en-US">
+              <a:solidFill>
+                <a:srgbClr val="111111"/>
+              </a:solidFill>
+            </a:endParaRPr>
           </a:p>
         </p:txBody>
       </p:sp>
     </p:spTree>
     <p:extLst>
       <p:ext uri="{BB962C8B-B14F-4D97-AF65-F5344CB8AC3E}">
-        <p14:creationId xmlns:p14="http://schemas.microsoft.com/office/powerpoint/2010/main" val="727027711"/>
+        <p14:creationId xmlns:p14="http://schemas.microsoft.com/office/powerpoint/2010/main" val="3472721253"/>
       </p:ext>
     </p:extLst>
   </p:cSld>
@@ -2846,15 +2992,19 @@
           <a:bodyPr/>
           <a:lstStyle/>
           <a:p>
-            <a:fld id="{5BCAD085-E8A6-8845-BD4E-CB4CCA059FC4}" type="datetimeFigureOut">
+            <a:fld id="{241EB5C9-1307-BA42-ABA2-0BC069CD8E7F}" type="datetimeFigureOut">
               <a:rPr lang="en-US" smtClean="0">
                 <a:solidFill>
                   <a:srgbClr val="111111"/>
                 </a:solidFill>
               </a:rPr>
-              <a:t>1/27/13</a:t>
+              <a:t>1/2/22</a:t>
             </a:fld>
-            <a:endParaRPr lang="en-US"/>
+            <a:endParaRPr lang="en-US">
+              <a:solidFill>
+                <a:srgbClr val="111111"/>
+              </a:solidFill>
+            </a:endParaRPr>
           </a:p>
         </p:txBody>
       </p:sp>
@@ -2873,7 +3023,11 @@
           <a:bodyPr/>
           <a:lstStyle/>
           <a:p>
-            <a:endParaRPr lang="en-US"/>
+            <a:endParaRPr lang="en-US">
+              <a:solidFill>
+                <a:srgbClr val="111111"/>
+              </a:solidFill>
+            </a:endParaRPr>
           </a:p>
         </p:txBody>
       </p:sp>
@@ -2892,7 +3046,7 @@
           <a:bodyPr/>
           <a:lstStyle/>
           <a:p>
-            <a:fld id="{C1FF6DA9-008F-8B48-92A6-B652298478BF}" type="slidenum">
+            <a:fld id="{C5EF2332-01BF-834F-8236-50238282D533}" type="slidenum">
               <a:rPr lang="en-US" smtClean="0">
                 <a:solidFill>
                   <a:srgbClr val="111111"/>
@@ -2900,14 +3054,18 @@
               </a:rPr>
               <a:t>‹#›</a:t>
             </a:fld>
-            <a:endParaRPr lang="en-US"/>
+            <a:endParaRPr lang="en-US">
+              <a:solidFill>
+                <a:srgbClr val="111111"/>
+              </a:solidFill>
+            </a:endParaRPr>
           </a:p>
         </p:txBody>
       </p:sp>
     </p:spTree>
     <p:extLst>
       <p:ext uri="{BB962C8B-B14F-4D97-AF65-F5344CB8AC3E}">
-        <p14:creationId xmlns:p14="http://schemas.microsoft.com/office/powerpoint/2010/main" val="1212999818"/>
+        <p14:creationId xmlns:p14="http://schemas.microsoft.com/office/powerpoint/2010/main" val="2130901097"/>
       </p:ext>
     </p:extLst>
   </p:cSld>
@@ -2946,15 +3104,15 @@
         </p:nvSpPr>
         <p:spPr>
           <a:xfrm>
-            <a:off x="457200" y="273050"/>
-            <a:ext cx="3008313" cy="1162050"/>
+            <a:off x="457201" y="204787"/>
+            <a:ext cx="3008313" cy="871538"/>
           </a:xfrm>
         </p:spPr>
         <p:txBody>
           <a:bodyPr anchor="b"/>
           <a:lstStyle>
             <a:lvl1pPr algn="l">
-              <a:defRPr sz="2000" b="1">
+              <a:defRPr sz="1500" b="1">
                 <a:solidFill>
                   <a:srgbClr val="111111"/>
                 </a:solidFill>
@@ -2963,14 +3121,13 @@
           </a:lstStyle>
           <a:p>
             <a:r>
-              <a:rPr lang="en-US" smtClean="0">
+              <a:rPr lang="en-US">
                 <a:solidFill>
                   <a:srgbClr val="111111"/>
                 </a:solidFill>
               </a:rPr>
               <a:t>Click to edit Master title style</a:t>
             </a:r>
-            <a:endParaRPr lang="en-US"/>
           </a:p>
         </p:txBody>
       </p:sp>
@@ -2986,71 +3143,71 @@
         </p:nvSpPr>
         <p:spPr>
           <a:xfrm>
-            <a:off x="3575050" y="273050"/>
-            <a:ext cx="5111750" cy="5853113"/>
+            <a:off x="3575050" y="204788"/>
+            <a:ext cx="5111750" cy="4389835"/>
           </a:xfrm>
         </p:spPr>
         <p:txBody>
           <a:bodyPr/>
           <a:lstStyle>
             <a:lvl1pPr>
-              <a:defRPr sz="3200">
+              <a:defRPr sz="2400">
                 <a:solidFill>
                   <a:srgbClr val="111111"/>
                 </a:solidFill>
               </a:defRPr>
             </a:lvl1pPr>
             <a:lvl2pPr>
-              <a:defRPr sz="2800">
+              <a:defRPr sz="2100">
                 <a:solidFill>
                   <a:srgbClr val="111111"/>
                 </a:solidFill>
               </a:defRPr>
             </a:lvl2pPr>
             <a:lvl3pPr>
-              <a:defRPr sz="2400">
+              <a:defRPr sz="1800">
                 <a:solidFill>
                   <a:srgbClr val="111111"/>
                 </a:solidFill>
               </a:defRPr>
             </a:lvl3pPr>
             <a:lvl4pPr>
-              <a:defRPr sz="2000">
+              <a:defRPr sz="1500">
                 <a:solidFill>
                   <a:srgbClr val="111111"/>
                 </a:solidFill>
               </a:defRPr>
             </a:lvl4pPr>
             <a:lvl5pPr>
-              <a:defRPr sz="2000">
+              <a:defRPr sz="1500">
                 <a:solidFill>
                   <a:srgbClr val="111111"/>
                 </a:solidFill>
               </a:defRPr>
             </a:lvl5pPr>
             <a:lvl6pPr>
-              <a:defRPr sz="2000">
+              <a:defRPr sz="1500">
                 <a:solidFill>
                   <a:srgbClr val="111111"/>
                 </a:solidFill>
               </a:defRPr>
             </a:lvl6pPr>
             <a:lvl7pPr>
-              <a:defRPr sz="2000">
+              <a:defRPr sz="1500">
                 <a:solidFill>
                   <a:srgbClr val="111111"/>
                 </a:solidFill>
               </a:defRPr>
             </a:lvl7pPr>
             <a:lvl8pPr>
-              <a:defRPr sz="2000">
+              <a:defRPr sz="1500">
                 <a:solidFill>
                   <a:srgbClr val="111111"/>
                 </a:solidFill>
               </a:defRPr>
             </a:lvl8pPr>
             <a:lvl9pPr>
-              <a:defRPr sz="2000">
+              <a:defRPr sz="1500">
                 <a:solidFill>
                   <a:srgbClr val="111111"/>
                 </a:solidFill>
@@ -3060,7 +3217,7 @@
           <a:p>
             <a:pPr lvl="0"/>
             <a:r>
-              <a:rPr lang="en-US" smtClean="0">
+              <a:rPr lang="en-US">
                 <a:solidFill>
                   <a:srgbClr val="111111"/>
                 </a:solidFill>
@@ -3071,7 +3228,7 @@
           <a:p>
             <a:pPr lvl="1"/>
             <a:r>
-              <a:rPr lang="en-US" smtClean="0">
+              <a:rPr lang="en-US">
                 <a:solidFill>
                   <a:srgbClr val="111111"/>
                 </a:solidFill>
@@ -3082,7 +3239,7 @@
           <a:p>
             <a:pPr lvl="2"/>
             <a:r>
-              <a:rPr lang="en-US" smtClean="0">
+              <a:rPr lang="en-US">
                 <a:solidFill>
                   <a:srgbClr val="111111"/>
                 </a:solidFill>
@@ -3093,7 +3250,7 @@
           <a:p>
             <a:pPr lvl="3"/>
             <a:r>
-              <a:rPr lang="en-US" smtClean="0">
+              <a:rPr lang="en-US">
                 <a:solidFill>
                   <a:srgbClr val="111111"/>
                 </a:solidFill>
@@ -3104,14 +3261,13 @@
           <a:p>
             <a:pPr lvl="4"/>
             <a:r>
-              <a:rPr lang="en-US" smtClean="0">
+              <a:rPr lang="en-US">
                 <a:solidFill>
                   <a:srgbClr val="111111"/>
                 </a:solidFill>
               </a:rPr>
               <a:t>Fifth level</a:t>
             </a:r>
-            <a:endParaRPr lang="en-US"/>
           </a:p>
         </p:txBody>
       </p:sp>
@@ -3127,8 +3283,8 @@
         </p:nvSpPr>
         <p:spPr>
           <a:xfrm>
-            <a:off x="457200" y="1435100"/>
-            <a:ext cx="3008313" cy="4691063"/>
+            <a:off x="457201" y="1076326"/>
+            <a:ext cx="3008313" cy="3518297"/>
           </a:xfrm>
         </p:spPr>
         <p:txBody>
@@ -3136,71 +3292,71 @@
           <a:lstStyle>
             <a:lvl1pPr marL="0" indent="0">
               <a:buNone/>
-              <a:defRPr sz="1400">
+              <a:defRPr sz="1050">
                 <a:solidFill>
                   <a:srgbClr val="111111"/>
                 </a:solidFill>
               </a:defRPr>
             </a:lvl1pPr>
-            <a:lvl2pPr marL="457200" indent="0">
-              <a:buNone/>
-              <a:defRPr sz="1200">
+            <a:lvl2pPr marL="342900" indent="0">
+              <a:buNone/>
+              <a:defRPr sz="900">
                 <a:solidFill>
                   <a:srgbClr val="111111"/>
                 </a:solidFill>
               </a:defRPr>
             </a:lvl2pPr>
-            <a:lvl3pPr marL="914400" indent="0">
-              <a:buNone/>
-              <a:defRPr sz="1000">
+            <a:lvl3pPr marL="685800" indent="0">
+              <a:buNone/>
+              <a:defRPr sz="750">
                 <a:solidFill>
                   <a:srgbClr val="111111"/>
                 </a:solidFill>
               </a:defRPr>
             </a:lvl3pPr>
-            <a:lvl4pPr marL="1371600" indent="0">
-              <a:buNone/>
-              <a:defRPr sz="900">
+            <a:lvl4pPr marL="1028700" indent="0">
+              <a:buNone/>
+              <a:defRPr sz="675">
                 <a:solidFill>
                   <a:srgbClr val="111111"/>
                 </a:solidFill>
               </a:defRPr>
             </a:lvl4pPr>
-            <a:lvl5pPr marL="1828800" indent="0">
-              <a:buNone/>
-              <a:defRPr sz="900">
+            <a:lvl5pPr marL="1371600" indent="0">
+              <a:buNone/>
+              <a:defRPr sz="675">
                 <a:solidFill>
                   <a:srgbClr val="111111"/>
                 </a:solidFill>
               </a:defRPr>
             </a:lvl5pPr>
-            <a:lvl6pPr marL="2286000" indent="0">
-              <a:buNone/>
-              <a:defRPr sz="900">
+            <a:lvl6pPr marL="1714500" indent="0">
+              <a:buNone/>
+              <a:defRPr sz="675">
                 <a:solidFill>
                   <a:srgbClr val="111111"/>
                 </a:solidFill>
               </a:defRPr>
             </a:lvl6pPr>
-            <a:lvl7pPr marL="2743200" indent="0">
-              <a:buNone/>
-              <a:defRPr sz="900">
+            <a:lvl7pPr marL="2057400" indent="0">
+              <a:buNone/>
+              <a:defRPr sz="675">
                 <a:solidFill>
                   <a:srgbClr val="111111"/>
                 </a:solidFill>
               </a:defRPr>
             </a:lvl7pPr>
-            <a:lvl8pPr marL="3200400" indent="0">
-              <a:buNone/>
-              <a:defRPr sz="900">
+            <a:lvl8pPr marL="2400300" indent="0">
+              <a:buNone/>
+              <a:defRPr sz="675">
                 <a:solidFill>
                   <a:srgbClr val="111111"/>
                 </a:solidFill>
               </a:defRPr>
             </a:lvl8pPr>
-            <a:lvl9pPr marL="3657600" indent="0">
-              <a:buNone/>
-              <a:defRPr sz="900">
+            <a:lvl9pPr marL="2743200" indent="0">
+              <a:buNone/>
+              <a:defRPr sz="675">
                 <a:solidFill>
                   <a:srgbClr val="111111"/>
                 </a:solidFill>
@@ -3210,7 +3366,7 @@
           <a:p>
             <a:pPr lvl="0"/>
             <a:r>
-              <a:rPr lang="en-US" smtClean="0">
+              <a:rPr lang="en-US">
                 <a:solidFill>
                   <a:srgbClr val="111111"/>
                 </a:solidFill>
@@ -3235,15 +3391,19 @@
           <a:bodyPr/>
           <a:lstStyle/>
           <a:p>
-            <a:fld id="{5BCAD085-E8A6-8845-BD4E-CB4CCA059FC4}" type="datetimeFigureOut">
+            <a:fld id="{241EB5C9-1307-BA42-ABA2-0BC069CD8E7F}" type="datetimeFigureOut">
               <a:rPr lang="en-US" smtClean="0">
                 <a:solidFill>
                   <a:srgbClr val="111111"/>
                 </a:solidFill>
               </a:rPr>
-              <a:t>1/27/13</a:t>
+              <a:t>1/2/22</a:t>
             </a:fld>
-            <a:endParaRPr lang="en-US"/>
+            <a:endParaRPr lang="en-US">
+              <a:solidFill>
+                <a:srgbClr val="111111"/>
+              </a:solidFill>
+            </a:endParaRPr>
           </a:p>
         </p:txBody>
       </p:sp>
@@ -3262,7 +3422,11 @@
           <a:bodyPr/>
           <a:lstStyle/>
           <a:p>
-            <a:endParaRPr lang="en-US"/>
+            <a:endParaRPr lang="en-US">
+              <a:solidFill>
+                <a:srgbClr val="111111"/>
+              </a:solidFill>
+            </a:endParaRPr>
           </a:p>
         </p:txBody>
       </p:sp>
@@ -3281,7 +3445,7 @@
           <a:bodyPr/>
           <a:lstStyle/>
           <a:p>
-            <a:fld id="{C1FF6DA9-008F-8B48-92A6-B652298478BF}" type="slidenum">
+            <a:fld id="{C5EF2332-01BF-834F-8236-50238282D533}" type="slidenum">
               <a:rPr lang="en-US" smtClean="0">
                 <a:solidFill>
                   <a:srgbClr val="111111"/>
@@ -3289,14 +3453,18 @@
               </a:rPr>
               <a:t>‹#›</a:t>
             </a:fld>
-            <a:endParaRPr lang="en-US"/>
+            <a:endParaRPr lang="en-US">
+              <a:solidFill>
+                <a:srgbClr val="111111"/>
+              </a:solidFill>
+            </a:endParaRPr>
           </a:p>
         </p:txBody>
       </p:sp>
     </p:spTree>
     <p:extLst>
       <p:ext uri="{BB962C8B-B14F-4D97-AF65-F5344CB8AC3E}">
-        <p14:creationId xmlns:p14="http://schemas.microsoft.com/office/powerpoint/2010/main" val="1840726560"/>
+        <p14:creationId xmlns:p14="http://schemas.microsoft.com/office/powerpoint/2010/main" val="3540895647"/>
       </p:ext>
     </p:extLst>
   </p:cSld>
@@ -3335,15 +3503,15 @@
         </p:nvSpPr>
         <p:spPr>
           <a:xfrm>
-            <a:off x="1792288" y="4800600"/>
-            <a:ext cx="5486400" cy="566738"/>
+            <a:off x="1792288" y="3600450"/>
+            <a:ext cx="5486400" cy="425054"/>
           </a:xfrm>
         </p:spPr>
         <p:txBody>
           <a:bodyPr anchor="b"/>
           <a:lstStyle>
             <a:lvl1pPr algn="l">
-              <a:defRPr sz="2000" b="1">
+              <a:defRPr sz="1500" b="1">
                 <a:solidFill>
                   <a:srgbClr val="111111"/>
                 </a:solidFill>
@@ -3352,14 +3520,13 @@
           </a:lstStyle>
           <a:p>
             <a:r>
-              <a:rPr lang="en-US" smtClean="0">
+              <a:rPr lang="en-US">
                 <a:solidFill>
                   <a:srgbClr val="111111"/>
                 </a:solidFill>
               </a:rPr>
               <a:t>Click to edit Master title style</a:t>
             </a:r>
-            <a:endParaRPr lang="en-US"/>
           </a:p>
         </p:txBody>
       </p:sp>
@@ -3375,8 +3542,8 @@
         </p:nvSpPr>
         <p:spPr>
           <a:xfrm>
-            <a:off x="1792288" y="612775"/>
-            <a:ext cx="5486400" cy="4114800"/>
+            <a:off x="1792288" y="459581"/>
+            <a:ext cx="5486400" cy="3086100"/>
           </a:xfrm>
         </p:spPr>
         <p:txBody>
@@ -3384,71 +3551,71 @@
           <a:lstStyle>
             <a:lvl1pPr marL="0" indent="0">
               <a:buNone/>
-              <a:defRPr sz="3200">
+              <a:defRPr sz="2400">
                 <a:solidFill>
                   <a:srgbClr val="111111"/>
                 </a:solidFill>
               </a:defRPr>
             </a:lvl1pPr>
-            <a:lvl2pPr marL="457200" indent="0">
-              <a:buNone/>
-              <a:defRPr sz="2800">
+            <a:lvl2pPr marL="342900" indent="0">
+              <a:buNone/>
+              <a:defRPr sz="2100">
                 <a:solidFill>
                   <a:srgbClr val="111111"/>
                 </a:solidFill>
               </a:defRPr>
             </a:lvl2pPr>
-            <a:lvl3pPr marL="914400" indent="0">
-              <a:buNone/>
-              <a:defRPr sz="2400">
+            <a:lvl3pPr marL="685800" indent="0">
+              <a:buNone/>
+              <a:defRPr sz="1800">
                 <a:solidFill>
                   <a:srgbClr val="111111"/>
                 </a:solidFill>
               </a:defRPr>
             </a:lvl3pPr>
-            <a:lvl4pPr marL="1371600" indent="0">
-              <a:buNone/>
-              <a:defRPr sz="2000">
+            <a:lvl4pPr marL="1028700" indent="0">
+              <a:buNone/>
+              <a:defRPr sz="1500">
                 <a:solidFill>
                   <a:srgbClr val="111111"/>
                 </a:solidFill>
               </a:defRPr>
             </a:lvl4pPr>
-            <a:lvl5pPr marL="1828800" indent="0">
-              <a:buNone/>
-              <a:defRPr sz="2000">
+            <a:lvl5pPr marL="1371600" indent="0">
+              <a:buNone/>
+              <a:defRPr sz="1500">
                 <a:solidFill>
                   <a:srgbClr val="111111"/>
                 </a:solidFill>
               </a:defRPr>
             </a:lvl5pPr>
-            <a:lvl6pPr marL="2286000" indent="0">
-              <a:buNone/>
-              <a:defRPr sz="2000">
+            <a:lvl6pPr marL="1714500" indent="0">
+              <a:buNone/>
+              <a:defRPr sz="1500">
                 <a:solidFill>
                   <a:srgbClr val="111111"/>
                 </a:solidFill>
               </a:defRPr>
             </a:lvl6pPr>
-            <a:lvl7pPr marL="2743200" indent="0">
-              <a:buNone/>
-              <a:defRPr sz="2000">
+            <a:lvl7pPr marL="2057400" indent="0">
+              <a:buNone/>
+              <a:defRPr sz="1500">
                 <a:solidFill>
                   <a:srgbClr val="111111"/>
                 </a:solidFill>
               </a:defRPr>
             </a:lvl7pPr>
-            <a:lvl8pPr marL="3200400" indent="0">
-              <a:buNone/>
-              <a:defRPr sz="2000">
+            <a:lvl8pPr marL="2400300" indent="0">
+              <a:buNone/>
+              <a:defRPr sz="1500">
                 <a:solidFill>
                   <a:srgbClr val="111111"/>
                 </a:solidFill>
               </a:defRPr>
             </a:lvl8pPr>
-            <a:lvl9pPr marL="3657600" indent="0">
-              <a:buNone/>
-              <a:defRPr sz="2000">
+            <a:lvl9pPr marL="2743200" indent="0">
+              <a:buNone/>
+              <a:defRPr sz="1500">
                 <a:solidFill>
                   <a:srgbClr val="111111"/>
                 </a:solidFill>
@@ -3456,7 +3623,11 @@
             </a:lvl9pPr>
           </a:lstStyle>
           <a:p>
-            <a:endParaRPr lang="en-US"/>
+            <a:endParaRPr lang="en-US">
+              <a:solidFill>
+                <a:srgbClr val="111111"/>
+              </a:solidFill>
+            </a:endParaRPr>
           </a:p>
         </p:txBody>
       </p:sp>
@@ -3472,8 +3643,8 @@
         </p:nvSpPr>
         <p:spPr>
           <a:xfrm>
-            <a:off x="1792288" y="5367338"/>
-            <a:ext cx="5486400" cy="804862"/>
+            <a:off x="1792288" y="4025503"/>
+            <a:ext cx="5486400" cy="603647"/>
           </a:xfrm>
         </p:spPr>
         <p:txBody>
@@ -3481,71 +3652,71 @@
           <a:lstStyle>
             <a:lvl1pPr marL="0" indent="0">
               <a:buNone/>
-              <a:defRPr sz="1400">
+              <a:defRPr sz="1050">
                 <a:solidFill>
                   <a:srgbClr val="111111"/>
                 </a:solidFill>
               </a:defRPr>
             </a:lvl1pPr>
-            <a:lvl2pPr marL="457200" indent="0">
-              <a:buNone/>
-              <a:defRPr sz="1200">
+            <a:lvl2pPr marL="342900" indent="0">
+              <a:buNone/>
+              <a:defRPr sz="900">
                 <a:solidFill>
                   <a:srgbClr val="111111"/>
                 </a:solidFill>
               </a:defRPr>
             </a:lvl2pPr>
-            <a:lvl3pPr marL="914400" indent="0">
-              <a:buNone/>
-              <a:defRPr sz="1000">
+            <a:lvl3pPr marL="685800" indent="0">
+              <a:buNone/>
+              <a:defRPr sz="750">
                 <a:solidFill>
                   <a:srgbClr val="111111"/>
                 </a:solidFill>
               </a:defRPr>
             </a:lvl3pPr>
-            <a:lvl4pPr marL="1371600" indent="0">
-              <a:buNone/>
-              <a:defRPr sz="900">
+            <a:lvl4pPr marL="1028700" indent="0">
+              <a:buNone/>
+              <a:defRPr sz="675">
                 <a:solidFill>
                   <a:srgbClr val="111111"/>
                 </a:solidFill>
               </a:defRPr>
             </a:lvl4pPr>
-            <a:lvl5pPr marL="1828800" indent="0">
-              <a:buNone/>
-              <a:defRPr sz="900">
+            <a:lvl5pPr marL="1371600" indent="0">
+              <a:buNone/>
+              <a:defRPr sz="675">
                 <a:solidFill>
                   <a:srgbClr val="111111"/>
                 </a:solidFill>
               </a:defRPr>
             </a:lvl5pPr>
-            <a:lvl6pPr marL="2286000" indent="0">
-              <a:buNone/>
-              <a:defRPr sz="900">
+            <a:lvl6pPr marL="1714500" indent="0">
+              <a:buNone/>
+              <a:defRPr sz="675">
                 <a:solidFill>
                   <a:srgbClr val="111111"/>
                 </a:solidFill>
               </a:defRPr>
             </a:lvl6pPr>
-            <a:lvl7pPr marL="2743200" indent="0">
-              <a:buNone/>
-              <a:defRPr sz="900">
+            <a:lvl7pPr marL="2057400" indent="0">
+              <a:buNone/>
+              <a:defRPr sz="675">
                 <a:solidFill>
                   <a:srgbClr val="111111"/>
                 </a:solidFill>
               </a:defRPr>
             </a:lvl7pPr>
-            <a:lvl8pPr marL="3200400" indent="0">
-              <a:buNone/>
-              <a:defRPr sz="900">
+            <a:lvl8pPr marL="2400300" indent="0">
+              <a:buNone/>
+              <a:defRPr sz="675">
                 <a:solidFill>
                   <a:srgbClr val="111111"/>
                 </a:solidFill>
               </a:defRPr>
             </a:lvl8pPr>
-            <a:lvl9pPr marL="3657600" indent="0">
-              <a:buNone/>
-              <a:defRPr sz="900">
+            <a:lvl9pPr marL="2743200" indent="0">
+              <a:buNone/>
+              <a:defRPr sz="675">
                 <a:solidFill>
                   <a:srgbClr val="111111"/>
                 </a:solidFill>
@@ -3555,7 +3726,7 @@
           <a:p>
             <a:pPr lvl="0"/>
             <a:r>
-              <a:rPr lang="en-US" smtClean="0">
+              <a:rPr lang="en-US">
                 <a:solidFill>
                   <a:srgbClr val="111111"/>
                 </a:solidFill>
@@ -3580,15 +3751,19 @@
           <a:bodyPr/>
           <a:lstStyle/>
           <a:p>
-            <a:fld id="{5BCAD085-E8A6-8845-BD4E-CB4CCA059FC4}" type="datetimeFigureOut">
+            <a:fld id="{241EB5C9-1307-BA42-ABA2-0BC069CD8E7F}" type="datetimeFigureOut">
               <a:rPr lang="en-US" smtClean="0">
                 <a:solidFill>
                   <a:srgbClr val="111111"/>
                 </a:solidFill>
               </a:rPr>
-              <a:t>1/27/13</a:t>
+              <a:t>1/2/22</a:t>
             </a:fld>
-            <a:endParaRPr lang="en-US"/>
+            <a:endParaRPr lang="en-US">
+              <a:solidFill>
+                <a:srgbClr val="111111"/>
+              </a:solidFill>
+            </a:endParaRPr>
           </a:p>
         </p:txBody>
       </p:sp>
@@ -3607,7 +3782,11 @@
           <a:bodyPr/>
           <a:lstStyle/>
           <a:p>
-            <a:endParaRPr lang="en-US"/>
+            <a:endParaRPr lang="en-US">
+              <a:solidFill>
+                <a:srgbClr val="111111"/>
+              </a:solidFill>
+            </a:endParaRPr>
           </a:p>
         </p:txBody>
       </p:sp>
@@ -3626,7 +3805,7 @@
           <a:bodyPr/>
           <a:lstStyle/>
           <a:p>
-            <a:fld id="{C1FF6DA9-008F-8B48-92A6-B652298478BF}" type="slidenum">
+            <a:fld id="{C5EF2332-01BF-834F-8236-50238282D533}" type="slidenum">
               <a:rPr lang="en-US" smtClean="0">
                 <a:solidFill>
                   <a:srgbClr val="111111"/>
@@ -3634,14 +3813,18 @@
               </a:rPr>
               <a:t>‹#›</a:t>
             </a:fld>
-            <a:endParaRPr lang="en-US"/>
+            <a:endParaRPr lang="en-US">
+              <a:solidFill>
+                <a:srgbClr val="111111"/>
+              </a:solidFill>
+            </a:endParaRPr>
           </a:p>
         </p:txBody>
       </p:sp>
     </p:spTree>
     <p:extLst>
       <p:ext uri="{BB962C8B-B14F-4D97-AF65-F5344CB8AC3E}">
-        <p14:creationId xmlns:p14="http://schemas.microsoft.com/office/powerpoint/2010/main" val="3889236939"/>
+        <p14:creationId xmlns:p14="http://schemas.microsoft.com/office/powerpoint/2010/main" val="3566899855"/>
       </p:ext>
     </p:extLst>
   </p:cSld>
@@ -3655,12 +3838,9 @@
 <p:sldMaster xmlns:a="http://schemas.openxmlformats.org/drawingml/2006/main" xmlns:p="http://schemas.openxmlformats.org/presentationml/2006/main" xmlns:r="http://schemas.openxmlformats.org/officeDocument/2006/relationships">
   <p:cSld>
     <p:bg>
-      <p:bgPr>
-        <a:solidFill>
-          <a:srgbClr val="FFFFFF"/>
-        </a:solidFill>
-        <a:effectLst/>
-      </p:bgPr>
+      <p:bgRef idx="1001">
+        <a:schemeClr val="bg1"/>
+      </p:bgRef>
     </p:bg>
     <p:spTree>
       <p:nvGrpSpPr>
@@ -3688,8 +3868,8 @@
         </p:nvSpPr>
         <p:spPr>
           <a:xfrm>
-            <a:off x="457200" y="274638"/>
-            <a:ext cx="8229600" cy="1143000"/>
+            <a:off x="457200" y="205979"/>
+            <a:ext cx="8229600" cy="857250"/>
           </a:xfrm>
           <a:prstGeom prst="rect">
             <a:avLst/>
@@ -3702,14 +3882,13 @@
           <a:lstStyle/>
           <a:p>
             <a:r>
-              <a:rPr lang="en-US" smtClean="0">
+              <a:rPr lang="en-US">
                 <a:solidFill>
                   <a:srgbClr val="111111"/>
                 </a:solidFill>
               </a:rPr>
               <a:t>Click to edit Master title style</a:t>
             </a:r>
-            <a:endParaRPr lang="en-US"/>
           </a:p>
         </p:txBody>
       </p:sp>
@@ -3725,8 +3904,8 @@
         </p:nvSpPr>
         <p:spPr>
           <a:xfrm>
-            <a:off x="457200" y="1600200"/>
-            <a:ext cx="8229600" cy="4525963"/>
+            <a:off x="457200" y="1200151"/>
+            <a:ext cx="8229600" cy="3394472"/>
           </a:xfrm>
           <a:prstGeom prst="rect">
             <a:avLst/>
@@ -3740,7 +3919,7 @@
           <a:p>
             <a:pPr lvl="0"/>
             <a:r>
-              <a:rPr lang="en-US" smtClean="0">
+              <a:rPr lang="en-US">
                 <a:solidFill>
                   <a:srgbClr val="111111"/>
                 </a:solidFill>
@@ -3751,7 +3930,7 @@
           <a:p>
             <a:pPr lvl="1"/>
             <a:r>
-              <a:rPr lang="en-US" smtClean="0">
+              <a:rPr lang="en-US">
                 <a:solidFill>
                   <a:srgbClr val="111111"/>
                 </a:solidFill>
@@ -3762,7 +3941,7 @@
           <a:p>
             <a:pPr lvl="2"/>
             <a:r>
-              <a:rPr lang="en-US" smtClean="0">
+              <a:rPr lang="en-US">
                 <a:solidFill>
                   <a:srgbClr val="111111"/>
                 </a:solidFill>
@@ -3773,7 +3952,7 @@
           <a:p>
             <a:pPr lvl="3"/>
             <a:r>
-              <a:rPr lang="en-US" smtClean="0">
+              <a:rPr lang="en-US">
                 <a:solidFill>
                   <a:srgbClr val="111111"/>
                 </a:solidFill>
@@ -3784,14 +3963,13 @@
           <a:p>
             <a:pPr lvl="4"/>
             <a:r>
-              <a:rPr lang="en-US" smtClean="0">
+              <a:rPr lang="en-US">
                 <a:solidFill>
                   <a:srgbClr val="111111"/>
                 </a:solidFill>
               </a:rPr>
               <a:t>Fifth level</a:t>
             </a:r>
-            <a:endParaRPr lang="en-US"/>
           </a:p>
         </p:txBody>
       </p:sp>
@@ -3807,8 +3985,8 @@
         </p:nvSpPr>
         <p:spPr>
           <a:xfrm>
-            <a:off x="457200" y="6356350"/>
-            <a:ext cx="2133600" cy="365125"/>
+            <a:off x="457200" y="4767263"/>
+            <a:ext cx="2133600" cy="273844"/>
           </a:xfrm>
           <a:prstGeom prst="rect">
             <a:avLst/>
@@ -3818,7 +3996,7 @@
           <a:bodyPr anchor="ctr" bIns="45720" lIns="91440" rIns="91440" rtlCol="0" tIns="45720" vert="horz"/>
           <a:lstStyle>
             <a:lvl1pPr algn="l">
-              <a:defRPr sz="1200">
+              <a:defRPr sz="900">
                 <a:solidFill>
                   <a:srgbClr val="111111"/>
                 </a:solidFill>
@@ -3826,15 +4004,19 @@
             </a:lvl1pPr>
           </a:lstStyle>
           <a:p>
-            <a:fld id="{5BCAD085-E8A6-8845-BD4E-CB4CCA059FC4}" type="datetimeFigureOut">
+            <a:fld id="{241EB5C9-1307-BA42-ABA2-0BC069CD8E7F}" type="datetimeFigureOut">
               <a:rPr lang="en-US" smtClean="0">
                 <a:solidFill>
                   <a:srgbClr val="111111"/>
                 </a:solidFill>
               </a:rPr>
-              <a:t>1/27/13</a:t>
+              <a:t>1/2/22</a:t>
             </a:fld>
-            <a:endParaRPr lang="en-US"/>
+            <a:endParaRPr lang="en-US">
+              <a:solidFill>
+                <a:srgbClr val="111111"/>
+              </a:solidFill>
+            </a:endParaRPr>
           </a:p>
         </p:txBody>
       </p:sp>
@@ -3850,8 +4032,8 @@
         </p:nvSpPr>
         <p:spPr>
           <a:xfrm>
-            <a:off x="3124200" y="6356350"/>
-            <a:ext cx="2895600" cy="365125"/>
+            <a:off x="3124200" y="4767263"/>
+            <a:ext cx="2895600" cy="273844"/>
           </a:xfrm>
           <a:prstGeom prst="rect">
             <a:avLst/>
@@ -3861,7 +4043,7 @@
           <a:bodyPr anchor="ctr" bIns="45720" lIns="91440" rIns="91440" rtlCol="0" tIns="45720" vert="horz"/>
           <a:lstStyle>
             <a:lvl1pPr algn="ctr">
-              <a:defRPr sz="1200">
+              <a:defRPr sz="900">
                 <a:solidFill>
                   <a:srgbClr val="111111"/>
                 </a:solidFill>
@@ -3869,7 +4051,11 @@
             </a:lvl1pPr>
           </a:lstStyle>
           <a:p>
-            <a:endParaRPr lang="en-US"/>
+            <a:endParaRPr lang="en-US">
+              <a:solidFill>
+                <a:srgbClr val="111111"/>
+              </a:solidFill>
+            </a:endParaRPr>
           </a:p>
         </p:txBody>
       </p:sp>
@@ -3885,8 +4071,8 @@
         </p:nvSpPr>
         <p:spPr>
           <a:xfrm>
-            <a:off x="6553200" y="6356350"/>
-            <a:ext cx="2133600" cy="365125"/>
+            <a:off x="6553200" y="4767263"/>
+            <a:ext cx="2133600" cy="273844"/>
           </a:xfrm>
           <a:prstGeom prst="rect">
             <a:avLst/>
@@ -3896,7 +4082,7 @@
           <a:bodyPr anchor="ctr" bIns="45720" lIns="91440" rIns="91440" rtlCol="0" tIns="45720" vert="horz"/>
           <a:lstStyle>
             <a:lvl1pPr algn="r">
-              <a:defRPr sz="1200">
+              <a:defRPr sz="900">
                 <a:solidFill>
                   <a:srgbClr val="111111"/>
                 </a:solidFill>
@@ -3904,7 +4090,7 @@
             </a:lvl1pPr>
           </a:lstStyle>
           <a:p>
-            <a:fld id="{C1FF6DA9-008F-8B48-92A6-B652298478BF}" type="slidenum">
+            <a:fld id="{C5EF2332-01BF-834F-8236-50238282D533}" type="slidenum">
               <a:rPr lang="en-US" smtClean="0">
                 <a:solidFill>
                   <a:srgbClr val="111111"/>
@@ -3912,14 +4098,18 @@
               </a:rPr>
               <a:t>‹#›</a:t>
             </a:fld>
-            <a:endParaRPr lang="en-US"/>
+            <a:endParaRPr lang="en-US">
+              <a:solidFill>
+                <a:srgbClr val="111111"/>
+              </a:solidFill>
+            </a:endParaRPr>
           </a:p>
         </p:txBody>
       </p:sp>
     </p:spTree>
     <p:extLst>
       <p:ext uri="{BB962C8B-B14F-4D97-AF65-F5344CB8AC3E}">
-        <p14:creationId xmlns:p14="http://schemas.microsoft.com/office/powerpoint/2010/main" val="2209977519"/>
+        <p14:creationId xmlns:p14="http://schemas.microsoft.com/office/powerpoint/2010/main" val="3676200875"/>
       </p:ext>
     </p:extLst>
   </p:cSld>
@@ -3939,12 +4129,12 @@
   </p:sldLayoutIdLst>
   <p:txStyles>
     <p:titleStyle>
-      <a:lvl1pPr algn="ctr" defTabSz="457200" eaLnBrk="1" hangingPunct="1" latinLnBrk="0" rtl="0">
+      <a:lvl1pPr algn="ctr" defTabSz="342900" eaLnBrk="1" hangingPunct="1" latinLnBrk="0" rtl="0">
         <a:spcBef>
           <a:spcPct val="0"/>
         </a:spcBef>
         <a:buNone/>
-        <a:defRPr kern="1200" sz="4400">
+        <a:defRPr kern="1200" sz="3300">
           <a:latin typeface="Cambria"/>
           <a:ea typeface="+mj-ea"/>
           <a:cs typeface="+mj-cs"/>
@@ -3955,37 +4145,7 @@
       </a:lvl1pPr>
     </p:titleStyle>
     <p:bodyStyle>
-      <a:lvl1pPr algn="l" defTabSz="457200" eaLnBrk="1" hangingPunct="1" indent="-342900" latinLnBrk="0" marL="342900" rtl="0">
-        <a:spcBef>
-          <a:spcPct val="20000"/>
-        </a:spcBef>
-        <a:buFont typeface="Arial"/>
-        <a:buChar char="•"/>
-        <a:defRPr kern="1200" sz="3200">
-          <a:latin typeface="Cambria"/>
-          <a:ea typeface="+mn-ea"/>
-          <a:cs typeface="+mn-cs"/>
-          <a:solidFill>
-            <a:srgbClr val="111111"/>
-          </a:solidFill>
-        </a:defRPr>
-      </a:lvl1pPr>
-      <a:lvl2pPr algn="l" defTabSz="457200" eaLnBrk="1" hangingPunct="1" indent="-285750" latinLnBrk="0" marL="742950" rtl="0">
-        <a:spcBef>
-          <a:spcPct val="20000"/>
-        </a:spcBef>
-        <a:buFont typeface="Arial"/>
-        <a:buChar char="–"/>
-        <a:defRPr kern="1200" sz="2800">
-          <a:latin typeface="Cambria"/>
-          <a:ea typeface="+mn-ea"/>
-          <a:cs typeface="+mn-cs"/>
-          <a:solidFill>
-            <a:srgbClr val="111111"/>
-          </a:solidFill>
-        </a:defRPr>
-      </a:lvl2pPr>
-      <a:lvl3pPr algn="l" defTabSz="457200" eaLnBrk="1" hangingPunct="1" indent="-228600" latinLnBrk="0" marL="1143000" rtl="0">
+      <a:lvl1pPr algn="l" defTabSz="342900" eaLnBrk="1" hangingPunct="1" indent="-342900" latinLnBrk="0" marL="342900" rtl="0">
         <a:spcBef>
           <a:spcPct val="20000"/>
         </a:spcBef>
@@ -3999,14 +4159,44 @@
             <a:srgbClr val="111111"/>
           </a:solidFill>
         </a:defRPr>
-      </a:lvl3pPr>
-      <a:lvl4pPr algn="l" defTabSz="457200" eaLnBrk="1" hangingPunct="1" indent="-228600" latinLnBrk="0" marL="1600200" rtl="0">
+      </a:lvl1pPr>
+      <a:lvl2pPr algn="l" defTabSz="342900" eaLnBrk="1" hangingPunct="1" indent="-342900" latinLnBrk="0" marL="685800" rtl="0">
         <a:spcBef>
           <a:spcPct val="20000"/>
         </a:spcBef>
         <a:buFont typeface="Arial"/>
         <a:buChar char="–"/>
-        <a:defRPr kern="1200" sz="2000">
+        <a:defRPr kern="1200" sz="2100">
+          <a:latin typeface="Cambria"/>
+          <a:ea typeface="+mn-ea"/>
+          <a:cs typeface="+mn-cs"/>
+          <a:solidFill>
+            <a:srgbClr val="111111"/>
+          </a:solidFill>
+        </a:defRPr>
+      </a:lvl2pPr>
+      <a:lvl3pPr algn="l" defTabSz="342900" eaLnBrk="1" hangingPunct="1" indent="-342900" latinLnBrk="0" marL="1028700" rtl="0">
+        <a:spcBef>
+          <a:spcPct val="20000"/>
+        </a:spcBef>
+        <a:buFont typeface="Arial"/>
+        <a:buChar char="•"/>
+        <a:defRPr kern="1200" sz="1800">
+          <a:latin typeface="Cambria"/>
+          <a:ea typeface="+mn-ea"/>
+          <a:cs typeface="+mn-cs"/>
+          <a:solidFill>
+            <a:srgbClr val="111111"/>
+          </a:solidFill>
+        </a:defRPr>
+      </a:lvl3pPr>
+      <a:lvl4pPr algn="l" defTabSz="342900" eaLnBrk="1" hangingPunct="1" indent="-342900" latinLnBrk="0" marL="1371600" rtl="0">
+        <a:spcBef>
+          <a:spcPct val="20000"/>
+        </a:spcBef>
+        <a:buFont typeface="Arial"/>
+        <a:buChar char="–"/>
+        <a:defRPr kern="1200" sz="1500">
           <a:latin typeface="Cambria"/>
           <a:ea typeface="+mn-ea"/>
           <a:cs typeface="+mn-cs"/>
@@ -4015,13 +4205,13 @@
           </a:solidFill>
         </a:defRPr>
       </a:lvl4pPr>
-      <a:lvl5pPr algn="l" defTabSz="457200" eaLnBrk="1" hangingPunct="1" indent="-228600" latinLnBrk="0" marL="2057400" rtl="0">
+      <a:lvl5pPr algn="l" defTabSz="342900" eaLnBrk="1" hangingPunct="1" indent="-342900" latinLnBrk="0" marL="1714500" rtl="0">
         <a:spcBef>
           <a:spcPct val="20000"/>
         </a:spcBef>
         <a:buFont typeface="Arial"/>
         <a:buChar char="»"/>
-        <a:defRPr kern="1200" sz="2000">
+        <a:defRPr kern="1200" sz="1500">
           <a:latin typeface="Cambria"/>
           <a:ea typeface="+mn-ea"/>
           <a:cs typeface="+mn-cs"/>
@@ -4030,13 +4220,13 @@
           </a:solidFill>
         </a:defRPr>
       </a:lvl5pPr>
-      <a:lvl6pPr algn="l" defTabSz="457200" eaLnBrk="1" hangingPunct="1" indent="-228600" latinLnBrk="0" marL="2514600" rtl="0">
+      <a:lvl6pPr algn="l" defTabSz="342900" eaLnBrk="1" hangingPunct="1" indent="-342900" latinLnBrk="0" marL="2057400" rtl="0">
         <a:spcBef>
           <a:spcPct val="20000"/>
         </a:spcBef>
         <a:buFont typeface="Arial"/>
         <a:buChar char="•"/>
-        <a:defRPr kern="1200" sz="2000">
+        <a:defRPr kern="1200" sz="1500">
           <a:latin typeface="Cambria"/>
           <a:ea typeface="+mn-ea"/>
           <a:cs typeface="+mn-cs"/>
@@ -4045,13 +4235,13 @@
           </a:solidFill>
         </a:defRPr>
       </a:lvl6pPr>
-      <a:lvl7pPr algn="l" defTabSz="457200" eaLnBrk="1" hangingPunct="1" indent="-228600" latinLnBrk="0" marL="2971800" rtl="0">
+      <a:lvl7pPr algn="l" defTabSz="342900" eaLnBrk="1" hangingPunct="1" indent="-342900" latinLnBrk="0" marL="2400300" rtl="0">
         <a:spcBef>
           <a:spcPct val="20000"/>
         </a:spcBef>
         <a:buFont typeface="Arial"/>
         <a:buChar char="•"/>
-        <a:defRPr kern="1200" sz="2000">
+        <a:defRPr kern="1200" sz="1500">
           <a:latin typeface="Cambria"/>
           <a:ea typeface="+mn-ea"/>
           <a:cs typeface="+mn-cs"/>
@@ -4060,13 +4250,13 @@
           </a:solidFill>
         </a:defRPr>
       </a:lvl7pPr>
-      <a:lvl8pPr algn="l" defTabSz="457200" eaLnBrk="1" hangingPunct="1" indent="-228600" latinLnBrk="0" marL="3429000" rtl="0">
+      <a:lvl8pPr algn="l" defTabSz="342900" eaLnBrk="1" hangingPunct="1" indent="-342900" latinLnBrk="0" marL="2743200" rtl="0">
         <a:spcBef>
           <a:spcPct val="20000"/>
         </a:spcBef>
         <a:buFont typeface="Arial"/>
         <a:buChar char="•"/>
-        <a:defRPr kern="1200" sz="2000">
+        <a:defRPr kern="1200" sz="1500">
           <a:latin typeface="Cambria"/>
           <a:ea typeface="+mn-ea"/>
           <a:cs typeface="+mn-cs"/>
@@ -4075,13 +4265,13 @@
           </a:solidFill>
         </a:defRPr>
       </a:lvl8pPr>
-      <a:lvl9pPr algn="l" defTabSz="457200" eaLnBrk="1" hangingPunct="1" indent="-228600" latinLnBrk="0" marL="3886200" rtl="0">
+      <a:lvl9pPr algn="l" defTabSz="342900" eaLnBrk="1" hangingPunct="1" indent="-342900" latinLnBrk="0" marL="3086100" rtl="0">
         <a:spcBef>
           <a:spcPct val="20000"/>
         </a:spcBef>
         <a:buFont typeface="Arial"/>
         <a:buChar char="•"/>
-        <a:defRPr kern="1200" sz="2000">
+        <a:defRPr kern="1200" sz="1500">
           <a:latin typeface="Cambria"/>
           <a:ea typeface="+mn-ea"/>
           <a:cs typeface="+mn-cs"/>
@@ -4099,8 +4289,8 @@
           </a:solidFill>
         </a:defRPr>
       </a:defPPr>
-      <a:lvl1pPr algn="l" defTabSz="457200" eaLnBrk="1" hangingPunct="1" latinLnBrk="0" marL="0" rtl="0">
-        <a:defRPr kern="1200" sz="1800">
+      <a:lvl1pPr algn="l" defTabSz="342900" eaLnBrk="1" hangingPunct="1" latinLnBrk="0" marL="0" rtl="0">
+        <a:defRPr kern="1200" sz="1350">
           <a:latin typeface="Cambria"/>
           <a:ea typeface="+mn-ea"/>
           <a:cs typeface="+mn-cs"/>
@@ -4109,8 +4299,8 @@
           </a:solidFill>
         </a:defRPr>
       </a:lvl1pPr>
-      <a:lvl2pPr algn="l" defTabSz="457200" eaLnBrk="1" hangingPunct="1" latinLnBrk="0" marL="457200" rtl="0">
-        <a:defRPr kern="1200" sz="1800">
+      <a:lvl2pPr algn="l" defTabSz="342900" eaLnBrk="1" hangingPunct="1" latinLnBrk="0" marL="342900" rtl="0">
+        <a:defRPr kern="1200" sz="1350">
           <a:latin typeface="Cambria"/>
           <a:ea typeface="+mn-ea"/>
           <a:cs typeface="+mn-cs"/>
@@ -4119,8 +4309,8 @@
           </a:solidFill>
         </a:defRPr>
       </a:lvl2pPr>
-      <a:lvl3pPr algn="l" defTabSz="457200" eaLnBrk="1" hangingPunct="1" latinLnBrk="0" marL="914400" rtl="0">
-        <a:defRPr kern="1200" sz="1800">
+      <a:lvl3pPr algn="l" defTabSz="342900" eaLnBrk="1" hangingPunct="1" latinLnBrk="0" marL="685800" rtl="0">
+        <a:defRPr kern="1200" sz="1350">
           <a:latin typeface="Cambria"/>
           <a:ea typeface="+mn-ea"/>
           <a:cs typeface="+mn-cs"/>
@@ -4129,8 +4319,8 @@
           </a:solidFill>
         </a:defRPr>
       </a:lvl3pPr>
-      <a:lvl4pPr algn="l" defTabSz="457200" eaLnBrk="1" hangingPunct="1" latinLnBrk="0" marL="1371600" rtl="0">
-        <a:defRPr kern="1200" sz="1800">
+      <a:lvl4pPr algn="l" defTabSz="342900" eaLnBrk="1" hangingPunct="1" latinLnBrk="0" marL="1028700" rtl="0">
+        <a:defRPr kern="1200" sz="1350">
           <a:latin typeface="Cambria"/>
           <a:ea typeface="+mn-ea"/>
           <a:cs typeface="+mn-cs"/>
@@ -4139,8 +4329,8 @@
           </a:solidFill>
         </a:defRPr>
       </a:lvl4pPr>
-      <a:lvl5pPr algn="l" defTabSz="457200" eaLnBrk="1" hangingPunct="1" latinLnBrk="0" marL="1828800" rtl="0">
-        <a:defRPr kern="1200" sz="1800">
+      <a:lvl5pPr algn="l" defTabSz="342900" eaLnBrk="1" hangingPunct="1" latinLnBrk="0" marL="1371600" rtl="0">
+        <a:defRPr kern="1200" sz="1350">
           <a:latin typeface="Cambria"/>
           <a:ea typeface="+mn-ea"/>
           <a:cs typeface="+mn-cs"/>
@@ -4149,8 +4339,8 @@
           </a:solidFill>
         </a:defRPr>
       </a:lvl5pPr>
-      <a:lvl6pPr algn="l" defTabSz="457200" eaLnBrk="1" hangingPunct="1" latinLnBrk="0" marL="2286000" rtl="0">
-        <a:defRPr kern="1200" sz="1800">
+      <a:lvl6pPr algn="l" defTabSz="342900" eaLnBrk="1" hangingPunct="1" latinLnBrk="0" marL="1714500" rtl="0">
+        <a:defRPr kern="1200" sz="1350">
           <a:latin typeface="Cambria"/>
           <a:ea typeface="+mn-ea"/>
           <a:cs typeface="+mn-cs"/>
@@ -4159,8 +4349,8 @@
           </a:solidFill>
         </a:defRPr>
       </a:lvl6pPr>
-      <a:lvl7pPr algn="l" defTabSz="457200" eaLnBrk="1" hangingPunct="1" latinLnBrk="0" marL="2743200" rtl="0">
-        <a:defRPr kern="1200" sz="1800">
+      <a:lvl7pPr algn="l" defTabSz="342900" eaLnBrk="1" hangingPunct="1" latinLnBrk="0" marL="2057400" rtl="0">
+        <a:defRPr kern="1200" sz="1350">
           <a:latin typeface="Cambria"/>
           <a:ea typeface="+mn-ea"/>
           <a:cs typeface="+mn-cs"/>
@@ -4169,8 +4359,8 @@
           </a:solidFill>
         </a:defRPr>
       </a:lvl7pPr>
-      <a:lvl8pPr algn="l" defTabSz="457200" eaLnBrk="1" hangingPunct="1" latinLnBrk="0" marL="3200400" rtl="0">
-        <a:defRPr kern="1200" sz="1800">
+      <a:lvl8pPr algn="l" defTabSz="342900" eaLnBrk="1" hangingPunct="1" latinLnBrk="0" marL="2400300" rtl="0">
+        <a:defRPr kern="1200" sz="1350">
           <a:latin typeface="Cambria"/>
           <a:ea typeface="+mn-ea"/>
           <a:cs typeface="+mn-cs"/>
@@ -4179,8 +4369,8 @@
           </a:solidFill>
         </a:defRPr>
       </a:lvl8pPr>
-      <a:lvl9pPr algn="l" defTabSz="457200" eaLnBrk="1" hangingPunct="1" latinLnBrk="0" marL="3657600" rtl="0">
-        <a:defRPr kern="1200" sz="1800">
+      <a:lvl9pPr algn="l" defTabSz="342900" eaLnBrk="1" hangingPunct="1" latinLnBrk="0" marL="2743200" rtl="0">
+        <a:defRPr kern="1200" sz="1350">
           <a:latin typeface="Cambria"/>
           <a:ea typeface="+mn-ea"/>
           <a:cs typeface="+mn-cs"/>
@@ -4223,8 +4413,8 @@
         </p:nvSpPr>
         <p:spPr>
           <a:xfrm>
-            <a:off x="685800" y="2130425"/>
-            <a:ext cx="7772400" cy="1470025"/>
+            <a:off x="685800" y="1597819"/>
+            <a:ext cx="7772400" cy="1102519"/>
           </a:xfrm>
         </p:spPr>
         <p:txBody>
@@ -4253,8 +4443,8 @@
         </p:nvSpPr>
         <p:spPr>
           <a:xfrm>
-            <a:off x="1371600" y="3886200"/>
-            <a:ext cx="6400800" cy="1752600"/>
+            <a:off x="1371600" y="2914650"/>
+            <a:ext cx="6400800" cy="1314450"/>
           </a:xfrm>
         </p:spPr>
         <p:txBody>
@@ -4341,8 +4531,8 @@
         </p:nvSpPr>
         <p:spPr>
           <a:xfrm>
-            <a:off x="722313" y="4406900"/>
-            <a:ext cx="7772400" cy="1362075"/>
+            <a:off x="722313" y="3305176"/>
+            <a:ext cx="7772400" cy="1021556"/>
           </a:xfrm>
         </p:spPr>
         <p:txBody>
@@ -4911,7 +5101,7 @@
             </a:r>
           </a:p>
           <a:p>
-            <a:pPr lvl="1" indent="-457200" marL="914400">
+            <a:pPr lvl="1" indent="-342900" marL="685800">
               <a:buAutoNum type="arabicPeriod"/>
             </a:pPr>
             <a:r>
@@ -4920,7 +5110,7 @@
             </a:r>
           </a:p>
           <a:p>
-            <a:pPr lvl="1" indent="-457200" marL="914400">
+            <a:pPr lvl="1" indent="-342900" marL="685800">
               <a:buAutoNum type="arabicPeriod"/>
             </a:pPr>
             <a:r>
@@ -6432,8 +6622,8 @@
         </p:nvSpPr>
         <p:spPr>
           <a:xfrm>
-            <a:off x="722313" y="4406900"/>
-            <a:ext cx="7772400" cy="1362075"/>
+            <a:off x="722313" y="3305176"/>
+            <a:ext cx="7772400" cy="1021556"/>
           </a:xfrm>
         </p:spPr>
         <p:txBody>
@@ -7214,8 +7404,8 @@
           </p:nvPr>
         </p:nvGraphicFramePr>
         <p:xfrm>
-          <a:off x="457200" y="1600200"/>
-          <a:ext cx="8229600" cy="4521200"/>
+          <a:off x="457200" y="1193800"/>
+          <a:ext cx="8229600" cy="3390900"/>
         </p:xfrm>
         <a:graphic>
           <a:graphicData uri="http://schemas.openxmlformats.org/drawingml/2006/table">
@@ -8703,7 +8893,7 @@
           <a:bodyPr/>
           <a:lstStyle/>
           <a:p>
-            <a:pPr lvl="0" indent="-457200" marL="457200">
+            <a:pPr lvl="0" indent="-342900" marL="342900">
               <a:buAutoNum type="arabicPeriod"/>
             </a:pPr>
             <a:r>
@@ -8712,7 +8902,7 @@
             </a:r>
           </a:p>
           <a:p>
-            <a:pPr lvl="0" indent="-457200" marL="457200">
+            <a:pPr lvl="0" indent="-342900" marL="342900">
               <a:buAutoNum type="arabicPeriod"/>
             </a:pPr>
             <a:r>
@@ -8721,7 +8911,7 @@
             </a:r>
           </a:p>
           <a:p>
-            <a:pPr lvl="0" indent="-457200" marL="457200">
+            <a:pPr lvl="0" indent="-342900" marL="342900">
               <a:buAutoNum type="arabicPeriod"/>
             </a:pPr>
             <a:r>
@@ -9236,8 +9426,8 @@
         </p:nvSpPr>
         <p:spPr>
           <a:xfrm>
-            <a:off x="722313" y="4406900"/>
-            <a:ext cx="7772400" cy="1362075"/>
+            <a:off x="722313" y="3305176"/>
+            <a:ext cx="7772400" cy="1021556"/>
           </a:xfrm>
         </p:spPr>
         <p:txBody>
@@ -9325,7 +9515,7 @@
             </a:r>
           </a:p>
           <a:p>
-            <a:pPr lvl="0" indent="-457200" marL="457200">
+            <a:pPr lvl="0" indent="-342900" marL="342900">
               <a:buAutoNum type="arabicPeriod"/>
             </a:pPr>
             <a:r>
@@ -9334,7 +9524,7 @@
             </a:r>
           </a:p>
           <a:p>
-            <a:pPr lvl="0" indent="-457200" marL="457200">
+            <a:pPr lvl="0" indent="-342900" marL="342900">
               <a:buAutoNum type="arabicPeriod"/>
             </a:pPr>
             <a:r>
@@ -9343,7 +9533,7 @@
             </a:r>
           </a:p>
           <a:p>
-            <a:pPr lvl="0" indent="-457200" marL="457200">
+            <a:pPr lvl="0" indent="-342900" marL="342900">
               <a:buAutoNum type="arabicPeriod"/>
             </a:pPr>
             <a:r>
@@ -10688,8 +10878,8 @@
         </p:nvSpPr>
         <p:spPr>
           <a:xfrm>
-            <a:off x="722313" y="4406900"/>
-            <a:ext cx="7772400" cy="1362075"/>
+            <a:off x="722313" y="3305176"/>
+            <a:ext cx="7772400" cy="1021556"/>
           </a:xfrm>
         </p:spPr>
         <p:txBody>
@@ -10992,8 +11182,8 @@
         </p:nvSpPr>
         <p:spPr>
           <a:xfrm>
-            <a:off x="722313" y="4406900"/>
-            <a:ext cx="7772400" cy="1362075"/>
+            <a:off x="722313" y="3305176"/>
+            <a:ext cx="7772400" cy="1021556"/>
           </a:xfrm>
         </p:spPr>
         <p:txBody>
